--- a/tasks/bird_geb_fig3_fig4_effort_analysis/figures/fig_s2_province_model_diagnostics_and_sensitivity.pptx
+++ b/tasks/bird_geb_fig3_fig4_effort_analysis/figures/fig_s2_province_model_diagnostics_and_sensitivity.pptx
@@ -3108,10 +3108,10 @@
         </p:nvGrpSpPr>
         <p:grpSpPr>
           <a:xfrm>
-            <a:off x="1828800" y="1462881"/>
-            <a:ext cx="11430000" cy="7772400"/>
-            <a:chOff x="1828800" y="1462881"/>
-            <a:chExt cx="11430000" cy="7772400"/>
+            <a:off x="1051560" y="1325721"/>
+            <a:ext cx="12984480" cy="8046720"/>
+            <a:chOff x="1051560" y="1325721"/>
+            <a:chExt cx="12984480" cy="8046720"/>
           </a:xfrm>
         </p:grpSpPr>
         <p:sp>
@@ -3122,8 +3122,8 @@
           </p:nvSpPr>
           <p:spPr>
             <a:xfrm>
-              <a:off x="1828800" y="1462881"/>
-              <a:ext cx="11430000" cy="7772400"/>
+              <a:off x="1051560" y="1325721"/>
+              <a:ext cx="12984480" cy="8046720"/>
             </a:xfrm>
             <a:prstGeom prst="rect">
               <a:avLst/>
@@ -3157,8 +3157,8 @@
           </p:nvSpPr>
           <p:spPr>
             <a:xfrm>
-              <a:off x="1828800" y="1462881"/>
-              <a:ext cx="11430000" cy="7772399"/>
+              <a:off x="1051560" y="1325721"/>
+              <a:ext cx="12984480" cy="8046720"/>
             </a:xfrm>
             <a:prstGeom prst="rect">
               <a:avLst/>
@@ -3192,8 +3192,8 @@
           </p:nvSpPr>
           <p:spPr>
             <a:xfrm>
-              <a:off x="1898389" y="1532470"/>
-              <a:ext cx="5682985" cy="3816610"/>
+              <a:off x="1121149" y="1395310"/>
+              <a:ext cx="6459141" cy="3714986"/>
             </a:xfrm>
             <a:prstGeom prst="rect">
               <a:avLst/>
@@ -3203,7 +3203,7 @@
                 <a:alpha val="100000"/>
               </a:srgbClr>
             </a:solidFill>
-            <a:ln w="12934" cap="rnd">
+            <a:ln w="12565" cap="rnd">
               <a:solidFill>
                 <a:srgbClr val="FFFFFF">
                   <a:alpha val="100000"/>
@@ -3227,8 +3227,8 @@
           </p:nvSpPr>
           <p:spPr>
             <a:xfrm>
-              <a:off x="7581374" y="1532470"/>
-              <a:ext cx="5607836" cy="3816610"/>
+              <a:off x="7580290" y="1395310"/>
+              <a:ext cx="6386160" cy="3714986"/>
             </a:xfrm>
             <a:prstGeom prst="rect">
               <a:avLst/>
@@ -3238,7 +3238,7 @@
                 <a:alpha val="100000"/>
               </a:srgbClr>
             </a:solidFill>
-            <a:ln w="12934" cap="rnd">
+            <a:ln w="12565" cap="rnd">
               <a:solidFill>
                 <a:srgbClr val="FFFFFF">
                   <a:alpha val="100000"/>
@@ -3262,8 +3262,8 @@
           </p:nvSpPr>
           <p:spPr>
             <a:xfrm>
-              <a:off x="2440546" y="1734178"/>
-              <a:ext cx="5074401" cy="3233148"/>
+              <a:off x="1648017" y="1799635"/>
+              <a:ext cx="5867744" cy="2939814"/>
             </a:xfrm>
             <a:prstGeom prst="rect">
               <a:avLst/>
@@ -3282,14 +3282,143 @@
         </p:sp>
         <p:sp>
           <p:nvSpPr>
-            <p:cNvPr id="8" name="pt8"/>
-            <p:cNvSpPr/>
-            <p:nvPr/>
-          </p:nvSpPr>
-          <p:spPr>
-            <a:xfrm>
-              <a:off x="4727398" y="3357425"/>
-              <a:ext cx="73633" cy="73633"/>
+            <p:cNvPr id="8" name="pl8"/>
+            <p:cNvSpPr/>
+            <p:nvPr/>
+          </p:nvSpPr>
+          <p:spPr>
+            <a:xfrm>
+              <a:off x="3199285" y="1799635"/>
+              <a:ext cx="0" cy="2939814"/>
+            </a:xfrm>
+            <a:custGeom>
+              <a:avLst/>
+              <a:pathLst>
+                <a:path w="0" h="2939814">
+                  <a:moveTo>
+                    <a:pt x="0" y="2939814"/>
+                  </a:moveTo>
+                  <a:lnTo>
+                    <a:pt x="0" y="0"/>
+                  </a:lnTo>
+                  <a:lnTo>
+                    <a:pt x="0" y="0"/>
+                  </a:lnTo>
+                </a:path>
+              </a:pathLst>
+            </a:custGeom>
+            <a:ln w="8130" cap="flat">
+              <a:solidFill>
+                <a:srgbClr val="B0B0B0">
+                  <a:alpha val="34901"/>
+                </a:srgbClr>
+              </a:solidFill>
+              <a:prstDash val="solid"/>
+              <a:round/>
+            </a:ln>
+          </p:spPr>
+          <p:txBody>
+            <a:bodyPr/>
+            <a:lstStyle/>
+            <a:p/>
+          </p:txBody>
+        </p:sp>
+        <p:sp>
+          <p:nvSpPr>
+            <p:cNvPr id="9" name="pl9"/>
+            <p:cNvSpPr/>
+            <p:nvPr/>
+          </p:nvSpPr>
+          <p:spPr>
+            <a:xfrm>
+              <a:off x="5234184" y="1799635"/>
+              <a:ext cx="0" cy="2939814"/>
+            </a:xfrm>
+            <a:custGeom>
+              <a:avLst/>
+              <a:pathLst>
+                <a:path w="0" h="2939814">
+                  <a:moveTo>
+                    <a:pt x="0" y="2939814"/>
+                  </a:moveTo>
+                  <a:lnTo>
+                    <a:pt x="0" y="0"/>
+                  </a:lnTo>
+                  <a:lnTo>
+                    <a:pt x="0" y="0"/>
+                  </a:lnTo>
+                </a:path>
+              </a:pathLst>
+            </a:custGeom>
+            <a:ln w="8130" cap="flat">
+              <a:solidFill>
+                <a:srgbClr val="B0B0B0">
+                  <a:alpha val="34901"/>
+                </a:srgbClr>
+              </a:solidFill>
+              <a:prstDash val="solid"/>
+              <a:round/>
+            </a:ln>
+          </p:spPr>
+          <p:txBody>
+            <a:bodyPr/>
+            <a:lstStyle/>
+            <a:p/>
+          </p:txBody>
+        </p:sp>
+        <p:sp>
+          <p:nvSpPr>
+            <p:cNvPr id="10" name="pl10"/>
+            <p:cNvSpPr/>
+            <p:nvPr/>
+          </p:nvSpPr>
+          <p:spPr>
+            <a:xfrm>
+              <a:off x="7269083" y="1799635"/>
+              <a:ext cx="0" cy="2939814"/>
+            </a:xfrm>
+            <a:custGeom>
+              <a:avLst/>
+              <a:pathLst>
+                <a:path w="0" h="2939814">
+                  <a:moveTo>
+                    <a:pt x="0" y="2939814"/>
+                  </a:moveTo>
+                  <a:lnTo>
+                    <a:pt x="0" y="0"/>
+                  </a:lnTo>
+                  <a:lnTo>
+                    <a:pt x="0" y="0"/>
+                  </a:lnTo>
+                </a:path>
+              </a:pathLst>
+            </a:custGeom>
+            <a:ln w="8130" cap="flat">
+              <a:solidFill>
+                <a:srgbClr val="B0B0B0">
+                  <a:alpha val="34901"/>
+                </a:srgbClr>
+              </a:solidFill>
+              <a:prstDash val="solid"/>
+              <a:round/>
+            </a:ln>
+          </p:spPr>
+          <p:txBody>
+            <a:bodyPr/>
+            <a:lstStyle/>
+            <a:p/>
+          </p:txBody>
+        </p:sp>
+        <p:sp>
+          <p:nvSpPr>
+            <p:cNvPr id="11" name="pt11"/>
+            <p:cNvSpPr/>
+            <p:nvPr/>
+          </p:nvSpPr>
+          <p:spPr>
+            <a:xfrm>
+              <a:off x="4300990" y="3275102"/>
+              <a:ext cx="67968" cy="67968"/>
             </a:xfrm>
             <a:prstGeom prst="ellipse">
               <a:avLst/>
@@ -3299,7 +3428,7 @@
                 <a:alpha val="90196"/>
               </a:srgbClr>
             </a:solidFill>
-            <a:ln w="8590" cap="rnd">
+            <a:ln w="8345" cap="rnd">
               <a:solidFill>
                 <a:srgbClr val="333333">
                   <a:alpha val="90196"/>
@@ -3317,14 +3446,14 @@
         </p:sp>
         <p:sp>
           <p:nvSpPr>
-            <p:cNvPr id="9" name="pt9"/>
-            <p:cNvSpPr/>
-            <p:nvPr/>
-          </p:nvSpPr>
-          <p:spPr>
-            <a:xfrm>
-              <a:off x="6317461" y="3997067"/>
-              <a:ext cx="73633" cy="73633"/>
+            <p:cNvPr id="12" name="pt12"/>
+            <p:cNvSpPr/>
+            <p:nvPr/>
+          </p:nvSpPr>
+          <p:spPr>
+            <a:xfrm>
+              <a:off x="6139647" y="3856712"/>
+              <a:ext cx="67968" cy="67968"/>
             </a:xfrm>
             <a:prstGeom prst="ellipse">
               <a:avLst/>
@@ -3334,7 +3463,7 @@
                 <a:alpha val="90196"/>
               </a:srgbClr>
             </a:solidFill>
-            <a:ln w="8590" cap="rnd">
+            <a:ln w="8345" cap="rnd">
               <a:solidFill>
                 <a:srgbClr val="333333">
                   <a:alpha val="90196"/>
@@ -3352,14 +3481,14 @@
         </p:sp>
         <p:sp>
           <p:nvSpPr>
-            <p:cNvPr id="10" name="pt10"/>
-            <p:cNvSpPr/>
-            <p:nvPr/>
-          </p:nvSpPr>
-          <p:spPr>
-            <a:xfrm>
-              <a:off x="4817404" y="4208898"/>
-              <a:ext cx="73633" cy="73633"/>
+            <p:cNvPr id="13" name="pt13"/>
+            <p:cNvSpPr/>
+            <p:nvPr/>
+          </p:nvSpPr>
+          <p:spPr>
+            <a:xfrm>
+              <a:off x="4405068" y="4049324"/>
+              <a:ext cx="67968" cy="67968"/>
             </a:xfrm>
             <a:prstGeom prst="ellipse">
               <a:avLst/>
@@ -3369,7 +3498,7 @@
                 <a:alpha val="90196"/>
               </a:srgbClr>
             </a:solidFill>
-            <a:ln w="8590" cap="rnd">
+            <a:ln w="8345" cap="rnd">
               <a:solidFill>
                 <a:srgbClr val="333333">
                   <a:alpha val="90196"/>
@@ -3387,14 +3516,14 @@
         </p:sp>
         <p:sp>
           <p:nvSpPr>
-            <p:cNvPr id="11" name="pt11"/>
-            <p:cNvSpPr/>
-            <p:nvPr/>
-          </p:nvSpPr>
-          <p:spPr>
-            <a:xfrm>
-              <a:off x="4954934" y="4567013"/>
-              <a:ext cx="73633" cy="73633"/>
+            <p:cNvPr id="14" name="pt14"/>
+            <p:cNvSpPr/>
+            <p:nvPr/>
+          </p:nvSpPr>
+          <p:spPr>
+            <a:xfrm>
+              <a:off x="4564100" y="4374948"/>
+              <a:ext cx="67968" cy="67968"/>
             </a:xfrm>
             <a:prstGeom prst="ellipse">
               <a:avLst/>
@@ -3404,7 +3533,7 @@
                 <a:alpha val="90196"/>
               </a:srgbClr>
             </a:solidFill>
-            <a:ln w="8590" cap="rnd">
+            <a:ln w="8345" cap="rnd">
               <a:solidFill>
                 <a:srgbClr val="333333">
                   <a:alpha val="90196"/>
@@ -3422,14 +3551,14 @@
         </p:sp>
         <p:sp>
           <p:nvSpPr>
-            <p:cNvPr id="12" name="pt12"/>
-            <p:cNvSpPr/>
-            <p:nvPr/>
-          </p:nvSpPr>
-          <p:spPr>
-            <a:xfrm>
-              <a:off x="4166904" y="3599899"/>
-              <a:ext cx="73633" cy="73633"/>
+            <p:cNvPr id="15" name="pt15"/>
+            <p:cNvSpPr/>
+            <p:nvPr/>
+          </p:nvSpPr>
+          <p:spPr>
+            <a:xfrm>
+              <a:off x="3652867" y="3495577"/>
+              <a:ext cx="67968" cy="67968"/>
             </a:xfrm>
             <a:prstGeom prst="ellipse">
               <a:avLst/>
@@ -3439,7 +3568,7 @@
                 <a:alpha val="90196"/>
               </a:srgbClr>
             </a:solidFill>
-            <a:ln w="8590" cap="rnd">
+            <a:ln w="8345" cap="rnd">
               <a:solidFill>
                 <a:srgbClr val="333333">
                   <a:alpha val="90196"/>
@@ -3457,14 +3586,14 @@
         </p:sp>
         <p:sp>
           <p:nvSpPr>
-            <p:cNvPr id="13" name="pt13"/>
-            <p:cNvSpPr/>
-            <p:nvPr/>
-          </p:nvSpPr>
-          <p:spPr>
-            <a:xfrm>
-              <a:off x="4808629" y="4783548"/>
-              <a:ext cx="73633" cy="73633"/>
+            <p:cNvPr id="16" name="pt16"/>
+            <p:cNvSpPr/>
+            <p:nvPr/>
+          </p:nvSpPr>
+          <p:spPr>
+            <a:xfrm>
+              <a:off x="4394921" y="4571838"/>
+              <a:ext cx="67968" cy="67968"/>
             </a:xfrm>
             <a:prstGeom prst="ellipse">
               <a:avLst/>
@@ -3474,7 +3603,7 @@
                 <a:alpha val="90196"/>
               </a:srgbClr>
             </a:solidFill>
-            <a:ln w="8590" cap="rnd">
+            <a:ln w="8345" cap="rnd">
               <a:solidFill>
                 <a:srgbClr val="333333">
                   <a:alpha val="90196"/>
@@ -3492,14 +3621,14 @@
         </p:sp>
         <p:sp>
           <p:nvSpPr>
-            <p:cNvPr id="14" name="pt14"/>
-            <p:cNvSpPr/>
-            <p:nvPr/>
-          </p:nvSpPr>
-          <p:spPr>
-            <a:xfrm>
-              <a:off x="4504511" y="3757837"/>
-              <a:ext cx="73633" cy="73633"/>
+            <p:cNvPr id="17" name="pt17"/>
+            <p:cNvSpPr/>
+            <p:nvPr/>
+          </p:nvSpPr>
+          <p:spPr>
+            <a:xfrm>
+              <a:off x="4043256" y="3639186"/>
+              <a:ext cx="67968" cy="67968"/>
             </a:xfrm>
             <a:prstGeom prst="ellipse">
               <a:avLst/>
@@ -3509,7 +3638,7 @@
                 <a:alpha val="90196"/>
               </a:srgbClr>
             </a:solidFill>
-            <a:ln w="8590" cap="rnd">
+            <a:ln w="8345" cap="rnd">
               <a:solidFill>
                 <a:srgbClr val="333333">
                   <a:alpha val="90196"/>
@@ -3527,14 +3656,14 @@
         </p:sp>
         <p:sp>
           <p:nvSpPr>
-            <p:cNvPr id="15" name="pt15"/>
-            <p:cNvSpPr/>
-            <p:nvPr/>
-          </p:nvSpPr>
-          <p:spPr>
-            <a:xfrm>
-              <a:off x="4549934" y="3599108"/>
-              <a:ext cx="73633" cy="73633"/>
+            <p:cNvPr id="18" name="pt18"/>
+            <p:cNvSpPr/>
+            <p:nvPr/>
+          </p:nvSpPr>
+          <p:spPr>
+            <a:xfrm>
+              <a:off x="4095780" y="3494858"/>
+              <a:ext cx="67968" cy="67968"/>
             </a:xfrm>
             <a:prstGeom prst="ellipse">
               <a:avLst/>
@@ -3544,7 +3673,7 @@
                 <a:alpha val="90196"/>
               </a:srgbClr>
             </a:solidFill>
-            <a:ln w="8590" cap="rnd">
+            <a:ln w="8345" cap="rnd">
               <a:solidFill>
                 <a:srgbClr val="333333">
                   <a:alpha val="90196"/>
@@ -3562,14 +3691,14 @@
         </p:sp>
         <p:sp>
           <p:nvSpPr>
-            <p:cNvPr id="16" name="pt16"/>
-            <p:cNvSpPr/>
-            <p:nvPr/>
-          </p:nvSpPr>
-          <p:spPr>
-            <a:xfrm>
-              <a:off x="4861809" y="2486878"/>
-              <a:ext cx="73633" cy="73633"/>
+            <p:cNvPr id="19" name="pt19"/>
+            <p:cNvSpPr/>
+            <p:nvPr/>
+          </p:nvSpPr>
+          <p:spPr>
+            <a:xfrm>
+              <a:off x="4456415" y="2483537"/>
+              <a:ext cx="67968" cy="67968"/>
             </a:xfrm>
             <a:prstGeom prst="ellipse">
               <a:avLst/>
@@ -3579,7 +3708,7 @@
                 <a:alpha val="90196"/>
               </a:srgbClr>
             </a:solidFill>
-            <a:ln w="8590" cap="rnd">
+            <a:ln w="8345" cap="rnd">
               <a:solidFill>
                 <a:srgbClr val="333333">
                   <a:alpha val="90196"/>
@@ -3597,14 +3726,14 @@
         </p:sp>
         <p:sp>
           <p:nvSpPr>
-            <p:cNvPr id="17" name="pt17"/>
-            <p:cNvSpPr/>
-            <p:nvPr/>
-          </p:nvSpPr>
-          <p:spPr>
-            <a:xfrm>
-              <a:off x="4560332" y="4606702"/>
-              <a:ext cx="73633" cy="73633"/>
+            <p:cNvPr id="20" name="pt20"/>
+            <p:cNvSpPr/>
+            <p:nvPr/>
+          </p:nvSpPr>
+          <p:spPr>
+            <a:xfrm>
+              <a:off x="4107804" y="4411036"/>
+              <a:ext cx="67968" cy="67968"/>
             </a:xfrm>
             <a:prstGeom prst="ellipse">
               <a:avLst/>
@@ -3614,7 +3743,7 @@
                 <a:alpha val="90196"/>
               </a:srgbClr>
             </a:solidFill>
-            <a:ln w="8590" cap="rnd">
+            <a:ln w="8345" cap="rnd">
               <a:solidFill>
                 <a:srgbClr val="333333">
                   <a:alpha val="90196"/>
@@ -3632,14 +3761,14 @@
         </p:sp>
         <p:sp>
           <p:nvSpPr>
-            <p:cNvPr id="18" name="pt18"/>
-            <p:cNvSpPr/>
-            <p:nvPr/>
-          </p:nvSpPr>
-          <p:spPr>
-            <a:xfrm>
-              <a:off x="4191124" y="4529498"/>
-              <a:ext cx="73633" cy="73633"/>
+            <p:cNvPr id="21" name="pt21"/>
+            <p:cNvSpPr/>
+            <p:nvPr/>
+          </p:nvSpPr>
+          <p:spPr>
+            <a:xfrm>
+              <a:off x="3680873" y="4340837"/>
+              <a:ext cx="67968" cy="67968"/>
             </a:xfrm>
             <a:prstGeom prst="ellipse">
               <a:avLst/>
@@ -3649,7 +3778,7 @@
                 <a:alpha val="90196"/>
               </a:srgbClr>
             </a:solidFill>
-            <a:ln w="8590" cap="rnd">
+            <a:ln w="8345" cap="rnd">
               <a:solidFill>
                 <a:srgbClr val="333333">
                   <a:alpha val="90196"/>
@@ -3667,14 +3796,14 @@
         </p:sp>
         <p:sp>
           <p:nvSpPr>
-            <p:cNvPr id="19" name="pt19"/>
-            <p:cNvSpPr/>
-            <p:nvPr/>
-          </p:nvSpPr>
-          <p:spPr>
-            <a:xfrm>
-              <a:off x="4670127" y="3604471"/>
-              <a:ext cx="73633" cy="73633"/>
+            <p:cNvPr id="22" name="pt22"/>
+            <p:cNvSpPr/>
+            <p:nvPr/>
+          </p:nvSpPr>
+          <p:spPr>
+            <a:xfrm>
+              <a:off x="4234765" y="3499735"/>
+              <a:ext cx="67968" cy="67968"/>
             </a:xfrm>
             <a:prstGeom prst="ellipse">
               <a:avLst/>
@@ -3684,7 +3813,7 @@
                 <a:alpha val="90196"/>
               </a:srgbClr>
             </a:solidFill>
-            <a:ln w="8590" cap="rnd">
+            <a:ln w="8345" cap="rnd">
               <a:solidFill>
                 <a:srgbClr val="333333">
                   <a:alpha val="90196"/>
@@ -3702,14 +3831,14 @@
         </p:sp>
         <p:sp>
           <p:nvSpPr>
-            <p:cNvPr id="20" name="pt20"/>
-            <p:cNvSpPr/>
-            <p:nvPr/>
-          </p:nvSpPr>
-          <p:spPr>
-            <a:xfrm>
-              <a:off x="4692615" y="3818503"/>
-              <a:ext cx="73633" cy="73633"/>
+            <p:cNvPr id="23" name="pt23"/>
+            <p:cNvSpPr/>
+            <p:nvPr/>
+          </p:nvSpPr>
+          <p:spPr>
+            <a:xfrm>
+              <a:off x="4260769" y="3694348"/>
+              <a:ext cx="67968" cy="67968"/>
             </a:xfrm>
             <a:prstGeom prst="ellipse">
               <a:avLst/>
@@ -3719,7 +3848,7 @@
                 <a:alpha val="90196"/>
               </a:srgbClr>
             </a:solidFill>
-            <a:ln w="8590" cap="rnd">
+            <a:ln w="8345" cap="rnd">
               <a:solidFill>
                 <a:srgbClr val="333333">
                   <a:alpha val="90196"/>
@@ -3737,14 +3866,14 @@
         </p:sp>
         <p:sp>
           <p:nvSpPr>
-            <p:cNvPr id="21" name="pt21"/>
-            <p:cNvSpPr/>
-            <p:nvPr/>
-          </p:nvSpPr>
-          <p:spPr>
-            <a:xfrm>
-              <a:off x="4588144" y="3269710"/>
-              <a:ext cx="73633" cy="73633"/>
+            <p:cNvPr id="24" name="pt24"/>
+            <p:cNvSpPr/>
+            <p:nvPr/>
+          </p:nvSpPr>
+          <p:spPr>
+            <a:xfrm>
+              <a:off x="4139964" y="3195346"/>
+              <a:ext cx="67968" cy="67968"/>
             </a:xfrm>
             <a:prstGeom prst="ellipse">
               <a:avLst/>
@@ -3754,7 +3883,7 @@
                 <a:alpha val="90196"/>
               </a:srgbClr>
             </a:solidFill>
-            <a:ln w="8590" cap="rnd">
+            <a:ln w="8345" cap="rnd">
               <a:solidFill>
                 <a:srgbClr val="333333">
                   <a:alpha val="90196"/>
@@ -3772,14 +3901,14 @@
         </p:sp>
         <p:sp>
           <p:nvSpPr>
-            <p:cNvPr id="22" name="pt22"/>
-            <p:cNvSpPr/>
-            <p:nvPr/>
-          </p:nvSpPr>
-          <p:spPr>
-            <a:xfrm>
-              <a:off x="3335520" y="3886785"/>
-              <a:ext cx="73633" cy="73633"/>
+            <p:cNvPr id="25" name="pt25"/>
+            <p:cNvSpPr/>
+            <p:nvPr/>
+          </p:nvSpPr>
+          <p:spPr>
+            <a:xfrm>
+              <a:off x="2691503" y="3756435"/>
+              <a:ext cx="67968" cy="67968"/>
             </a:xfrm>
             <a:prstGeom prst="ellipse">
               <a:avLst/>
@@ -3789,7 +3918,7 @@
                 <a:alpha val="90196"/>
               </a:srgbClr>
             </a:solidFill>
-            <a:ln w="8590" cap="rnd">
+            <a:ln w="8345" cap="rnd">
               <a:solidFill>
                 <a:srgbClr val="333333">
                   <a:alpha val="90196"/>
@@ -3807,14 +3936,14 @@
         </p:sp>
         <p:sp>
           <p:nvSpPr>
-            <p:cNvPr id="23" name="pt23"/>
-            <p:cNvSpPr/>
-            <p:nvPr/>
-          </p:nvSpPr>
-          <p:spPr>
-            <a:xfrm>
-              <a:off x="5399767" y="4265279"/>
-              <a:ext cx="73633" cy="73633"/>
+            <p:cNvPr id="26" name="pt26"/>
+            <p:cNvSpPr/>
+            <p:nvPr/>
+          </p:nvSpPr>
+          <p:spPr>
+            <a:xfrm>
+              <a:off x="5078479" y="4100589"/>
+              <a:ext cx="67968" cy="67968"/>
             </a:xfrm>
             <a:prstGeom prst="ellipse">
               <a:avLst/>
@@ -3824,7 +3953,7 @@
                 <a:alpha val="90196"/>
               </a:srgbClr>
             </a:solidFill>
-            <a:ln w="8590" cap="rnd">
+            <a:ln w="8345" cap="rnd">
               <a:solidFill>
                 <a:srgbClr val="333333">
                   <a:alpha val="90196"/>
@@ -3842,14 +3971,14 @@
         </p:sp>
         <p:sp>
           <p:nvSpPr>
-            <p:cNvPr id="24" name="pt24"/>
-            <p:cNvSpPr/>
-            <p:nvPr/>
-          </p:nvSpPr>
-          <p:spPr>
-            <a:xfrm>
-              <a:off x="4617675" y="3744668"/>
-              <a:ext cx="73633" cy="73633"/>
+            <p:cNvPr id="27" name="pt27"/>
+            <p:cNvSpPr/>
+            <p:nvPr/>
+          </p:nvSpPr>
+          <p:spPr>
+            <a:xfrm>
+              <a:off x="4174113" y="3627212"/>
+              <a:ext cx="67968" cy="67968"/>
             </a:xfrm>
             <a:prstGeom prst="ellipse">
               <a:avLst/>
@@ -3859,7 +3988,7 @@
                 <a:alpha val="90196"/>
               </a:srgbClr>
             </a:solidFill>
-            <a:ln w="8590" cap="rnd">
+            <a:ln w="8345" cap="rnd">
               <a:solidFill>
                 <a:srgbClr val="333333">
                   <a:alpha val="90196"/>
@@ -3877,14 +4006,14 @@
         </p:sp>
         <p:sp>
           <p:nvSpPr>
-            <p:cNvPr id="25" name="pt25"/>
-            <p:cNvSpPr/>
-            <p:nvPr/>
-          </p:nvSpPr>
-          <p:spPr>
-            <a:xfrm>
-              <a:off x="4601152" y="3940239"/>
-              <a:ext cx="73633" cy="73633"/>
+            <p:cNvPr id="28" name="pt28"/>
+            <p:cNvSpPr/>
+            <p:nvPr/>
+          </p:nvSpPr>
+          <p:spPr>
+            <a:xfrm>
+              <a:off x="4155006" y="3805039"/>
+              <a:ext cx="67968" cy="67968"/>
             </a:xfrm>
             <a:prstGeom prst="ellipse">
               <a:avLst/>
@@ -3894,7 +4023,7 @@
                 <a:alpha val="90196"/>
               </a:srgbClr>
             </a:solidFill>
-            <a:ln w="8590" cap="rnd">
+            <a:ln w="8345" cap="rnd">
               <a:solidFill>
                 <a:srgbClr val="333333">
                   <a:alpha val="90196"/>
@@ -3912,14 +4041,14 @@
         </p:sp>
         <p:sp>
           <p:nvSpPr>
-            <p:cNvPr id="26" name="pt26"/>
-            <p:cNvSpPr/>
-            <p:nvPr/>
-          </p:nvSpPr>
-          <p:spPr>
-            <a:xfrm>
-              <a:off x="4692333" y="3595738"/>
-              <a:ext cx="73633" cy="73633"/>
+            <p:cNvPr id="29" name="pt29"/>
+            <p:cNvSpPr/>
+            <p:nvPr/>
+          </p:nvSpPr>
+          <p:spPr>
+            <a:xfrm>
+              <a:off x="4260443" y="3491794"/>
+              <a:ext cx="67968" cy="67968"/>
             </a:xfrm>
             <a:prstGeom prst="ellipse">
               <a:avLst/>
@@ -3929,7 +4058,7 @@
                 <a:alpha val="90196"/>
               </a:srgbClr>
             </a:solidFill>
-            <a:ln w="8590" cap="rnd">
+            <a:ln w="8345" cap="rnd">
               <a:solidFill>
                 <a:srgbClr val="333333">
                   <a:alpha val="90196"/>
@@ -3947,14 +4076,14 @@
         </p:sp>
         <p:sp>
           <p:nvSpPr>
-            <p:cNvPr id="27" name="pt27"/>
-            <p:cNvSpPr/>
-            <p:nvPr/>
-          </p:nvSpPr>
-          <p:spPr>
-            <a:xfrm>
-              <a:off x="4748978" y="3243332"/>
-              <a:ext cx="73633" cy="73633"/>
+            <p:cNvPr id="30" name="pt30"/>
+            <p:cNvSpPr/>
+            <p:nvPr/>
+          </p:nvSpPr>
+          <p:spPr>
+            <a:xfrm>
+              <a:off x="4325944" y="3171361"/>
+              <a:ext cx="67968" cy="67968"/>
             </a:xfrm>
             <a:prstGeom prst="ellipse">
               <a:avLst/>
@@ -3964,7 +4093,7 @@
                 <a:alpha val="90196"/>
               </a:srgbClr>
             </a:solidFill>
-            <a:ln w="8590" cap="rnd">
+            <a:ln w="8345" cap="rnd">
               <a:solidFill>
                 <a:srgbClr val="333333">
                   <a:alpha val="90196"/>
@@ -3982,14 +4111,14 @@
         </p:sp>
         <p:sp>
           <p:nvSpPr>
-            <p:cNvPr id="28" name="pt28"/>
-            <p:cNvSpPr/>
-            <p:nvPr/>
-          </p:nvSpPr>
-          <p:spPr>
-            <a:xfrm>
-              <a:off x="3941252" y="4339847"/>
-              <a:ext cx="73633" cy="73633"/>
+            <p:cNvPr id="31" name="pt31"/>
+            <p:cNvSpPr/>
+            <p:nvPr/>
+          </p:nvSpPr>
+          <p:spPr>
+            <a:xfrm>
+              <a:off x="3391937" y="4168392"/>
+              <a:ext cx="67968" cy="67968"/>
             </a:xfrm>
             <a:prstGeom prst="ellipse">
               <a:avLst/>
@@ -3999,7 +4128,7 @@
                 <a:alpha val="90196"/>
               </a:srgbClr>
             </a:solidFill>
-            <a:ln w="8590" cap="rnd">
+            <a:ln w="8345" cap="rnd">
               <a:solidFill>
                 <a:srgbClr val="333333">
                   <a:alpha val="90196"/>
@@ -4017,14 +4146,14 @@
         </p:sp>
         <p:sp>
           <p:nvSpPr>
-            <p:cNvPr id="29" name="pt29"/>
-            <p:cNvSpPr/>
-            <p:nvPr/>
-          </p:nvSpPr>
-          <p:spPr>
-            <a:xfrm>
-              <a:off x="4583837" y="3276149"/>
-              <a:ext cx="73633" cy="73633"/>
+            <p:cNvPr id="32" name="pt32"/>
+            <p:cNvSpPr/>
+            <p:nvPr/>
+          </p:nvSpPr>
+          <p:spPr>
+            <a:xfrm>
+              <a:off x="4134984" y="3201200"/>
+              <a:ext cx="67968" cy="67968"/>
             </a:xfrm>
             <a:prstGeom prst="ellipse">
               <a:avLst/>
@@ -4034,7 +4163,7 @@
                 <a:alpha val="90196"/>
               </a:srgbClr>
             </a:solidFill>
-            <a:ln w="8590" cap="rnd">
+            <a:ln w="8345" cap="rnd">
               <a:solidFill>
                 <a:srgbClr val="333333">
                   <a:alpha val="90196"/>
@@ -4052,14 +4181,14 @@
         </p:sp>
         <p:sp>
           <p:nvSpPr>
-            <p:cNvPr id="30" name="pt30"/>
-            <p:cNvSpPr/>
-            <p:nvPr/>
-          </p:nvSpPr>
-          <p:spPr>
-            <a:xfrm>
-              <a:off x="4790802" y="3892174"/>
-              <a:ext cx="73633" cy="73633"/>
+            <p:cNvPr id="33" name="pt33"/>
+            <p:cNvSpPr/>
+            <p:nvPr/>
+          </p:nvSpPr>
+          <p:spPr>
+            <a:xfrm>
+              <a:off x="4374307" y="3761335"/>
+              <a:ext cx="67968" cy="67968"/>
             </a:xfrm>
             <a:prstGeom prst="ellipse">
               <a:avLst/>
@@ -4069,7 +4198,7 @@
                 <a:alpha val="90196"/>
               </a:srgbClr>
             </a:solidFill>
-            <a:ln w="8590" cap="rnd">
+            <a:ln w="8345" cap="rnd">
               <a:solidFill>
                 <a:srgbClr val="333333">
                   <a:alpha val="90196"/>
@@ -4087,14 +4216,14 @@
         </p:sp>
         <p:sp>
           <p:nvSpPr>
-            <p:cNvPr id="31" name="pt31"/>
-            <p:cNvSpPr/>
-            <p:nvPr/>
-          </p:nvSpPr>
-          <p:spPr>
-            <a:xfrm>
-              <a:off x="7247476" y="3728382"/>
-              <a:ext cx="73633" cy="73633"/>
+            <p:cNvPr id="34" name="pt34"/>
+            <p:cNvSpPr/>
+            <p:nvPr/>
+          </p:nvSpPr>
+          <p:spPr>
+            <a:xfrm>
+              <a:off x="7215062" y="3612403"/>
+              <a:ext cx="67968" cy="67968"/>
             </a:xfrm>
             <a:prstGeom prst="ellipse">
               <a:avLst/>
@@ -4104,7 +4233,7 @@
                 <a:alpha val="90196"/>
               </a:srgbClr>
             </a:solidFill>
-            <a:ln w="8590" cap="rnd">
+            <a:ln w="8345" cap="rnd">
               <a:solidFill>
                 <a:srgbClr val="333333">
                   <a:alpha val="90196"/>
@@ -4122,14 +4251,14 @@
         </p:sp>
         <p:sp>
           <p:nvSpPr>
-            <p:cNvPr id="32" name="pt32"/>
-            <p:cNvSpPr/>
-            <p:nvPr/>
-          </p:nvSpPr>
-          <p:spPr>
-            <a:xfrm>
-              <a:off x="4643091" y="4675831"/>
-              <a:ext cx="73633" cy="73633"/>
+            <p:cNvPr id="35" name="pt35"/>
+            <p:cNvSpPr/>
+            <p:nvPr/>
+          </p:nvSpPr>
+          <p:spPr>
+            <a:xfrm>
+              <a:off x="4203502" y="4473894"/>
+              <a:ext cx="67968" cy="67968"/>
             </a:xfrm>
             <a:prstGeom prst="ellipse">
               <a:avLst/>
@@ -4139,7 +4268,7 @@
                 <a:alpha val="90196"/>
               </a:srgbClr>
             </a:solidFill>
-            <a:ln w="8590" cap="rnd">
+            <a:ln w="8345" cap="rnd">
               <a:solidFill>
                 <a:srgbClr val="333333">
                   <a:alpha val="90196"/>
@@ -4157,14 +4286,14 @@
         </p:sp>
         <p:sp>
           <p:nvSpPr>
-            <p:cNvPr id="33" name="pt33"/>
-            <p:cNvSpPr/>
-            <p:nvPr/>
-          </p:nvSpPr>
-          <p:spPr>
-            <a:xfrm>
-              <a:off x="4138435" y="4094598"/>
-              <a:ext cx="73633" cy="73633"/>
+            <p:cNvPr id="36" name="pt36"/>
+            <p:cNvSpPr/>
+            <p:nvPr/>
+          </p:nvSpPr>
+          <p:spPr>
+            <a:xfrm>
+              <a:off x="3619947" y="3945393"/>
+              <a:ext cx="67968" cy="67968"/>
             </a:xfrm>
             <a:prstGeom prst="ellipse">
               <a:avLst/>
@@ -4174,7 +4303,7 @@
                 <a:alpha val="90196"/>
               </a:srgbClr>
             </a:solidFill>
-            <a:ln w="8590" cap="rnd">
+            <a:ln w="8345" cap="rnd">
               <a:solidFill>
                 <a:srgbClr val="333333">
                   <a:alpha val="90196"/>
@@ -4192,14 +4321,14 @@
         </p:sp>
         <p:sp>
           <p:nvSpPr>
-            <p:cNvPr id="34" name="pt34"/>
-            <p:cNvSpPr/>
-            <p:nvPr/>
-          </p:nvSpPr>
-          <p:spPr>
-            <a:xfrm>
-              <a:off x="5203197" y="1844322"/>
-              <a:ext cx="73633" cy="73633"/>
+            <p:cNvPr id="37" name="pt37"/>
+            <p:cNvSpPr/>
+            <p:nvPr/>
+          </p:nvSpPr>
+          <p:spPr>
+            <a:xfrm>
+              <a:off x="4851176" y="1899279"/>
+              <a:ext cx="67968" cy="67968"/>
             </a:xfrm>
             <a:prstGeom prst="ellipse">
               <a:avLst/>
@@ -4209,7 +4338,7 @@
                 <a:alpha val="90196"/>
               </a:srgbClr>
             </a:solidFill>
-            <a:ln w="8590" cap="rnd">
+            <a:ln w="8345" cap="rnd">
               <a:solidFill>
                 <a:srgbClr val="333333">
                   <a:alpha val="90196"/>
@@ -4227,14 +4356,14 @@
         </p:sp>
         <p:sp>
           <p:nvSpPr>
-            <p:cNvPr id="35" name="pt35"/>
-            <p:cNvSpPr/>
-            <p:nvPr/>
-          </p:nvSpPr>
-          <p:spPr>
-            <a:xfrm>
-              <a:off x="3217431" y="3188621"/>
-              <a:ext cx="73633" cy="73633"/>
+            <p:cNvPr id="38" name="pt38"/>
+            <p:cNvSpPr/>
+            <p:nvPr/>
+          </p:nvSpPr>
+          <p:spPr>
+            <a:xfrm>
+              <a:off x="2554951" y="3121614"/>
+              <a:ext cx="67968" cy="67968"/>
             </a:xfrm>
             <a:prstGeom prst="ellipse">
               <a:avLst/>
@@ -4244,7 +4373,7 @@
                 <a:alpha val="90196"/>
               </a:srgbClr>
             </a:solidFill>
-            <a:ln w="8590" cap="rnd">
+            <a:ln w="8345" cap="rnd">
               <a:solidFill>
                 <a:srgbClr val="333333">
                   <a:alpha val="90196"/>
@@ -4262,14 +4391,14 @@
         </p:sp>
         <p:sp>
           <p:nvSpPr>
-            <p:cNvPr id="36" name="pt36"/>
-            <p:cNvSpPr/>
-            <p:nvPr/>
-          </p:nvSpPr>
-          <p:spPr>
-            <a:xfrm>
-              <a:off x="2634383" y="3201453"/>
-              <a:ext cx="73633" cy="73633"/>
+            <p:cNvPr id="39" name="pt39"/>
+            <p:cNvSpPr/>
+            <p:nvPr/>
+          </p:nvSpPr>
+          <p:spPr>
+            <a:xfrm>
+              <a:off x="1880749" y="3133281"/>
+              <a:ext cx="67968" cy="67968"/>
             </a:xfrm>
             <a:prstGeom prst="ellipse">
               <a:avLst/>
@@ -4279,7 +4408,7 @@
                 <a:alpha val="90196"/>
               </a:srgbClr>
             </a:solidFill>
-            <a:ln w="8590" cap="rnd">
+            <a:ln w="8345" cap="rnd">
               <a:solidFill>
                 <a:srgbClr val="333333">
                   <a:alpha val="90196"/>
@@ -4297,14 +4426,14 @@
         </p:sp>
         <p:sp>
           <p:nvSpPr>
-            <p:cNvPr id="37" name="pt37"/>
-            <p:cNvSpPr/>
-            <p:nvPr/>
-          </p:nvSpPr>
-          <p:spPr>
-            <a:xfrm>
-              <a:off x="4254465" y="3453612"/>
-              <a:ext cx="73633" cy="73633"/>
+            <p:cNvPr id="40" name="pt40"/>
+            <p:cNvSpPr/>
+            <p:nvPr/>
+          </p:nvSpPr>
+          <p:spPr>
+            <a:xfrm>
+              <a:off x="3754117" y="3362563"/>
+              <a:ext cx="67968" cy="67968"/>
             </a:xfrm>
             <a:prstGeom prst="ellipse">
               <a:avLst/>
@@ -4314,7 +4443,7 @@
                 <a:alpha val="90196"/>
               </a:srgbClr>
             </a:solidFill>
-            <a:ln w="8590" cap="rnd">
+            <a:ln w="8345" cap="rnd">
               <a:solidFill>
                 <a:srgbClr val="333333">
                   <a:alpha val="90196"/>
@@ -4332,14 +4461,14 @@
         </p:sp>
         <p:sp>
           <p:nvSpPr>
-            <p:cNvPr id="38" name="pt38"/>
-            <p:cNvSpPr/>
-            <p:nvPr/>
-          </p:nvSpPr>
-          <p:spPr>
-            <a:xfrm>
-              <a:off x="4899766" y="3400469"/>
-              <a:ext cx="73633" cy="73633"/>
+            <p:cNvPr id="41" name="pt41"/>
+            <p:cNvSpPr/>
+            <p:nvPr/>
+          </p:nvSpPr>
+          <p:spPr>
+            <a:xfrm>
+              <a:off x="4500307" y="3314241"/>
+              <a:ext cx="67968" cy="67968"/>
             </a:xfrm>
             <a:prstGeom prst="ellipse">
               <a:avLst/>
@@ -4349,7 +4478,7 @@
                 <a:alpha val="90196"/>
               </a:srgbClr>
             </a:solidFill>
-            <a:ln w="8590" cap="rnd">
+            <a:ln w="8345" cap="rnd">
               <a:solidFill>
                 <a:srgbClr val="333333">
                   <a:alpha val="90196"/>
@@ -4367,32 +4496,32 @@
         </p:sp>
         <p:sp>
           <p:nvSpPr>
-            <p:cNvPr id="39" name="pl39"/>
-            <p:cNvSpPr/>
-            <p:nvPr/>
-          </p:nvSpPr>
-          <p:spPr>
-            <a:xfrm>
-              <a:off x="2440546" y="3763767"/>
-              <a:ext cx="5074401" cy="0"/>
+            <p:cNvPr id="42" name="pl42"/>
+            <p:cNvSpPr/>
+            <p:nvPr/>
+          </p:nvSpPr>
+          <p:spPr>
+            <a:xfrm>
+              <a:off x="1648017" y="3645086"/>
+              <a:ext cx="5867744" cy="0"/>
             </a:xfrm>
             <a:custGeom>
               <a:avLst/>
               <a:pathLst>
-                <a:path w="5074401" h="0">
+                <a:path w="5867744" h="0">
                   <a:moveTo>
                     <a:pt x="0" y="0"/>
                   </a:moveTo>
                   <a:lnTo>
-                    <a:pt x="5074401" y="0"/>
+                    <a:pt x="5867744" y="0"/>
                   </a:lnTo>
                   <a:lnTo>
-                    <a:pt x="5074401" y="0"/>
+                    <a:pt x="5867744" y="0"/>
                   </a:lnTo>
                 </a:path>
               </a:pathLst>
             </a:custGeom>
-            <a:ln w="12934" cap="flat">
+            <a:ln w="12565" cap="flat">
               <a:solidFill>
                 <a:srgbClr val="000000">
                   <a:alpha val="100000"/>
@@ -4410,21 +4539,21 @@
         </p:sp>
         <p:sp>
           <p:nvSpPr>
-            <p:cNvPr id="40" name="pl40"/>
-            <p:cNvSpPr/>
-            <p:nvPr/>
-          </p:nvSpPr>
-          <p:spPr>
-            <a:xfrm>
-              <a:off x="2440546" y="1734178"/>
-              <a:ext cx="0" cy="3233148"/>
+            <p:cNvPr id="43" name="pl43"/>
+            <p:cNvSpPr/>
+            <p:nvPr/>
+          </p:nvSpPr>
+          <p:spPr>
+            <a:xfrm>
+              <a:off x="1648017" y="1799635"/>
+              <a:ext cx="0" cy="2939814"/>
             </a:xfrm>
             <a:custGeom>
               <a:avLst/>
               <a:pathLst>
-                <a:path w="0" h="3233148">
+                <a:path w="0" h="2939814">
                   <a:moveTo>
-                    <a:pt x="0" y="3233148"/>
+                    <a:pt x="0" y="2939814"/>
                   </a:moveTo>
                   <a:lnTo>
                     <a:pt x="0" y="0"/>
@@ -4432,7 +4561,7 @@
                 </a:path>
               </a:pathLst>
             </a:custGeom>
-            <a:ln w="12934" cap="sq">
+            <a:ln w="12565" cap="sq">
               <a:solidFill>
                 <a:srgbClr val="000000">
                   <a:alpha val="100000"/>
@@ -4450,14 +4579,14 @@
         </p:sp>
         <p:sp>
           <p:nvSpPr>
-            <p:cNvPr id="41" name="tx41"/>
-            <p:cNvSpPr/>
-            <p:nvPr/>
-          </p:nvSpPr>
-          <p:spPr>
-            <a:xfrm>
-              <a:off x="2285907" y="4361959"/>
-              <a:ext cx="94855" cy="76676"/>
+            <p:cNvPr id="44" name="tx44"/>
+            <p:cNvSpPr/>
+            <p:nvPr/>
+          </p:nvSpPr>
+          <p:spPr>
+            <a:xfrm>
+              <a:off x="1497797" y="4186613"/>
+              <a:ext cx="92145" cy="74485"/>
             </a:xfrm>
             <a:prstGeom prst="rect">
               <a:avLst/>
@@ -4470,7 +4599,7 @@
             <a:p>
               <a:pPr algn="l" marL="0" marR="0" indent="0">
                 <a:lnSpc>
-                  <a:spcPts val="840"/>
+                  <a:spcPts val="816"/>
                 </a:lnSpc>
                 <a:spcBef>
                   <a:spcPts val="0"/>
@@ -4480,7 +4609,7 @@
                 </a:spcAft>
               </a:pPr>
               <a:r>
-                <a:rPr sz="840">
+                <a:rPr sz="816">
                   <a:solidFill>
                     <a:srgbClr val="1A1A1A">
                       <a:alpha val="100000"/>
@@ -4496,14 +4625,14 @@
         </p:sp>
         <p:sp>
           <p:nvSpPr>
-            <p:cNvPr id="42" name="tx42"/>
-            <p:cNvSpPr/>
-            <p:nvPr/>
-          </p:nvSpPr>
-          <p:spPr>
-            <a:xfrm>
-              <a:off x="2321432" y="3723970"/>
-              <a:ext cx="59330" cy="77978"/>
+            <p:cNvPr id="45" name="tx45"/>
+            <p:cNvSpPr/>
+            <p:nvPr/>
+          </p:nvSpPr>
+          <p:spPr>
+            <a:xfrm>
+              <a:off x="1532307" y="3606426"/>
+              <a:ext cx="57635" cy="75750"/>
             </a:xfrm>
             <a:prstGeom prst="rect">
               <a:avLst/>
@@ -4516,7 +4645,7 @@
             <a:p>
               <a:pPr algn="l" marL="0" marR="0" indent="0">
                 <a:lnSpc>
-                  <a:spcPts val="840"/>
+                  <a:spcPts val="816"/>
                 </a:lnSpc>
                 <a:spcBef>
                   <a:spcPts val="0"/>
@@ -4526,7 +4655,7 @@
                 </a:spcAft>
               </a:pPr>
               <a:r>
-                <a:rPr sz="840">
+                <a:rPr sz="816">
                   <a:solidFill>
                     <a:srgbClr val="1A1A1A">
                       <a:alpha val="100000"/>
@@ -4542,14 +4671,14 @@
         </p:sp>
         <p:sp>
           <p:nvSpPr>
-            <p:cNvPr id="43" name="tx43"/>
-            <p:cNvSpPr/>
-            <p:nvPr/>
-          </p:nvSpPr>
-          <p:spPr>
-            <a:xfrm>
-              <a:off x="2321432" y="3088586"/>
-              <a:ext cx="59330" cy="76676"/>
+            <p:cNvPr id="46" name="tx46"/>
+            <p:cNvSpPr/>
+            <p:nvPr/>
+          </p:nvSpPr>
+          <p:spPr>
+            <a:xfrm>
+              <a:off x="1532307" y="3028769"/>
+              <a:ext cx="57635" cy="74485"/>
             </a:xfrm>
             <a:prstGeom prst="rect">
               <a:avLst/>
@@ -4562,7 +4691,7 @@
             <a:p>
               <a:pPr algn="l" marL="0" marR="0" indent="0">
                 <a:lnSpc>
-                  <a:spcPts val="840"/>
+                  <a:spcPts val="816"/>
                 </a:lnSpc>
                 <a:spcBef>
                   <a:spcPts val="0"/>
@@ -4572,7 +4701,7 @@
                 </a:spcAft>
               </a:pPr>
               <a:r>
-                <a:rPr sz="840">
+                <a:rPr sz="816">
                   <a:solidFill>
                     <a:srgbClr val="1A1A1A">
                       <a:alpha val="100000"/>
@@ -4588,14 +4717,14 @@
         </p:sp>
         <p:sp>
           <p:nvSpPr>
-            <p:cNvPr id="44" name="tx44"/>
-            <p:cNvSpPr/>
-            <p:nvPr/>
-          </p:nvSpPr>
-          <p:spPr>
-            <a:xfrm>
-              <a:off x="2321432" y="2451900"/>
-              <a:ext cx="59330" cy="76676"/>
+            <p:cNvPr id="47" name="tx47"/>
+            <p:cNvSpPr/>
+            <p:nvPr/>
+          </p:nvSpPr>
+          <p:spPr>
+            <a:xfrm>
+              <a:off x="1532307" y="2449848"/>
+              <a:ext cx="57635" cy="74485"/>
             </a:xfrm>
             <a:prstGeom prst="rect">
               <a:avLst/>
@@ -4608,7 +4737,7 @@
             <a:p>
               <a:pPr algn="l" marL="0" marR="0" indent="0">
                 <a:lnSpc>
-                  <a:spcPts val="840"/>
+                  <a:spcPts val="816"/>
                 </a:lnSpc>
                 <a:spcBef>
                   <a:spcPts val="0"/>
@@ -4618,7 +4747,7 @@
                 </a:spcAft>
               </a:pPr>
               <a:r>
-                <a:rPr sz="840">
+                <a:rPr sz="816">
                   <a:solidFill>
                     <a:srgbClr val="1A1A1A">
                       <a:alpha val="100000"/>
@@ -4634,14 +4763,14 @@
         </p:sp>
         <p:sp>
           <p:nvSpPr>
-            <p:cNvPr id="45" name="tx45"/>
-            <p:cNvSpPr/>
-            <p:nvPr/>
-          </p:nvSpPr>
-          <p:spPr>
-            <a:xfrm>
-              <a:off x="2321432" y="1813859"/>
-              <a:ext cx="59330" cy="78030"/>
+            <p:cNvPr id="48" name="tx48"/>
+            <p:cNvSpPr/>
+            <p:nvPr/>
+          </p:nvSpPr>
+          <p:spPr>
+            <a:xfrm>
+              <a:off x="1532307" y="1869611"/>
+              <a:ext cx="57635" cy="75801"/>
             </a:xfrm>
             <a:prstGeom prst="rect">
               <a:avLst/>
@@ -4654,7 +4783,7 @@
             <a:p>
               <a:pPr algn="l" marL="0" marR="0" indent="0">
                 <a:lnSpc>
-                  <a:spcPts val="840"/>
+                  <a:spcPts val="816"/>
                 </a:lnSpc>
                 <a:spcBef>
                   <a:spcPts val="0"/>
@@ -4664,7 +4793,7 @@
                 </a:spcAft>
               </a:pPr>
               <a:r>
-                <a:rPr sz="840">
+                <a:rPr sz="816">
                   <a:solidFill>
                     <a:srgbClr val="1A1A1A">
                       <a:alpha val="100000"/>
@@ -4680,29 +4809,29 @@
         </p:sp>
         <p:sp>
           <p:nvSpPr>
-            <p:cNvPr id="46" name="pl46"/>
-            <p:cNvSpPr/>
-            <p:nvPr/>
-          </p:nvSpPr>
-          <p:spPr>
-            <a:xfrm>
-              <a:off x="2407333" y="4400453"/>
-              <a:ext cx="33212" cy="0"/>
+            <p:cNvPr id="49" name="pl49"/>
+            <p:cNvSpPr/>
+            <p:nvPr/>
+          </p:nvSpPr>
+          <p:spPr>
+            <a:xfrm>
+              <a:off x="1615753" y="4224007"/>
+              <a:ext cx="32264" cy="0"/>
             </a:xfrm>
             <a:custGeom>
               <a:avLst/>
               <a:pathLst>
-                <a:path w="33212" h="0">
+                <a:path w="32264" h="0">
                   <a:moveTo>
                     <a:pt x="0" y="0"/>
                   </a:moveTo>
                   <a:lnTo>
-                    <a:pt x="33212" y="0"/>
+                    <a:pt x="32264" y="0"/>
                   </a:lnTo>
                 </a:path>
               </a:pathLst>
             </a:custGeom>
-            <a:ln w="12934" cap="flat">
+            <a:ln w="12565" cap="flat">
               <a:solidFill>
                 <a:srgbClr val="000000">
                   <a:alpha val="100000"/>
@@ -4720,29 +4849,29 @@
         </p:sp>
         <p:sp>
           <p:nvSpPr>
-            <p:cNvPr id="47" name="pl47"/>
-            <p:cNvSpPr/>
-            <p:nvPr/>
-          </p:nvSpPr>
-          <p:spPr>
-            <a:xfrm>
-              <a:off x="2407333" y="3763767"/>
-              <a:ext cx="33212" cy="0"/>
+            <p:cNvPr id="50" name="pl50"/>
+            <p:cNvSpPr/>
+            <p:nvPr/>
+          </p:nvSpPr>
+          <p:spPr>
+            <a:xfrm>
+              <a:off x="1615753" y="3645086"/>
+              <a:ext cx="32264" cy="0"/>
             </a:xfrm>
             <a:custGeom>
               <a:avLst/>
               <a:pathLst>
-                <a:path w="33212" h="0">
+                <a:path w="32264" h="0">
                   <a:moveTo>
                     <a:pt x="0" y="0"/>
                   </a:moveTo>
                   <a:lnTo>
-                    <a:pt x="33212" y="0"/>
+                    <a:pt x="32264" y="0"/>
                   </a:lnTo>
                 </a:path>
               </a:pathLst>
             </a:custGeom>
-            <a:ln w="12934" cap="flat">
+            <a:ln w="12565" cap="flat">
               <a:solidFill>
                 <a:srgbClr val="000000">
                   <a:alpha val="100000"/>
@@ -4760,29 +4889,29 @@
         </p:sp>
         <p:sp>
           <p:nvSpPr>
-            <p:cNvPr id="48" name="pl48"/>
-            <p:cNvSpPr/>
-            <p:nvPr/>
-          </p:nvSpPr>
-          <p:spPr>
-            <a:xfrm>
-              <a:off x="2407333" y="3127081"/>
-              <a:ext cx="33212" cy="0"/>
+            <p:cNvPr id="51" name="pl51"/>
+            <p:cNvSpPr/>
+            <p:nvPr/>
+          </p:nvSpPr>
+          <p:spPr>
+            <a:xfrm>
+              <a:off x="1615753" y="3066164"/>
+              <a:ext cx="32264" cy="0"/>
             </a:xfrm>
             <a:custGeom>
               <a:avLst/>
               <a:pathLst>
-                <a:path w="33212" h="0">
+                <a:path w="32264" h="0">
                   <a:moveTo>
                     <a:pt x="0" y="0"/>
                   </a:moveTo>
                   <a:lnTo>
-                    <a:pt x="33212" y="0"/>
+                    <a:pt x="32264" y="0"/>
                   </a:lnTo>
                 </a:path>
               </a:pathLst>
             </a:custGeom>
-            <a:ln w="12934" cap="flat">
+            <a:ln w="12565" cap="flat">
               <a:solidFill>
                 <a:srgbClr val="000000">
                   <a:alpha val="100000"/>
@@ -4800,29 +4929,29 @@
         </p:sp>
         <p:sp>
           <p:nvSpPr>
-            <p:cNvPr id="49" name="pl49"/>
-            <p:cNvSpPr/>
-            <p:nvPr/>
-          </p:nvSpPr>
-          <p:spPr>
-            <a:xfrm>
-              <a:off x="2407333" y="2490394"/>
-              <a:ext cx="33212" cy="0"/>
+            <p:cNvPr id="52" name="pl52"/>
+            <p:cNvSpPr/>
+            <p:nvPr/>
+          </p:nvSpPr>
+          <p:spPr>
+            <a:xfrm>
+              <a:off x="1615753" y="2487242"/>
+              <a:ext cx="32264" cy="0"/>
             </a:xfrm>
             <a:custGeom>
               <a:avLst/>
               <a:pathLst>
-                <a:path w="33212" h="0">
+                <a:path w="32264" h="0">
                   <a:moveTo>
                     <a:pt x="0" y="0"/>
                   </a:moveTo>
                   <a:lnTo>
-                    <a:pt x="33212" y="0"/>
+                    <a:pt x="32264" y="0"/>
                   </a:lnTo>
                 </a:path>
               </a:pathLst>
             </a:custGeom>
-            <a:ln w="12934" cap="flat">
+            <a:ln w="12565" cap="flat">
               <a:solidFill>
                 <a:srgbClr val="000000">
                   <a:alpha val="100000"/>
@@ -4840,29 +4969,29 @@
         </p:sp>
         <p:sp>
           <p:nvSpPr>
-            <p:cNvPr id="50" name="pl50"/>
-            <p:cNvSpPr/>
-            <p:nvPr/>
-          </p:nvSpPr>
-          <p:spPr>
-            <a:xfrm>
-              <a:off x="2407333" y="1853708"/>
-              <a:ext cx="33212" cy="0"/>
+            <p:cNvPr id="53" name="pl53"/>
+            <p:cNvSpPr/>
+            <p:nvPr/>
+          </p:nvSpPr>
+          <p:spPr>
+            <a:xfrm>
+              <a:off x="1615753" y="1908321"/>
+              <a:ext cx="32264" cy="0"/>
             </a:xfrm>
             <a:custGeom>
               <a:avLst/>
               <a:pathLst>
-                <a:path w="33212" h="0">
+                <a:path w="32264" h="0">
                   <a:moveTo>
                     <a:pt x="0" y="0"/>
                   </a:moveTo>
                   <a:lnTo>
-                    <a:pt x="33212" y="0"/>
+                    <a:pt x="32264" y="0"/>
                   </a:lnTo>
                 </a:path>
               </a:pathLst>
             </a:custGeom>
-            <a:ln w="12934" cap="flat">
+            <a:ln w="12565" cap="flat">
               <a:solidFill>
                 <a:srgbClr val="000000">
                   <a:alpha val="100000"/>
@@ -4880,29 +5009,29 @@
         </p:sp>
         <p:sp>
           <p:nvSpPr>
-            <p:cNvPr id="51" name="pl51"/>
-            <p:cNvSpPr/>
-            <p:nvPr/>
-          </p:nvSpPr>
-          <p:spPr>
-            <a:xfrm>
-              <a:off x="2440546" y="4967326"/>
-              <a:ext cx="5074401" cy="0"/>
+            <p:cNvPr id="54" name="pl54"/>
+            <p:cNvSpPr/>
+            <p:nvPr/>
+          </p:nvSpPr>
+          <p:spPr>
+            <a:xfrm>
+              <a:off x="1648017" y="4739450"/>
+              <a:ext cx="5867744" cy="0"/>
             </a:xfrm>
             <a:custGeom>
               <a:avLst/>
               <a:pathLst>
-                <a:path w="5074401" h="0">
+                <a:path w="5867744" h="0">
                   <a:moveTo>
                     <a:pt x="0" y="0"/>
                   </a:moveTo>
                   <a:lnTo>
-                    <a:pt x="5074401" y="0"/>
+                    <a:pt x="5867744" y="0"/>
                   </a:lnTo>
                 </a:path>
               </a:pathLst>
             </a:custGeom>
-            <a:ln w="12934" cap="sq">
+            <a:ln w="12565" cap="sq">
               <a:solidFill>
                 <a:srgbClr val="000000">
                   <a:alpha val="100000"/>
@@ -4920,21 +5049,21 @@
         </p:sp>
         <p:sp>
           <p:nvSpPr>
-            <p:cNvPr id="52" name="pl52"/>
-            <p:cNvSpPr/>
-            <p:nvPr/>
-          </p:nvSpPr>
-          <p:spPr>
-            <a:xfrm>
-              <a:off x="3782075" y="4967326"/>
-              <a:ext cx="0" cy="33212"/>
+            <p:cNvPr id="55" name="pl55"/>
+            <p:cNvSpPr/>
+            <p:nvPr/>
+          </p:nvSpPr>
+          <p:spPr>
+            <a:xfrm>
+              <a:off x="3199285" y="4739450"/>
+              <a:ext cx="0" cy="32264"/>
             </a:xfrm>
             <a:custGeom>
               <a:avLst/>
               <a:pathLst>
-                <a:path w="0" h="33212">
+                <a:path w="0" h="32264">
                   <a:moveTo>
-                    <a:pt x="0" y="33212"/>
+                    <a:pt x="0" y="32264"/>
                   </a:moveTo>
                   <a:lnTo>
                     <a:pt x="0" y="0"/>
@@ -4942,7 +5071,7 @@
                 </a:path>
               </a:pathLst>
             </a:custGeom>
-            <a:ln w="12934" cap="flat">
+            <a:ln w="12565" cap="flat">
               <a:solidFill>
                 <a:srgbClr val="000000">
                   <a:alpha val="100000"/>
@@ -4960,21 +5089,21 @@
         </p:sp>
         <p:sp>
           <p:nvSpPr>
-            <p:cNvPr id="53" name="pl53"/>
-            <p:cNvSpPr/>
-            <p:nvPr/>
-          </p:nvSpPr>
-          <p:spPr>
-            <a:xfrm>
-              <a:off x="5541848" y="4967326"/>
-              <a:ext cx="0" cy="33212"/>
+            <p:cNvPr id="56" name="pl56"/>
+            <p:cNvSpPr/>
+            <p:nvPr/>
+          </p:nvSpPr>
+          <p:spPr>
+            <a:xfrm>
+              <a:off x="5234184" y="4739450"/>
+              <a:ext cx="0" cy="32264"/>
             </a:xfrm>
             <a:custGeom>
               <a:avLst/>
               <a:pathLst>
-                <a:path w="0" h="33212">
+                <a:path w="0" h="32264">
                   <a:moveTo>
-                    <a:pt x="0" y="33212"/>
+                    <a:pt x="0" y="32264"/>
                   </a:moveTo>
                   <a:lnTo>
                     <a:pt x="0" y="0"/>
@@ -4982,7 +5111,7 @@
                 </a:path>
               </a:pathLst>
             </a:custGeom>
-            <a:ln w="12934" cap="flat">
+            <a:ln w="12565" cap="flat">
               <a:solidFill>
                 <a:srgbClr val="000000">
                   <a:alpha val="100000"/>
@@ -5000,21 +5129,21 @@
         </p:sp>
         <p:sp>
           <p:nvSpPr>
-            <p:cNvPr id="54" name="pl54"/>
-            <p:cNvSpPr/>
-            <p:nvPr/>
-          </p:nvSpPr>
-          <p:spPr>
-            <a:xfrm>
-              <a:off x="7301621" y="4967326"/>
-              <a:ext cx="0" cy="33212"/>
+            <p:cNvPr id="57" name="pl57"/>
+            <p:cNvSpPr/>
+            <p:nvPr/>
+          </p:nvSpPr>
+          <p:spPr>
+            <a:xfrm>
+              <a:off x="7269083" y="4739450"/>
+              <a:ext cx="0" cy="32264"/>
             </a:xfrm>
             <a:custGeom>
               <a:avLst/>
               <a:pathLst>
-                <a:path w="0" h="33212">
+                <a:path w="0" h="32264">
                   <a:moveTo>
-                    <a:pt x="0" y="33212"/>
+                    <a:pt x="0" y="32264"/>
                   </a:moveTo>
                   <a:lnTo>
                     <a:pt x="0" y="0"/>
@@ -5022,7 +5151,7 @@
                 </a:path>
               </a:pathLst>
             </a:custGeom>
-            <a:ln w="12934" cap="flat">
+            <a:ln w="12565" cap="flat">
               <a:solidFill>
                 <a:srgbClr val="000000">
                   <a:alpha val="100000"/>
@@ -5040,14 +5169,14 @@
         </p:sp>
         <p:sp>
           <p:nvSpPr>
-            <p:cNvPr id="55" name="tx55"/>
-            <p:cNvSpPr/>
-            <p:nvPr/>
-          </p:nvSpPr>
-          <p:spPr>
-            <a:xfrm>
-              <a:off x="3752410" y="5026797"/>
-              <a:ext cx="59330" cy="76676"/>
+            <p:cNvPr id="58" name="tx58"/>
+            <p:cNvSpPr/>
+            <p:nvPr/>
+          </p:nvSpPr>
+          <p:spPr>
+            <a:xfrm>
+              <a:off x="3170467" y="4797221"/>
+              <a:ext cx="57635" cy="74485"/>
             </a:xfrm>
             <a:prstGeom prst="rect">
               <a:avLst/>
@@ -5060,7 +5189,7 @@
             <a:p>
               <a:pPr algn="l" marL="0" marR="0" indent="0">
                 <a:lnSpc>
-                  <a:spcPts val="840"/>
+                  <a:spcPts val="816"/>
                 </a:lnSpc>
                 <a:spcBef>
                   <a:spcPts val="0"/>
@@ -5070,7 +5199,7 @@
                 </a:spcAft>
               </a:pPr>
               <a:r>
-                <a:rPr sz="840">
+                <a:rPr sz="816">
                   <a:solidFill>
                     <a:srgbClr val="1A1A1A">
                       <a:alpha val="100000"/>
@@ -5086,14 +5215,14 @@
         </p:sp>
         <p:sp>
           <p:nvSpPr>
-            <p:cNvPr id="56" name="tx56"/>
-            <p:cNvSpPr/>
-            <p:nvPr/>
-          </p:nvSpPr>
-          <p:spPr>
-            <a:xfrm>
-              <a:off x="5512183" y="5027110"/>
-              <a:ext cx="59330" cy="76363"/>
+            <p:cNvPr id="59" name="tx59"/>
+            <p:cNvSpPr/>
+            <p:nvPr/>
+          </p:nvSpPr>
+          <p:spPr>
+            <a:xfrm>
+              <a:off x="5205366" y="4797525"/>
+              <a:ext cx="57635" cy="74181"/>
             </a:xfrm>
             <a:prstGeom prst="rect">
               <a:avLst/>
@@ -5106,7 +5235,7 @@
             <a:p>
               <a:pPr algn="l" marL="0" marR="0" indent="0">
                 <a:lnSpc>
-                  <a:spcPts val="840"/>
+                  <a:spcPts val="816"/>
                 </a:lnSpc>
                 <a:spcBef>
                   <a:spcPts val="0"/>
@@ -5116,7 +5245,7 @@
                 </a:spcAft>
               </a:pPr>
               <a:r>
-                <a:rPr sz="840">
+                <a:rPr sz="816">
                   <a:solidFill>
                     <a:srgbClr val="1A1A1A">
                       <a:alpha val="100000"/>
@@ -5132,14 +5261,14 @@
         </p:sp>
         <p:sp>
           <p:nvSpPr>
-            <p:cNvPr id="57" name="tx57"/>
-            <p:cNvSpPr/>
-            <p:nvPr/>
-          </p:nvSpPr>
-          <p:spPr>
-            <a:xfrm>
-              <a:off x="7271955" y="5025495"/>
-              <a:ext cx="59330" cy="77978"/>
+            <p:cNvPr id="60" name="tx60"/>
+            <p:cNvSpPr/>
+            <p:nvPr/>
+          </p:nvSpPr>
+          <p:spPr>
+            <a:xfrm>
+              <a:off x="7240265" y="4795956"/>
+              <a:ext cx="57635" cy="75750"/>
             </a:xfrm>
             <a:prstGeom prst="rect">
               <a:avLst/>
@@ -5152,7 +5281,7 @@
             <a:p>
               <a:pPr algn="l" marL="0" marR="0" indent="0">
                 <a:lnSpc>
-                  <a:spcPts val="840"/>
+                  <a:spcPts val="816"/>
                 </a:lnSpc>
                 <a:spcBef>
                   <a:spcPts val="0"/>
@@ -5162,7 +5291,7 @@
                 </a:spcAft>
               </a:pPr>
               <a:r>
-                <a:rPr sz="840">
+                <a:rPr sz="816">
                   <a:solidFill>
                     <a:srgbClr val="1A1A1A">
                       <a:alpha val="100000"/>
@@ -5178,14 +5307,14 @@
         </p:sp>
         <p:sp>
           <p:nvSpPr>
-            <p:cNvPr id="58" name="tx58"/>
-            <p:cNvSpPr/>
-            <p:nvPr/>
-          </p:nvSpPr>
-          <p:spPr>
-            <a:xfrm>
-              <a:off x="4570176" y="5157574"/>
-              <a:ext cx="815140" cy="97017"/>
+            <p:cNvPr id="61" name="tx61"/>
+            <p:cNvSpPr/>
+            <p:nvPr/>
+          </p:nvSpPr>
+          <p:spPr>
+            <a:xfrm>
+              <a:off x="4185964" y="4924262"/>
+              <a:ext cx="791851" cy="94245"/>
             </a:xfrm>
             <a:prstGeom prst="rect">
               <a:avLst/>
@@ -5198,7 +5327,7 @@
             <a:p>
               <a:pPr algn="l" marL="0" marR="0" indent="0">
                 <a:lnSpc>
-                  <a:spcPts val="1050"/>
+                  <a:spcPts val="1019"/>
                 </a:lnSpc>
                 <a:spcBef>
                   <a:spcPts val="0"/>
@@ -5208,7 +5337,7 @@
                 </a:spcAft>
               </a:pPr>
               <a:r>
-                <a:rPr sz="1050" b="1">
+                <a:rPr sz="1019" b="1">
                   <a:solidFill>
                     <a:srgbClr val="111111">
                       <a:alpha val="100000"/>
@@ -5224,14 +5353,14 @@
         </p:sp>
         <p:sp>
           <p:nvSpPr>
-            <p:cNvPr id="59" name="tx59"/>
+            <p:cNvPr id="62" name="tx62"/>
             <p:cNvSpPr/>
             <p:nvPr/>
           </p:nvSpPr>
           <p:spPr>
             <a:xfrm rot="-5400000">
-              <a:off x="1362166" y="3301364"/>
-              <a:ext cx="1459882" cy="98775"/>
+              <a:off x="600448" y="3221566"/>
+              <a:ext cx="1418172" cy="95953"/>
             </a:xfrm>
             <a:prstGeom prst="rect">
               <a:avLst/>
@@ -5244,7 +5373,7 @@
             <a:p>
               <a:pPr algn="l" marL="0" marR="0" indent="0">
                 <a:lnSpc>
-                  <a:spcPts val="1050"/>
+                  <a:spcPts val="1019"/>
                 </a:lnSpc>
                 <a:spcBef>
                   <a:spcPts val="0"/>
@@ -5254,7 +5383,7 @@
                 </a:spcAft>
               </a:pPr>
               <a:r>
-                <a:rPr sz="1050" b="1">
+                <a:rPr sz="1019" b="1">
                   <a:solidFill>
                     <a:srgbClr val="111111">
                       <a:alpha val="100000"/>
@@ -5270,14 +5399,14 @@
         </p:sp>
         <p:sp>
           <p:nvSpPr>
-            <p:cNvPr id="60" name="tx60"/>
-            <p:cNvSpPr/>
-            <p:nvPr/>
-          </p:nvSpPr>
-          <p:spPr>
-            <a:xfrm>
-              <a:off x="1964814" y="1639652"/>
-              <a:ext cx="81226" cy="79157"/>
+            <p:cNvPr id="63" name="tx63"/>
+            <p:cNvSpPr/>
+            <p:nvPr/>
+          </p:nvSpPr>
+          <p:spPr>
+            <a:xfrm>
+              <a:off x="1648017" y="1561026"/>
+              <a:ext cx="2359203" cy="141473"/>
             </a:xfrm>
             <a:prstGeom prst="rect">
               <a:avLst/>
@@ -5290,7 +5419,7 @@
             <a:p>
               <a:pPr algn="l" marL="0" marR="0" indent="0">
                 <a:lnSpc>
-                  <a:spcPts val="1150"/>
+                  <a:spcPts val="1220"/>
                 </a:lnSpc>
                 <a:spcBef>
                   <a:spcPts val="0"/>
@@ -5300,7 +5429,53 @@
                 </a:spcAft>
               </a:pPr>
               <a:r>
-                <a:rPr sz="1150" b="1">
+                <a:rPr sz="1220" b="1">
+                  <a:solidFill>
+                    <a:srgbClr val="111111">
+                      <a:alpha val="100000"/>
+                    </a:srgbClr>
+                  </a:solidFill>
+                  <a:latin typeface="Arial"/>
+                  <a:cs typeface="Arial"/>
+                </a:rPr>
+                <a:t>Province model residual pattern</a:t>
+              </a:r>
+            </a:p>
+          </p:txBody>
+        </p:sp>
+        <p:sp>
+          <p:nvSpPr>
+            <p:cNvPr id="64" name="tx64"/>
+            <p:cNvSpPr/>
+            <p:nvPr/>
+          </p:nvSpPr>
+          <p:spPr>
+            <a:xfrm>
+              <a:off x="1185677" y="1499531"/>
+              <a:ext cx="79107" cy="77092"/>
+            </a:xfrm>
+            <a:prstGeom prst="rect">
+              <a:avLst/>
+            </a:prstGeom>
+            <a:noFill/>
+          </p:spPr>
+          <p:txBody>
+            <a:bodyPr lIns="0" rIns="0" tIns="0" bIns="0" anchorCtr="1" anchor="ctr" wrap="none"/>
+            <a:lstStyle/>
+            <a:p>
+              <a:pPr algn="l" marL="0" marR="0" indent="0">
+                <a:lnSpc>
+                  <a:spcPts val="1120"/>
+                </a:lnSpc>
+                <a:spcBef>
+                  <a:spcPts val="0"/>
+                </a:spcBef>
+                <a:spcAft>
+                  <a:spcPts val="0"/>
+                </a:spcAft>
+              </a:pPr>
+              <a:r>
+                <a:rPr sz="1120" b="1">
                   <a:solidFill>
                     <a:srgbClr val="000000">
                       <a:alpha val="100000"/>
@@ -5316,14 +5491,14 @@
         </p:sp>
         <p:sp>
           <p:nvSpPr>
-            <p:cNvPr id="61" name="rc61"/>
-            <p:cNvSpPr/>
-            <p:nvPr/>
-          </p:nvSpPr>
-          <p:spPr>
-            <a:xfrm>
-              <a:off x="8048383" y="1734178"/>
-              <a:ext cx="5074401" cy="3233148"/>
+            <p:cNvPr id="65" name="rc65"/>
+            <p:cNvSpPr/>
+            <p:nvPr/>
+          </p:nvSpPr>
+          <p:spPr>
+            <a:xfrm>
+              <a:off x="8034178" y="1799635"/>
+              <a:ext cx="5867744" cy="2939814"/>
             </a:xfrm>
             <a:prstGeom prst="rect">
               <a:avLst/>
@@ -5342,14 +5517,229 @@
         </p:sp>
         <p:sp>
           <p:nvSpPr>
-            <p:cNvPr id="62" name="pt62"/>
-            <p:cNvSpPr/>
-            <p:nvPr/>
-          </p:nvSpPr>
-          <p:spPr>
-            <a:xfrm>
-              <a:off x="8247641" y="4594327"/>
-              <a:ext cx="62793" cy="62793"/>
+            <p:cNvPr id="66" name="pl66"/>
+            <p:cNvSpPr/>
+            <p:nvPr/>
+          </p:nvSpPr>
+          <p:spPr>
+            <a:xfrm>
+              <a:off x="8476775" y="1799635"/>
+              <a:ext cx="0" cy="2939814"/>
+            </a:xfrm>
+            <a:custGeom>
+              <a:avLst/>
+              <a:pathLst>
+                <a:path w="0" h="2939814">
+                  <a:moveTo>
+                    <a:pt x="0" y="2939814"/>
+                  </a:moveTo>
+                  <a:lnTo>
+                    <a:pt x="0" y="0"/>
+                  </a:lnTo>
+                  <a:lnTo>
+                    <a:pt x="0" y="0"/>
+                  </a:lnTo>
+                </a:path>
+              </a:pathLst>
+            </a:custGeom>
+            <a:ln w="8130" cap="flat">
+              <a:solidFill>
+                <a:srgbClr val="B0B0B0">
+                  <a:alpha val="34901"/>
+                </a:srgbClr>
+              </a:solidFill>
+              <a:prstDash val="solid"/>
+              <a:round/>
+            </a:ln>
+          </p:spPr>
+          <p:txBody>
+            <a:bodyPr/>
+            <a:lstStyle/>
+            <a:p/>
+          </p:txBody>
+        </p:sp>
+        <p:sp>
+          <p:nvSpPr>
+            <p:cNvPr id="67" name="pl67"/>
+            <p:cNvSpPr/>
+            <p:nvPr/>
+          </p:nvSpPr>
+          <p:spPr>
+            <a:xfrm>
+              <a:off x="9722413" y="1799635"/>
+              <a:ext cx="0" cy="2939814"/>
+            </a:xfrm>
+            <a:custGeom>
+              <a:avLst/>
+              <a:pathLst>
+                <a:path w="0" h="2939814">
+                  <a:moveTo>
+                    <a:pt x="0" y="2939814"/>
+                  </a:moveTo>
+                  <a:lnTo>
+                    <a:pt x="0" y="0"/>
+                  </a:lnTo>
+                  <a:lnTo>
+                    <a:pt x="0" y="0"/>
+                  </a:lnTo>
+                </a:path>
+              </a:pathLst>
+            </a:custGeom>
+            <a:ln w="8130" cap="flat">
+              <a:solidFill>
+                <a:srgbClr val="B0B0B0">
+                  <a:alpha val="34901"/>
+                </a:srgbClr>
+              </a:solidFill>
+              <a:prstDash val="solid"/>
+              <a:round/>
+            </a:ln>
+          </p:spPr>
+          <p:txBody>
+            <a:bodyPr/>
+            <a:lstStyle/>
+            <a:p/>
+          </p:txBody>
+        </p:sp>
+        <p:sp>
+          <p:nvSpPr>
+            <p:cNvPr id="68" name="pl68"/>
+            <p:cNvSpPr/>
+            <p:nvPr/>
+          </p:nvSpPr>
+          <p:spPr>
+            <a:xfrm>
+              <a:off x="10968050" y="1799635"/>
+              <a:ext cx="0" cy="2939814"/>
+            </a:xfrm>
+            <a:custGeom>
+              <a:avLst/>
+              <a:pathLst>
+                <a:path w="0" h="2939814">
+                  <a:moveTo>
+                    <a:pt x="0" y="2939814"/>
+                  </a:moveTo>
+                  <a:lnTo>
+                    <a:pt x="0" y="0"/>
+                  </a:lnTo>
+                  <a:lnTo>
+                    <a:pt x="0" y="0"/>
+                  </a:lnTo>
+                </a:path>
+              </a:pathLst>
+            </a:custGeom>
+            <a:ln w="8130" cap="flat">
+              <a:solidFill>
+                <a:srgbClr val="B0B0B0">
+                  <a:alpha val="34901"/>
+                </a:srgbClr>
+              </a:solidFill>
+              <a:prstDash val="solid"/>
+              <a:round/>
+            </a:ln>
+          </p:spPr>
+          <p:txBody>
+            <a:bodyPr/>
+            <a:lstStyle/>
+            <a:p/>
+          </p:txBody>
+        </p:sp>
+        <p:sp>
+          <p:nvSpPr>
+            <p:cNvPr id="69" name="pl69"/>
+            <p:cNvSpPr/>
+            <p:nvPr/>
+          </p:nvSpPr>
+          <p:spPr>
+            <a:xfrm>
+              <a:off x="12213688" y="1799635"/>
+              <a:ext cx="0" cy="2939814"/>
+            </a:xfrm>
+            <a:custGeom>
+              <a:avLst/>
+              <a:pathLst>
+                <a:path w="0" h="2939814">
+                  <a:moveTo>
+                    <a:pt x="0" y="2939814"/>
+                  </a:moveTo>
+                  <a:lnTo>
+                    <a:pt x="0" y="0"/>
+                  </a:lnTo>
+                  <a:lnTo>
+                    <a:pt x="0" y="0"/>
+                  </a:lnTo>
+                </a:path>
+              </a:pathLst>
+            </a:custGeom>
+            <a:ln w="8130" cap="flat">
+              <a:solidFill>
+                <a:srgbClr val="B0B0B0">
+                  <a:alpha val="34901"/>
+                </a:srgbClr>
+              </a:solidFill>
+              <a:prstDash val="solid"/>
+              <a:round/>
+            </a:ln>
+          </p:spPr>
+          <p:txBody>
+            <a:bodyPr/>
+            <a:lstStyle/>
+            <a:p/>
+          </p:txBody>
+        </p:sp>
+        <p:sp>
+          <p:nvSpPr>
+            <p:cNvPr id="70" name="pl70"/>
+            <p:cNvSpPr/>
+            <p:nvPr/>
+          </p:nvSpPr>
+          <p:spPr>
+            <a:xfrm>
+              <a:off x="13459325" y="1799635"/>
+              <a:ext cx="0" cy="2939814"/>
+            </a:xfrm>
+            <a:custGeom>
+              <a:avLst/>
+              <a:pathLst>
+                <a:path w="0" h="2939814">
+                  <a:moveTo>
+                    <a:pt x="0" y="2939814"/>
+                  </a:moveTo>
+                  <a:lnTo>
+                    <a:pt x="0" y="0"/>
+                  </a:lnTo>
+                  <a:lnTo>
+                    <a:pt x="0" y="0"/>
+                  </a:lnTo>
+                </a:path>
+              </a:pathLst>
+            </a:custGeom>
+            <a:ln w="8130" cap="flat">
+              <a:solidFill>
+                <a:srgbClr val="B0B0B0">
+                  <a:alpha val="34901"/>
+                </a:srgbClr>
+              </a:solidFill>
+              <a:prstDash val="solid"/>
+              <a:round/>
+            </a:ln>
+          </p:spPr>
+          <p:txBody>
+            <a:bodyPr/>
+            <a:lstStyle/>
+            <a:p/>
+          </p:txBody>
+        </p:sp>
+        <p:sp>
+          <p:nvSpPr>
+            <p:cNvPr id="71" name="pt71"/>
+            <p:cNvSpPr/>
+            <p:nvPr/>
+          </p:nvSpPr>
+          <p:spPr>
+            <a:xfrm>
+              <a:off x="8272329" y="4400276"/>
+              <a:ext cx="57127" cy="57127"/>
             </a:xfrm>
             <a:prstGeom prst="ellipse">
               <a:avLst/>
@@ -5359,7 +5749,7 @@
                 <a:alpha val="80000"/>
               </a:srgbClr>
             </a:solidFill>
-            <a:ln w="8590" cap="rnd">
+            <a:ln w="8345" cap="rnd">
               <a:solidFill>
                 <a:srgbClr val="333333">
                   <a:alpha val="80000"/>
@@ -5377,14 +5767,14 @@
         </p:sp>
         <p:sp>
           <p:nvSpPr>
-            <p:cNvPr id="63" name="pt63"/>
-            <p:cNvSpPr/>
-            <p:nvPr/>
-          </p:nvSpPr>
-          <p:spPr>
-            <a:xfrm>
-              <a:off x="8765246" y="4493744"/>
-              <a:ext cx="62793" cy="62793"/>
+            <p:cNvPr id="72" name="pt72"/>
+            <p:cNvSpPr/>
+            <p:nvPr/>
+          </p:nvSpPr>
+          <p:spPr>
+            <a:xfrm>
+              <a:off x="8870859" y="4308818"/>
+              <a:ext cx="57127" cy="57127"/>
             </a:xfrm>
             <a:prstGeom prst="ellipse">
               <a:avLst/>
@@ -5394,7 +5784,7 @@
                 <a:alpha val="80000"/>
               </a:srgbClr>
             </a:solidFill>
-            <a:ln w="8590" cap="rnd">
+            <a:ln w="8345" cap="rnd">
               <a:solidFill>
                 <a:srgbClr val="333333">
                   <a:alpha val="80000"/>
@@ -5412,14 +5802,14 @@
         </p:sp>
         <p:sp>
           <p:nvSpPr>
-            <p:cNvPr id="64" name="pt64"/>
-            <p:cNvSpPr/>
-            <p:nvPr/>
-          </p:nvSpPr>
-          <p:spPr>
-            <a:xfrm>
-              <a:off x="9045273" y="4429192"/>
-              <a:ext cx="62793" cy="62793"/>
+            <p:cNvPr id="73" name="pt73"/>
+            <p:cNvSpPr/>
+            <p:nvPr/>
+          </p:nvSpPr>
+          <p:spPr>
+            <a:xfrm>
+              <a:off x="9194666" y="4250123"/>
+              <a:ext cx="57127" cy="57127"/>
             </a:xfrm>
             <a:prstGeom prst="ellipse">
               <a:avLst/>
@@ -5429,7 +5819,7 @@
                 <a:alpha val="80000"/>
               </a:srgbClr>
             </a:solidFill>
-            <a:ln w="8590" cap="rnd">
+            <a:ln w="8345" cap="rnd">
               <a:solidFill>
                 <a:srgbClr val="333333">
                   <a:alpha val="80000"/>
@@ -5447,14 +5837,14 @@
         </p:sp>
         <p:sp>
           <p:nvSpPr>
-            <p:cNvPr id="65" name="pt65"/>
-            <p:cNvSpPr/>
-            <p:nvPr/>
-          </p:nvSpPr>
-          <p:spPr>
-            <a:xfrm>
-              <a:off x="9249421" y="4392132"/>
-              <a:ext cx="62793" cy="62793"/>
+            <p:cNvPr id="74" name="pt74"/>
+            <p:cNvSpPr/>
+            <p:nvPr/>
+          </p:nvSpPr>
+          <p:spPr>
+            <a:xfrm>
+              <a:off x="9430730" y="4216425"/>
+              <a:ext cx="57127" cy="57127"/>
             </a:xfrm>
             <a:prstGeom prst="ellipse">
               <a:avLst/>
@@ -5464,7 +5854,7 @@
                 <a:alpha val="80000"/>
               </a:srgbClr>
             </a:solidFill>
-            <a:ln w="8590" cap="rnd">
+            <a:ln w="8345" cap="rnd">
               <a:solidFill>
                 <a:srgbClr val="333333">
                   <a:alpha val="80000"/>
@@ -5482,14 +5872,14 @@
         </p:sp>
         <p:sp>
           <p:nvSpPr>
-            <p:cNvPr id="66" name="pt66"/>
-            <p:cNvSpPr/>
-            <p:nvPr/>
-          </p:nvSpPr>
-          <p:spPr>
-            <a:xfrm>
-              <a:off x="9415117" y="4357101"/>
-              <a:ext cx="62793" cy="62793"/>
+            <p:cNvPr id="75" name="pt75"/>
+            <p:cNvSpPr/>
+            <p:nvPr/>
+          </p:nvSpPr>
+          <p:spPr>
+            <a:xfrm>
+              <a:off x="9622331" y="4184572"/>
+              <a:ext cx="57127" cy="57127"/>
             </a:xfrm>
             <a:prstGeom prst="ellipse">
               <a:avLst/>
@@ -5499,7 +5889,7 @@
                 <a:alpha val="80000"/>
               </a:srgbClr>
             </a:solidFill>
-            <a:ln w="8590" cap="rnd">
+            <a:ln w="8345" cap="rnd">
               <a:solidFill>
                 <a:srgbClr val="333333">
                   <a:alpha val="80000"/>
@@ -5517,14 +5907,14 @@
         </p:sp>
         <p:sp>
           <p:nvSpPr>
-            <p:cNvPr id="67" name="pt67"/>
-            <p:cNvSpPr/>
-            <p:nvPr/>
-          </p:nvSpPr>
-          <p:spPr>
-            <a:xfrm>
-              <a:off x="9557493" y="4180009"/>
-              <a:ext cx="62793" cy="62793"/>
+            <p:cNvPr id="76" name="pt76"/>
+            <p:cNvSpPr/>
+            <p:nvPr/>
+          </p:nvSpPr>
+          <p:spPr>
+            <a:xfrm>
+              <a:off x="9786967" y="4023547"/>
+              <a:ext cx="57127" cy="57127"/>
             </a:xfrm>
             <a:prstGeom prst="ellipse">
               <a:avLst/>
@@ -5534,7 +5924,7 @@
                 <a:alpha val="80000"/>
               </a:srgbClr>
             </a:solidFill>
-            <a:ln w="8590" cap="rnd">
+            <a:ln w="8345" cap="rnd">
               <a:solidFill>
                 <a:srgbClr val="333333">
                   <a:alpha val="80000"/>
@@ -5552,14 +5942,14 @@
         </p:sp>
         <p:sp>
           <p:nvSpPr>
-            <p:cNvPr id="68" name="pt68"/>
-            <p:cNvSpPr/>
-            <p:nvPr/>
-          </p:nvSpPr>
-          <p:spPr>
-            <a:xfrm>
-              <a:off x="9684286" y="4110379"/>
-              <a:ext cx="62793" cy="62793"/>
+            <p:cNvPr id="77" name="pt77"/>
+            <p:cNvSpPr/>
+            <p:nvPr/>
+          </p:nvSpPr>
+          <p:spPr>
+            <a:xfrm>
+              <a:off x="9933583" y="3960235"/>
+              <a:ext cx="57127" cy="57127"/>
             </a:xfrm>
             <a:prstGeom prst="ellipse">
               <a:avLst/>
@@ -5569,7 +5959,7 @@
                 <a:alpha val="80000"/>
               </a:srgbClr>
             </a:solidFill>
-            <a:ln w="8590" cap="rnd">
+            <a:ln w="8345" cap="rnd">
               <a:solidFill>
                 <a:srgbClr val="333333">
                   <a:alpha val="80000"/>
@@ -5587,14 +5977,14 @@
         </p:sp>
         <p:sp>
           <p:nvSpPr>
-            <p:cNvPr id="69" name="pt69"/>
-            <p:cNvSpPr/>
-            <p:nvPr/>
-          </p:nvSpPr>
-          <p:spPr>
-            <a:xfrm>
-              <a:off x="9800034" y="4057731"/>
-              <a:ext cx="62793" cy="62793"/>
+            <p:cNvPr id="78" name="pt78"/>
+            <p:cNvSpPr/>
+            <p:nvPr/>
+          </p:nvSpPr>
+          <p:spPr>
+            <a:xfrm>
+              <a:off x="10067428" y="3912364"/>
+              <a:ext cx="57127" cy="57127"/>
             </a:xfrm>
             <a:prstGeom prst="ellipse">
               <a:avLst/>
@@ -5604,7 +5994,7 @@
                 <a:alpha val="80000"/>
               </a:srgbClr>
             </a:solidFill>
-            <a:ln w="8590" cap="rnd">
+            <a:ln w="8345" cap="rnd">
               <a:solidFill>
                 <a:srgbClr val="333333">
                   <a:alpha val="80000"/>
@@ -5622,14 +6012,14 @@
         </p:sp>
         <p:sp>
           <p:nvSpPr>
-            <p:cNvPr id="70" name="pt70"/>
-            <p:cNvSpPr/>
-            <p:nvPr/>
-          </p:nvSpPr>
-          <p:spPr>
-            <a:xfrm>
-              <a:off x="9907661" y="3951000"/>
-              <a:ext cx="62793" cy="62793"/>
+            <p:cNvPr id="79" name="pt79"/>
+            <p:cNvSpPr/>
+            <p:nvPr/>
+          </p:nvSpPr>
+          <p:spPr>
+            <a:xfrm>
+              <a:off x="10191881" y="3815316"/>
+              <a:ext cx="57127" cy="57127"/>
             </a:xfrm>
             <a:prstGeom prst="ellipse">
               <a:avLst/>
@@ -5639,7 +6029,7 @@
                 <a:alpha val="80000"/>
               </a:srgbClr>
             </a:solidFill>
-            <a:ln w="8590" cap="rnd">
+            <a:ln w="8345" cap="rnd">
               <a:solidFill>
                 <a:srgbClr val="333333">
                   <a:alpha val="80000"/>
@@ -5657,14 +6047,14 @@
         </p:sp>
         <p:sp>
           <p:nvSpPr>
-            <p:cNvPr id="71" name="pt71"/>
-            <p:cNvSpPr/>
-            <p:nvPr/>
-          </p:nvSpPr>
-          <p:spPr>
-            <a:xfrm>
-              <a:off x="10009184" y="3859929"/>
-              <a:ext cx="62793" cy="62793"/>
+            <p:cNvPr id="80" name="pt80"/>
+            <p:cNvSpPr/>
+            <p:nvPr/>
+          </p:nvSpPr>
+          <p:spPr>
+            <a:xfrm>
+              <a:off x="10309276" y="3732507"/>
+              <a:ext cx="57127" cy="57127"/>
             </a:xfrm>
             <a:prstGeom prst="ellipse">
               <a:avLst/>
@@ -5674,7 +6064,7 @@
                 <a:alpha val="80000"/>
               </a:srgbClr>
             </a:solidFill>
-            <a:ln w="8590" cap="rnd">
+            <a:ln w="8345" cap="rnd">
               <a:solidFill>
                 <a:srgbClr val="333333">
                   <a:alpha val="80000"/>
@@ -5692,14 +6082,14 @@
         </p:sp>
         <p:sp>
           <p:nvSpPr>
-            <p:cNvPr id="72" name="pt72"/>
-            <p:cNvSpPr/>
-            <p:nvPr/>
-          </p:nvSpPr>
-          <p:spPr>
-            <a:xfrm>
-              <a:off x="10106076" y="3806864"/>
-              <a:ext cx="62793" cy="62793"/>
+            <p:cNvPr id="81" name="pt81"/>
+            <p:cNvSpPr/>
+            <p:nvPr/>
+          </p:nvSpPr>
+          <p:spPr>
+            <a:xfrm>
+              <a:off x="10421317" y="3684256"/>
+              <a:ext cx="57127" cy="57127"/>
             </a:xfrm>
             <a:prstGeom prst="ellipse">
               <a:avLst/>
@@ -5709,7 +6099,7 @@
                 <a:alpha val="80000"/>
               </a:srgbClr>
             </a:solidFill>
-            <a:ln w="8590" cap="rnd">
+            <a:ln w="8345" cap="rnd">
               <a:solidFill>
                 <a:srgbClr val="333333">
                   <a:alpha val="80000"/>
@@ -5727,14 +6117,14 @@
         </p:sp>
         <p:sp>
           <p:nvSpPr>
-            <p:cNvPr id="73" name="pt73"/>
-            <p:cNvSpPr/>
-            <p:nvPr/>
-          </p:nvSpPr>
-          <p:spPr>
-            <a:xfrm>
-              <a:off x="10199467" y="3761982"/>
-              <a:ext cx="62793" cy="62793"/>
+            <p:cNvPr id="82" name="pt82"/>
+            <p:cNvSpPr/>
+            <p:nvPr/>
+          </p:nvSpPr>
+          <p:spPr>
+            <a:xfrm>
+              <a:off x="10529309" y="3643447"/>
+              <a:ext cx="57127" cy="57127"/>
             </a:xfrm>
             <a:prstGeom prst="ellipse">
               <a:avLst/>
@@ -5744,7 +6134,7 @@
                 <a:alpha val="80000"/>
               </a:srgbClr>
             </a:solidFill>
-            <a:ln w="8590" cap="rnd">
+            <a:ln w="8345" cap="rnd">
               <a:solidFill>
                 <a:srgbClr val="333333">
                   <a:alpha val="80000"/>
@@ -5762,14 +6152,14 @@
         </p:sp>
         <p:sp>
           <p:nvSpPr>
-            <p:cNvPr id="74" name="pt74"/>
-            <p:cNvSpPr/>
-            <p:nvPr/>
-          </p:nvSpPr>
-          <p:spPr>
-            <a:xfrm>
-              <a:off x="10290261" y="3756949"/>
-              <a:ext cx="62793" cy="62793"/>
+            <p:cNvPr id="83" name="pt83"/>
+            <p:cNvSpPr/>
+            <p:nvPr/>
+          </p:nvSpPr>
+          <p:spPr>
+            <a:xfrm>
+              <a:off x="10634297" y="3638871"/>
+              <a:ext cx="57127" cy="57127"/>
             </a:xfrm>
             <a:prstGeom prst="ellipse">
               <a:avLst/>
@@ -5779,7 +6169,7 @@
                 <a:alpha val="80000"/>
               </a:srgbClr>
             </a:solidFill>
-            <a:ln w="8590" cap="rnd">
+            <a:ln w="8345" cap="rnd">
               <a:solidFill>
                 <a:srgbClr val="333333">
                   <a:alpha val="80000"/>
@@ -5797,14 +6187,14 @@
         </p:sp>
         <p:sp>
           <p:nvSpPr>
-            <p:cNvPr id="75" name="pt75"/>
-            <p:cNvSpPr/>
-            <p:nvPr/>
-          </p:nvSpPr>
-          <p:spPr>
-            <a:xfrm>
-              <a:off x="10379214" y="3693189"/>
-              <a:ext cx="62793" cy="62793"/>
+            <p:cNvPr id="84" name="pt84"/>
+            <p:cNvSpPr/>
+            <p:nvPr/>
+          </p:nvSpPr>
+          <p:spPr>
+            <a:xfrm>
+              <a:off x="10737158" y="3580896"/>
+              <a:ext cx="57127" cy="57127"/>
             </a:xfrm>
             <a:prstGeom prst="ellipse">
               <a:avLst/>
@@ -5814,7 +6204,7 @@
                 <a:alpha val="80000"/>
               </a:srgbClr>
             </a:solidFill>
-            <a:ln w="8590" cap="rnd">
+            <a:ln w="8345" cap="rnd">
               <a:solidFill>
                 <a:srgbClr val="333333">
                   <a:alpha val="80000"/>
@@ -5832,14 +6222,14 @@
         </p:sp>
         <p:sp>
           <p:nvSpPr>
-            <p:cNvPr id="76" name="pt76"/>
-            <p:cNvSpPr/>
-            <p:nvPr/>
-          </p:nvSpPr>
-          <p:spPr>
-            <a:xfrm>
-              <a:off x="10466989" y="3636540"/>
-              <a:ext cx="62793" cy="62793"/>
+            <p:cNvPr id="85" name="pt85"/>
+            <p:cNvSpPr/>
+            <p:nvPr/>
+          </p:nvSpPr>
+          <p:spPr>
+            <a:xfrm>
+              <a:off x="10838655" y="3529386"/>
+              <a:ext cx="57127" cy="57127"/>
             </a:xfrm>
             <a:prstGeom prst="ellipse">
               <a:avLst/>
@@ -5849,7 +6239,7 @@
                 <a:alpha val="80000"/>
               </a:srgbClr>
             </a:solidFill>
-            <a:ln w="8590" cap="rnd">
+            <a:ln w="8345" cap="rnd">
               <a:solidFill>
                 <a:srgbClr val="333333">
                   <a:alpha val="80000"/>
@@ -5867,14 +6257,14 @@
         </p:sp>
         <p:sp>
           <p:nvSpPr>
-            <p:cNvPr id="77" name="pt77"/>
-            <p:cNvSpPr/>
-            <p:nvPr/>
-          </p:nvSpPr>
-          <p:spPr>
-            <a:xfrm>
-              <a:off x="10554187" y="3624244"/>
-              <a:ext cx="62793" cy="62793"/>
+            <p:cNvPr id="86" name="pt86"/>
+            <p:cNvSpPr/>
+            <p:nvPr/>
+          </p:nvSpPr>
+          <p:spPr>
+            <a:xfrm>
+              <a:off x="10939486" y="3518205"/>
+              <a:ext cx="57127" cy="57127"/>
             </a:xfrm>
             <a:prstGeom prst="ellipse">
               <a:avLst/>
@@ -5884,7 +6274,7 @@
                 <a:alpha val="80000"/>
               </a:srgbClr>
             </a:solidFill>
-            <a:ln w="8590" cap="rnd">
+            <a:ln w="8345" cap="rnd">
               <a:solidFill>
                 <a:srgbClr val="333333">
                   <a:alpha val="80000"/>
@@ -5902,14 +6292,14 @@
         </p:sp>
         <p:sp>
           <p:nvSpPr>
-            <p:cNvPr id="78" name="pt78"/>
-            <p:cNvSpPr/>
-            <p:nvPr/>
-          </p:nvSpPr>
-          <p:spPr>
-            <a:xfrm>
-              <a:off x="10641385" y="3609036"/>
-              <a:ext cx="62793" cy="62793"/>
+            <p:cNvPr id="87" name="pt87"/>
+            <p:cNvSpPr/>
+            <p:nvPr/>
+          </p:nvSpPr>
+          <p:spPr>
+            <a:xfrm>
+              <a:off x="11040317" y="3504377"/>
+              <a:ext cx="57127" cy="57127"/>
             </a:xfrm>
             <a:prstGeom prst="ellipse">
               <a:avLst/>
@@ -5919,7 +6309,7 @@
                 <a:alpha val="80000"/>
               </a:srgbClr>
             </a:solidFill>
-            <a:ln w="8590" cap="rnd">
+            <a:ln w="8345" cap="rnd">
               <a:solidFill>
                 <a:srgbClr val="333333">
                   <a:alpha val="80000"/>
@@ -5937,14 +6327,14 @@
         </p:sp>
         <p:sp>
           <p:nvSpPr>
-            <p:cNvPr id="79" name="pt79"/>
-            <p:cNvSpPr/>
-            <p:nvPr/>
-          </p:nvSpPr>
-          <p:spPr>
-            <a:xfrm>
-              <a:off x="10729159" y="3493331"/>
-              <a:ext cx="62793" cy="62793"/>
+            <p:cNvPr id="88" name="pt88"/>
+            <p:cNvSpPr/>
+            <p:nvPr/>
+          </p:nvSpPr>
+          <p:spPr>
+            <a:xfrm>
+              <a:off x="11141814" y="3399170"/>
+              <a:ext cx="57127" cy="57127"/>
             </a:xfrm>
             <a:prstGeom prst="ellipse">
               <a:avLst/>
@@ -5954,7 +6344,7 @@
                 <a:alpha val="80000"/>
               </a:srgbClr>
             </a:solidFill>
-            <a:ln w="8590" cap="rnd">
+            <a:ln w="8345" cap="rnd">
               <a:solidFill>
                 <a:srgbClr val="333333">
                   <a:alpha val="80000"/>
@@ -5972,14 +6362,14 @@
         </p:sp>
         <p:sp>
           <p:nvSpPr>
-            <p:cNvPr id="80" name="pt80"/>
-            <p:cNvSpPr/>
-            <p:nvPr/>
-          </p:nvSpPr>
-          <p:spPr>
-            <a:xfrm>
-              <a:off x="10818113" y="3489061"/>
-              <a:ext cx="62793" cy="62793"/>
+            <p:cNvPr id="89" name="pt89"/>
+            <p:cNvSpPr/>
+            <p:nvPr/>
+          </p:nvSpPr>
+          <p:spPr>
+            <a:xfrm>
+              <a:off x="11244675" y="3395287"/>
+              <a:ext cx="57127" cy="57127"/>
             </a:xfrm>
             <a:prstGeom prst="ellipse">
               <a:avLst/>
@@ -5989,7 +6379,7 @@
                 <a:alpha val="80000"/>
               </a:srgbClr>
             </a:solidFill>
-            <a:ln w="8590" cap="rnd">
+            <a:ln w="8345" cap="rnd">
               <a:solidFill>
                 <a:srgbClr val="333333">
                   <a:alpha val="80000"/>
@@ -6007,14 +6397,14 @@
         </p:sp>
         <p:sp>
           <p:nvSpPr>
-            <p:cNvPr id="81" name="pt81"/>
-            <p:cNvSpPr/>
-            <p:nvPr/>
-          </p:nvSpPr>
-          <p:spPr>
-            <a:xfrm>
-              <a:off x="10908907" y="3488323"/>
-              <a:ext cx="62793" cy="62793"/>
+            <p:cNvPr id="90" name="pt90"/>
+            <p:cNvSpPr/>
+            <p:nvPr/>
+          </p:nvSpPr>
+          <p:spPr>
+            <a:xfrm>
+              <a:off x="11349664" y="3394616"/>
+              <a:ext cx="57127" cy="57127"/>
             </a:xfrm>
             <a:prstGeom prst="ellipse">
               <a:avLst/>
@@ -6024,7 +6414,7 @@
                 <a:alpha val="80000"/>
               </a:srgbClr>
             </a:solidFill>
-            <a:ln w="8590" cap="rnd">
+            <a:ln w="8345" cap="rnd">
               <a:solidFill>
                 <a:srgbClr val="333333">
                   <a:alpha val="80000"/>
@@ -6042,14 +6432,14 @@
         </p:sp>
         <p:sp>
           <p:nvSpPr>
-            <p:cNvPr id="82" name="pt82"/>
-            <p:cNvSpPr/>
-            <p:nvPr/>
-          </p:nvSpPr>
-          <p:spPr>
-            <a:xfrm>
-              <a:off x="11002298" y="3485176"/>
-              <a:ext cx="62793" cy="62793"/>
+            <p:cNvPr id="91" name="pt91"/>
+            <p:cNvSpPr/>
+            <p:nvPr/>
+          </p:nvSpPr>
+          <p:spPr>
+            <a:xfrm>
+              <a:off x="11457655" y="3391754"/>
+              <a:ext cx="57127" cy="57127"/>
             </a:xfrm>
             <a:prstGeom prst="ellipse">
               <a:avLst/>
@@ -6059,7 +6449,7 @@
                 <a:alpha val="80000"/>
               </a:srgbClr>
             </a:solidFill>
-            <a:ln w="8590" cap="rnd">
+            <a:ln w="8345" cap="rnd">
               <a:solidFill>
                 <a:srgbClr val="333333">
                   <a:alpha val="80000"/>
@@ -6077,14 +6467,14 @@
         </p:sp>
         <p:sp>
           <p:nvSpPr>
-            <p:cNvPr id="83" name="pt83"/>
-            <p:cNvSpPr/>
-            <p:nvPr/>
-          </p:nvSpPr>
-          <p:spPr>
-            <a:xfrm>
-              <a:off x="11099190" y="3352462"/>
-              <a:ext cx="62793" cy="62793"/>
+            <p:cNvPr id="92" name="pt92"/>
+            <p:cNvSpPr/>
+            <p:nvPr/>
+          </p:nvSpPr>
+          <p:spPr>
+            <a:xfrm>
+              <a:off x="11569696" y="3271081"/>
+              <a:ext cx="57127" cy="57127"/>
             </a:xfrm>
             <a:prstGeom prst="ellipse">
               <a:avLst/>
@@ -6094,7 +6484,7 @@
                 <a:alpha val="80000"/>
               </a:srgbClr>
             </a:solidFill>
-            <a:ln w="8590" cap="rnd">
+            <a:ln w="8345" cap="rnd">
               <a:solidFill>
                 <a:srgbClr val="333333">
                   <a:alpha val="80000"/>
@@ -6112,14 +6502,14 @@
         </p:sp>
         <p:sp>
           <p:nvSpPr>
-            <p:cNvPr id="84" name="pt84"/>
-            <p:cNvSpPr/>
-            <p:nvPr/>
-          </p:nvSpPr>
-          <p:spPr>
-            <a:xfrm>
-              <a:off x="11200713" y="3302838"/>
-              <a:ext cx="62793" cy="62793"/>
+            <p:cNvPr id="93" name="pt93"/>
+            <p:cNvSpPr/>
+            <p:nvPr/>
+          </p:nvSpPr>
+          <p:spPr>
+            <a:xfrm>
+              <a:off x="11687091" y="3225960"/>
+              <a:ext cx="57127" cy="57127"/>
             </a:xfrm>
             <a:prstGeom prst="ellipse">
               <a:avLst/>
@@ -6129,7 +6519,7 @@
                 <a:alpha val="80000"/>
               </a:srgbClr>
             </a:solidFill>
-            <a:ln w="8590" cap="rnd">
+            <a:ln w="8345" cap="rnd">
               <a:solidFill>
                 <a:srgbClr val="333333">
                   <a:alpha val="80000"/>
@@ -6147,14 +6537,14 @@
         </p:sp>
         <p:sp>
           <p:nvSpPr>
-            <p:cNvPr id="85" name="pt85"/>
-            <p:cNvSpPr/>
-            <p:nvPr/>
-          </p:nvSpPr>
-          <p:spPr>
-            <a:xfrm>
-              <a:off x="11308340" y="3262644"/>
-              <a:ext cx="62793" cy="62793"/>
+            <p:cNvPr id="94" name="pt94"/>
+            <p:cNvSpPr/>
+            <p:nvPr/>
+          </p:nvSpPr>
+          <p:spPr>
+            <a:xfrm>
+              <a:off x="11811545" y="3189413"/>
+              <a:ext cx="57127" cy="57127"/>
             </a:xfrm>
             <a:prstGeom prst="ellipse">
               <a:avLst/>
@@ -6164,7 +6554,7 @@
                 <a:alpha val="80000"/>
               </a:srgbClr>
             </a:solidFill>
-            <a:ln w="8590" cap="rnd">
+            <a:ln w="8345" cap="rnd">
               <a:solidFill>
                 <a:srgbClr val="333333">
                   <a:alpha val="80000"/>
@@ -6182,14 +6572,14 @@
         </p:sp>
         <p:sp>
           <p:nvSpPr>
-            <p:cNvPr id="86" name="pt86"/>
-            <p:cNvSpPr/>
-            <p:nvPr/>
-          </p:nvSpPr>
-          <p:spPr>
-            <a:xfrm>
-              <a:off x="11424088" y="3186751"/>
-              <a:ext cx="62793" cy="62793"/>
+            <p:cNvPr id="95" name="pt95"/>
+            <p:cNvSpPr/>
+            <p:nvPr/>
+          </p:nvSpPr>
+          <p:spPr>
+            <a:xfrm>
+              <a:off x="11945390" y="3120405"/>
+              <a:ext cx="57127" cy="57127"/>
             </a:xfrm>
             <a:prstGeom prst="ellipse">
               <a:avLst/>
@@ -6199,7 +6589,7 @@
                 <a:alpha val="80000"/>
               </a:srgbClr>
             </a:solidFill>
-            <a:ln w="8590" cap="rnd">
+            <a:ln w="8345" cap="rnd">
               <a:solidFill>
                 <a:srgbClr val="333333">
                   <a:alpha val="80000"/>
@@ -6217,14 +6607,14 @@
         </p:sp>
         <p:sp>
           <p:nvSpPr>
-            <p:cNvPr id="87" name="pt87"/>
-            <p:cNvSpPr/>
-            <p:nvPr/>
-          </p:nvSpPr>
-          <p:spPr>
-            <a:xfrm>
-              <a:off x="11550881" y="3180739"/>
-              <a:ext cx="62793" cy="62793"/>
+            <p:cNvPr id="96" name="pt96"/>
+            <p:cNvSpPr/>
+            <p:nvPr/>
+          </p:nvSpPr>
+          <p:spPr>
+            <a:xfrm>
+              <a:off x="12092006" y="3114938"/>
+              <a:ext cx="57127" cy="57127"/>
             </a:xfrm>
             <a:prstGeom prst="ellipse">
               <a:avLst/>
@@ -6234,7 +6624,7 @@
                 <a:alpha val="80000"/>
               </a:srgbClr>
             </a:solidFill>
-            <a:ln w="8590" cap="rnd">
+            <a:ln w="8345" cap="rnd">
               <a:solidFill>
                 <a:srgbClr val="333333">
                   <a:alpha val="80000"/>
@@ -6252,14 +6642,14 @@
         </p:sp>
         <p:sp>
           <p:nvSpPr>
-            <p:cNvPr id="88" name="pt88"/>
-            <p:cNvSpPr/>
-            <p:nvPr/>
-          </p:nvSpPr>
-          <p:spPr>
-            <a:xfrm>
-              <a:off x="11693257" y="3156108"/>
-              <a:ext cx="62793" cy="62793"/>
+            <p:cNvPr id="97" name="pt97"/>
+            <p:cNvSpPr/>
+            <p:nvPr/>
+          </p:nvSpPr>
+          <p:spPr>
+            <a:xfrm>
+              <a:off x="12256641" y="3092542"/>
+              <a:ext cx="57127" cy="57127"/>
             </a:xfrm>
             <a:prstGeom prst="ellipse">
               <a:avLst/>
@@ -6269,7 +6659,7 @@
                 <a:alpha val="80000"/>
               </a:srgbClr>
             </a:solidFill>
-            <a:ln w="8590" cap="rnd">
+            <a:ln w="8345" cap="rnd">
               <a:solidFill>
                 <a:srgbClr val="333333">
                   <a:alpha val="80000"/>
@@ -6287,14 +6677,14 @@
         </p:sp>
         <p:sp>
           <p:nvSpPr>
-            <p:cNvPr id="89" name="pt89"/>
-            <p:cNvSpPr/>
-            <p:nvPr/>
-          </p:nvSpPr>
-          <p:spPr>
-            <a:xfrm>
-              <a:off x="11858953" y="3117001"/>
-              <a:ext cx="62793" cy="62793"/>
+            <p:cNvPr id="98" name="pt98"/>
+            <p:cNvSpPr/>
+            <p:nvPr/>
+          </p:nvSpPr>
+          <p:spPr>
+            <a:xfrm>
+              <a:off x="12448242" y="3056983"/>
+              <a:ext cx="57127" cy="57127"/>
             </a:xfrm>
             <a:prstGeom prst="ellipse">
               <a:avLst/>
@@ -6304,7 +6694,7 @@
                 <a:alpha val="80000"/>
               </a:srgbClr>
             </a:solidFill>
-            <a:ln w="8590" cap="rnd">
+            <a:ln w="8345" cap="rnd">
               <a:solidFill>
                 <a:srgbClr val="333333">
                   <a:alpha val="80000"/>
@@ -6322,14 +6712,14 @@
         </p:sp>
         <p:sp>
           <p:nvSpPr>
-            <p:cNvPr id="90" name="pt90"/>
-            <p:cNvSpPr/>
-            <p:nvPr/>
-          </p:nvSpPr>
-          <p:spPr>
-            <a:xfrm>
-              <a:off x="12063101" y="3105020"/>
-              <a:ext cx="62793" cy="62793"/>
+            <p:cNvPr id="99" name="pt99"/>
+            <p:cNvSpPr/>
+            <p:nvPr/>
+          </p:nvSpPr>
+          <p:spPr>
+            <a:xfrm>
+              <a:off x="12684307" y="3046089"/>
+              <a:ext cx="57127" cy="57127"/>
             </a:xfrm>
             <a:prstGeom prst="ellipse">
               <a:avLst/>
@@ -6339,7 +6729,7 @@
                 <a:alpha val="80000"/>
               </a:srgbClr>
             </a:solidFill>
-            <a:ln w="8590" cap="rnd">
+            <a:ln w="8345" cap="rnd">
               <a:solidFill>
                 <a:srgbClr val="333333">
                   <a:alpha val="80000"/>
@@ -6357,14 +6747,14 @@
         </p:sp>
         <p:sp>
           <p:nvSpPr>
-            <p:cNvPr id="91" name="pt91"/>
-            <p:cNvSpPr/>
-            <p:nvPr/>
-          </p:nvSpPr>
-          <p:spPr>
-            <a:xfrm>
-              <a:off x="12343127" y="2449747"/>
-              <a:ext cx="62793" cy="62793"/>
+            <p:cNvPr id="100" name="pt100"/>
+            <p:cNvSpPr/>
+            <p:nvPr/>
+          </p:nvSpPr>
+          <p:spPr>
+            <a:xfrm>
+              <a:off x="13008113" y="2450267"/>
+              <a:ext cx="57127" cy="57127"/>
             </a:xfrm>
             <a:prstGeom prst="ellipse">
               <a:avLst/>
@@ -6374,7 +6764,7 @@
                 <a:alpha val="80000"/>
               </a:srgbClr>
             </a:solidFill>
-            <a:ln w="8590" cap="rnd">
+            <a:ln w="8345" cap="rnd">
               <a:solidFill>
                 <a:srgbClr val="333333">
                   <a:alpha val="80000"/>
@@ -6392,14 +6782,14 @@
         </p:sp>
         <p:sp>
           <p:nvSpPr>
-            <p:cNvPr id="92" name="pt92"/>
-            <p:cNvSpPr/>
-            <p:nvPr/>
-          </p:nvSpPr>
-          <p:spPr>
-            <a:xfrm>
-              <a:off x="12860733" y="1849742"/>
-              <a:ext cx="62793" cy="62793"/>
+            <p:cNvPr id="101" name="pt101"/>
+            <p:cNvSpPr/>
+            <p:nvPr/>
+          </p:nvSpPr>
+          <p:spPr>
+            <a:xfrm>
+              <a:off x="13606643" y="1904699"/>
+              <a:ext cx="57127" cy="57127"/>
             </a:xfrm>
             <a:prstGeom prst="ellipse">
               <a:avLst/>
@@ -6409,7 +6799,7 @@
                 <a:alpha val="80000"/>
               </a:srgbClr>
             </a:solidFill>
-            <a:ln w="8590" cap="rnd">
+            <a:ln w="8345" cap="rnd">
               <a:solidFill>
                 <a:srgbClr val="333333">
                   <a:alpha val="80000"/>
@@ -6427,29 +6817,29 @@
         </p:sp>
         <p:sp>
           <p:nvSpPr>
-            <p:cNvPr id="93" name="pl93"/>
-            <p:cNvSpPr/>
-            <p:nvPr/>
-          </p:nvSpPr>
-          <p:spPr>
-            <a:xfrm>
-              <a:off x="8048383" y="2414994"/>
-              <a:ext cx="5074401" cy="2519912"/>
+            <p:cNvPr id="102" name="pl102"/>
+            <p:cNvSpPr/>
+            <p:nvPr/>
+          </p:nvSpPr>
+          <p:spPr>
+            <a:xfrm>
+              <a:off x="8034178" y="2418683"/>
+              <a:ext cx="5867744" cy="2291288"/>
             </a:xfrm>
             <a:custGeom>
               <a:avLst/>
               <a:pathLst>
-                <a:path w="5074401" h="2519912">
+                <a:path w="5867744" h="2291288">
                   <a:moveTo>
-                    <a:pt x="0" y="2519912"/>
+                    <a:pt x="0" y="2291288"/>
                   </a:moveTo>
                   <a:lnTo>
-                    <a:pt x="5074401" y="0"/>
+                    <a:pt x="5867744" y="0"/>
                   </a:lnTo>
                 </a:path>
               </a:pathLst>
             </a:custGeom>
-            <a:ln w="12934" cap="flat">
+            <a:ln w="12565" cap="flat">
               <a:solidFill>
                 <a:srgbClr val="FC8D59">
                   <a:alpha val="100000"/>
@@ -6467,21 +6857,21 @@
         </p:sp>
         <p:sp>
           <p:nvSpPr>
-            <p:cNvPr id="94" name="pl94"/>
-            <p:cNvSpPr/>
-            <p:nvPr/>
-          </p:nvSpPr>
-          <p:spPr>
-            <a:xfrm>
-              <a:off x="8048383" y="1734178"/>
-              <a:ext cx="0" cy="3233148"/>
+            <p:cNvPr id="103" name="pl103"/>
+            <p:cNvSpPr/>
+            <p:nvPr/>
+          </p:nvSpPr>
+          <p:spPr>
+            <a:xfrm>
+              <a:off x="8034178" y="1799635"/>
+              <a:ext cx="0" cy="2939814"/>
             </a:xfrm>
             <a:custGeom>
               <a:avLst/>
               <a:pathLst>
-                <a:path w="0" h="3233148">
+                <a:path w="0" h="2939814">
                   <a:moveTo>
-                    <a:pt x="0" y="3233148"/>
+                    <a:pt x="0" y="2939814"/>
                   </a:moveTo>
                   <a:lnTo>
                     <a:pt x="0" y="0"/>
@@ -6489,7 +6879,7 @@
                 </a:path>
               </a:pathLst>
             </a:custGeom>
-            <a:ln w="12934" cap="sq">
+            <a:ln w="12565" cap="sq">
               <a:solidFill>
                 <a:srgbClr val="000000">
                   <a:alpha val="100000"/>
@@ -6507,14 +6897,14 @@
         </p:sp>
         <p:sp>
           <p:nvSpPr>
-            <p:cNvPr id="95" name="tx95"/>
-            <p:cNvSpPr/>
-            <p:nvPr/>
-          </p:nvSpPr>
-          <p:spPr>
-            <a:xfrm>
-              <a:off x="7893744" y="4789649"/>
-              <a:ext cx="94855" cy="76676"/>
+            <p:cNvPr id="104" name="tx104"/>
+            <p:cNvSpPr/>
+            <p:nvPr/>
+          </p:nvSpPr>
+          <p:spPr>
+            <a:xfrm>
+              <a:off x="7883957" y="4575500"/>
+              <a:ext cx="92145" cy="74485"/>
             </a:xfrm>
             <a:prstGeom prst="rect">
               <a:avLst/>
@@ -6527,7 +6917,7 @@
             <a:p>
               <a:pPr algn="l" marL="0" marR="0" indent="0">
                 <a:lnSpc>
-                  <a:spcPts val="840"/>
+                  <a:spcPts val="816"/>
                 </a:lnSpc>
                 <a:spcBef>
                   <a:spcPts val="0"/>
@@ -6537,7 +6927,7 @@
                 </a:spcAft>
               </a:pPr>
               <a:r>
-                <a:rPr sz="840">
+                <a:rPr sz="816">
                   <a:solidFill>
                     <a:srgbClr val="1A1A1A">
                       <a:alpha val="100000"/>
@@ -6553,14 +6943,14 @@
         </p:sp>
         <p:sp>
           <p:nvSpPr>
-            <p:cNvPr id="96" name="tx96"/>
-            <p:cNvSpPr/>
-            <p:nvPr/>
-          </p:nvSpPr>
-          <p:spPr>
-            <a:xfrm>
-              <a:off x="7893744" y="4195125"/>
-              <a:ext cx="94855" cy="76676"/>
+            <p:cNvPr id="105" name="tx105"/>
+            <p:cNvSpPr/>
+            <p:nvPr/>
+          </p:nvSpPr>
+          <p:spPr>
+            <a:xfrm>
+              <a:off x="7883957" y="4034915"/>
+              <a:ext cx="92145" cy="74485"/>
             </a:xfrm>
             <a:prstGeom prst="rect">
               <a:avLst/>
@@ -6573,7 +6963,7 @@
             <a:p>
               <a:pPr algn="l" marL="0" marR="0" indent="0">
                 <a:lnSpc>
-                  <a:spcPts val="840"/>
+                  <a:spcPts val="816"/>
                 </a:lnSpc>
                 <a:spcBef>
                   <a:spcPts val="0"/>
@@ -6583,7 +6973,7 @@
                 </a:spcAft>
               </a:pPr>
               <a:r>
-                <a:rPr sz="840">
+                <a:rPr sz="816">
                   <a:solidFill>
                     <a:srgbClr val="1A1A1A">
                       <a:alpha val="100000"/>
@@ -6599,14 +6989,14 @@
         </p:sp>
         <p:sp>
           <p:nvSpPr>
-            <p:cNvPr id="97" name="tx97"/>
-            <p:cNvSpPr/>
-            <p:nvPr/>
-          </p:nvSpPr>
-          <p:spPr>
-            <a:xfrm>
-              <a:off x="7929269" y="3599299"/>
-              <a:ext cx="59330" cy="77978"/>
+            <p:cNvPr id="106" name="tx106"/>
+            <p:cNvSpPr/>
+            <p:nvPr/>
+          </p:nvSpPr>
+          <p:spPr>
+            <a:xfrm>
+              <a:off x="7918467" y="3493066"/>
+              <a:ext cx="57635" cy="75750"/>
             </a:xfrm>
             <a:prstGeom prst="rect">
               <a:avLst/>
@@ -6619,7 +7009,7 @@
             <a:p>
               <a:pPr algn="l" marL="0" marR="0" indent="0">
                 <a:lnSpc>
-                  <a:spcPts val="840"/>
+                  <a:spcPts val="816"/>
                 </a:lnSpc>
                 <a:spcBef>
                   <a:spcPts val="0"/>
@@ -6629,7 +7019,7 @@
                 </a:spcAft>
               </a:pPr>
               <a:r>
-                <a:rPr sz="840">
+                <a:rPr sz="816">
                   <a:solidFill>
                     <a:srgbClr val="1A1A1A">
                       <a:alpha val="100000"/>
@@ -6645,14 +7035,14 @@
         </p:sp>
         <p:sp>
           <p:nvSpPr>
-            <p:cNvPr id="98" name="tx98"/>
-            <p:cNvSpPr/>
-            <p:nvPr/>
-          </p:nvSpPr>
-          <p:spPr>
-            <a:xfrm>
-              <a:off x="7929269" y="3006078"/>
-              <a:ext cx="59330" cy="76676"/>
+            <p:cNvPr id="107" name="tx107"/>
+            <p:cNvSpPr/>
+            <p:nvPr/>
+          </p:nvSpPr>
+          <p:spPr>
+            <a:xfrm>
+              <a:off x="7918467" y="2953747"/>
+              <a:ext cx="57635" cy="74485"/>
             </a:xfrm>
             <a:prstGeom prst="rect">
               <a:avLst/>
@@ -6665,7 +7055,7 @@
             <a:p>
               <a:pPr algn="l" marL="0" marR="0" indent="0">
                 <a:lnSpc>
-                  <a:spcPts val="840"/>
+                  <a:spcPts val="816"/>
                 </a:lnSpc>
                 <a:spcBef>
                   <a:spcPts val="0"/>
@@ -6675,7 +7065,7 @@
                 </a:spcAft>
               </a:pPr>
               <a:r>
-                <a:rPr sz="840">
+                <a:rPr sz="816">
                   <a:solidFill>
                     <a:srgbClr val="1A1A1A">
                       <a:alpha val="100000"/>
@@ -6691,14 +7081,14 @@
         </p:sp>
         <p:sp>
           <p:nvSpPr>
-            <p:cNvPr id="99" name="tx99"/>
-            <p:cNvSpPr/>
-            <p:nvPr/>
-          </p:nvSpPr>
-          <p:spPr>
-            <a:xfrm>
-              <a:off x="7929269" y="2411554"/>
-              <a:ext cx="59330" cy="76676"/>
+            <p:cNvPr id="108" name="tx108"/>
+            <p:cNvSpPr/>
+            <p:nvPr/>
+          </p:nvSpPr>
+          <p:spPr>
+            <a:xfrm>
+              <a:off x="7918467" y="2413162"/>
+              <a:ext cx="57635" cy="74485"/>
             </a:xfrm>
             <a:prstGeom prst="rect">
               <a:avLst/>
@@ -6711,7 +7101,7 @@
             <a:p>
               <a:pPr algn="l" marL="0" marR="0" indent="0">
                 <a:lnSpc>
-                  <a:spcPts val="840"/>
+                  <a:spcPts val="816"/>
                 </a:lnSpc>
                 <a:spcBef>
                   <a:spcPts val="0"/>
@@ -6721,7 +7111,7 @@
                 </a:spcAft>
               </a:pPr>
               <a:r>
-                <a:rPr sz="840">
+                <a:rPr sz="816">
                   <a:solidFill>
                     <a:srgbClr val="1A1A1A">
                       <a:alpha val="100000"/>
@@ -6737,14 +7127,14 @@
         </p:sp>
         <p:sp>
           <p:nvSpPr>
-            <p:cNvPr id="100" name="tx100"/>
-            <p:cNvSpPr/>
-            <p:nvPr/>
-          </p:nvSpPr>
-          <p:spPr>
-            <a:xfrm>
-              <a:off x="7929269" y="1815676"/>
-              <a:ext cx="59330" cy="78030"/>
+            <p:cNvPr id="109" name="tx109"/>
+            <p:cNvSpPr/>
+            <p:nvPr/>
+          </p:nvSpPr>
+          <p:spPr>
+            <a:xfrm>
+              <a:off x="7918467" y="1871262"/>
+              <a:ext cx="57635" cy="75801"/>
             </a:xfrm>
             <a:prstGeom prst="rect">
               <a:avLst/>
@@ -6757,7 +7147,7 @@
             <a:p>
               <a:pPr algn="l" marL="0" marR="0" indent="0">
                 <a:lnSpc>
-                  <a:spcPts val="840"/>
+                  <a:spcPts val="816"/>
                 </a:lnSpc>
                 <a:spcBef>
                   <a:spcPts val="0"/>
@@ -6767,7 +7157,7 @@
                 </a:spcAft>
               </a:pPr>
               <a:r>
-                <a:rPr sz="840">
+                <a:rPr sz="816">
                   <a:solidFill>
                     <a:srgbClr val="1A1A1A">
                       <a:alpha val="100000"/>
@@ -6783,29 +7173,29 @@
         </p:sp>
         <p:sp>
           <p:nvSpPr>
-            <p:cNvPr id="101" name="pl101"/>
-            <p:cNvSpPr/>
-            <p:nvPr/>
-          </p:nvSpPr>
-          <p:spPr>
-            <a:xfrm>
-              <a:off x="8015170" y="4828143"/>
-              <a:ext cx="33212" cy="0"/>
+            <p:cNvPr id="110" name="pl110"/>
+            <p:cNvSpPr/>
+            <p:nvPr/>
+          </p:nvSpPr>
+          <p:spPr>
+            <a:xfrm>
+              <a:off x="8001914" y="4612894"/>
+              <a:ext cx="32264" cy="0"/>
             </a:xfrm>
             <a:custGeom>
               <a:avLst/>
               <a:pathLst>
-                <a:path w="33212" h="0">
+                <a:path w="32264" h="0">
                   <a:moveTo>
                     <a:pt x="0" y="0"/>
                   </a:moveTo>
                   <a:lnTo>
-                    <a:pt x="33212" y="0"/>
+                    <a:pt x="32264" y="0"/>
                   </a:lnTo>
                 </a:path>
               </a:pathLst>
             </a:custGeom>
-            <a:ln w="12934" cap="flat">
+            <a:ln w="12565" cap="flat">
               <a:solidFill>
                 <a:srgbClr val="000000">
                   <a:alpha val="100000"/>
@@ -6823,29 +7213,29 @@
         </p:sp>
         <p:sp>
           <p:nvSpPr>
-            <p:cNvPr id="102" name="pl102"/>
-            <p:cNvSpPr/>
-            <p:nvPr/>
-          </p:nvSpPr>
-          <p:spPr>
-            <a:xfrm>
-              <a:off x="8015170" y="4233620"/>
-              <a:ext cx="33212" cy="0"/>
+            <p:cNvPr id="111" name="pl111"/>
+            <p:cNvSpPr/>
+            <p:nvPr/>
+          </p:nvSpPr>
+          <p:spPr>
+            <a:xfrm>
+              <a:off x="8001914" y="4072310"/>
+              <a:ext cx="32264" cy="0"/>
             </a:xfrm>
             <a:custGeom>
               <a:avLst/>
               <a:pathLst>
-                <a:path w="33212" h="0">
+                <a:path w="32264" h="0">
                   <a:moveTo>
                     <a:pt x="0" y="0"/>
                   </a:moveTo>
                   <a:lnTo>
-                    <a:pt x="33212" y="0"/>
+                    <a:pt x="32264" y="0"/>
                   </a:lnTo>
                 </a:path>
               </a:pathLst>
             </a:custGeom>
-            <a:ln w="12934" cap="flat">
+            <a:ln w="12565" cap="flat">
               <a:solidFill>
                 <a:srgbClr val="000000">
                   <a:alpha val="100000"/>
@@ -6863,29 +7253,29 @@
         </p:sp>
         <p:sp>
           <p:nvSpPr>
-            <p:cNvPr id="103" name="pl103"/>
-            <p:cNvSpPr/>
-            <p:nvPr/>
-          </p:nvSpPr>
-          <p:spPr>
-            <a:xfrm>
-              <a:off x="8015170" y="3639096"/>
-              <a:ext cx="33212" cy="0"/>
+            <p:cNvPr id="112" name="pl112"/>
+            <p:cNvSpPr/>
+            <p:nvPr/>
+          </p:nvSpPr>
+          <p:spPr>
+            <a:xfrm>
+              <a:off x="8001914" y="3531726"/>
+              <a:ext cx="32264" cy="0"/>
             </a:xfrm>
             <a:custGeom>
               <a:avLst/>
               <a:pathLst>
-                <a:path w="33212" h="0">
+                <a:path w="32264" h="0">
                   <a:moveTo>
                     <a:pt x="0" y="0"/>
                   </a:moveTo>
                   <a:lnTo>
-                    <a:pt x="33212" y="0"/>
+                    <a:pt x="32264" y="0"/>
                   </a:lnTo>
                 </a:path>
               </a:pathLst>
             </a:custGeom>
-            <a:ln w="12934" cap="flat">
+            <a:ln w="12565" cap="flat">
               <a:solidFill>
                 <a:srgbClr val="000000">
                   <a:alpha val="100000"/>
@@ -6903,29 +7293,29 @@
         </p:sp>
         <p:sp>
           <p:nvSpPr>
-            <p:cNvPr id="104" name="pl104"/>
-            <p:cNvSpPr/>
-            <p:nvPr/>
-          </p:nvSpPr>
-          <p:spPr>
-            <a:xfrm>
-              <a:off x="8015170" y="3044572"/>
-              <a:ext cx="33212" cy="0"/>
+            <p:cNvPr id="113" name="pl113"/>
+            <p:cNvSpPr/>
+            <p:nvPr/>
+          </p:nvSpPr>
+          <p:spPr>
+            <a:xfrm>
+              <a:off x="8001914" y="2991141"/>
+              <a:ext cx="32264" cy="0"/>
             </a:xfrm>
             <a:custGeom>
               <a:avLst/>
               <a:pathLst>
-                <a:path w="33212" h="0">
+                <a:path w="32264" h="0">
                   <a:moveTo>
                     <a:pt x="0" y="0"/>
                   </a:moveTo>
                   <a:lnTo>
-                    <a:pt x="33212" y="0"/>
+                    <a:pt x="32264" y="0"/>
                   </a:lnTo>
                 </a:path>
               </a:pathLst>
             </a:custGeom>
-            <a:ln w="12934" cap="flat">
+            <a:ln w="12565" cap="flat">
               <a:solidFill>
                 <a:srgbClr val="000000">
                   <a:alpha val="100000"/>
@@ -6943,29 +7333,29 @@
         </p:sp>
         <p:sp>
           <p:nvSpPr>
-            <p:cNvPr id="105" name="pl105"/>
-            <p:cNvSpPr/>
-            <p:nvPr/>
-          </p:nvSpPr>
-          <p:spPr>
-            <a:xfrm>
-              <a:off x="8015170" y="2450048"/>
-              <a:ext cx="33212" cy="0"/>
+            <p:cNvPr id="114" name="pl114"/>
+            <p:cNvSpPr/>
+            <p:nvPr/>
+          </p:nvSpPr>
+          <p:spPr>
+            <a:xfrm>
+              <a:off x="8001914" y="2450557"/>
+              <a:ext cx="32264" cy="0"/>
             </a:xfrm>
             <a:custGeom>
               <a:avLst/>
               <a:pathLst>
-                <a:path w="33212" h="0">
+                <a:path w="32264" h="0">
                   <a:moveTo>
                     <a:pt x="0" y="0"/>
                   </a:moveTo>
                   <a:lnTo>
-                    <a:pt x="33212" y="0"/>
+                    <a:pt x="32264" y="0"/>
                   </a:lnTo>
                 </a:path>
               </a:pathLst>
             </a:custGeom>
-            <a:ln w="12934" cap="flat">
+            <a:ln w="12565" cap="flat">
               <a:solidFill>
                 <a:srgbClr val="000000">
                   <a:alpha val="100000"/>
@@ -6983,29 +7373,29 @@
         </p:sp>
         <p:sp>
           <p:nvSpPr>
-            <p:cNvPr id="106" name="pl106"/>
-            <p:cNvSpPr/>
-            <p:nvPr/>
-          </p:nvSpPr>
-          <p:spPr>
-            <a:xfrm>
-              <a:off x="8015170" y="1855525"/>
-              <a:ext cx="33212" cy="0"/>
+            <p:cNvPr id="115" name="pl115"/>
+            <p:cNvSpPr/>
+            <p:nvPr/>
+          </p:nvSpPr>
+          <p:spPr>
+            <a:xfrm>
+              <a:off x="8001914" y="1909972"/>
+              <a:ext cx="32264" cy="0"/>
             </a:xfrm>
             <a:custGeom>
               <a:avLst/>
               <a:pathLst>
-                <a:path w="33212" h="0">
+                <a:path w="32264" h="0">
                   <a:moveTo>
                     <a:pt x="0" y="0"/>
                   </a:moveTo>
                   <a:lnTo>
-                    <a:pt x="33212" y="0"/>
+                    <a:pt x="32264" y="0"/>
                   </a:lnTo>
                 </a:path>
               </a:pathLst>
             </a:custGeom>
-            <a:ln w="12934" cap="flat">
+            <a:ln w="12565" cap="flat">
               <a:solidFill>
                 <a:srgbClr val="000000">
                   <a:alpha val="100000"/>
@@ -7023,29 +7413,29 @@
         </p:sp>
         <p:sp>
           <p:nvSpPr>
-            <p:cNvPr id="107" name="pl107"/>
-            <p:cNvSpPr/>
-            <p:nvPr/>
-          </p:nvSpPr>
-          <p:spPr>
-            <a:xfrm>
-              <a:off x="8048383" y="4967326"/>
-              <a:ext cx="5074401" cy="0"/>
+            <p:cNvPr id="116" name="pl116"/>
+            <p:cNvSpPr/>
+            <p:nvPr/>
+          </p:nvSpPr>
+          <p:spPr>
+            <a:xfrm>
+              <a:off x="8034178" y="4739450"/>
+              <a:ext cx="5867744" cy="0"/>
             </a:xfrm>
             <a:custGeom>
               <a:avLst/>
               <a:pathLst>
-                <a:path w="5074401" h="0">
+                <a:path w="5867744" h="0">
                   <a:moveTo>
                     <a:pt x="0" y="0"/>
                   </a:moveTo>
                   <a:lnTo>
-                    <a:pt x="5074401" y="0"/>
+                    <a:pt x="5867744" y="0"/>
                   </a:lnTo>
                 </a:path>
               </a:pathLst>
             </a:custGeom>
-            <a:ln w="12934" cap="sq">
+            <a:ln w="12565" cap="sq">
               <a:solidFill>
                 <a:srgbClr val="000000">
                   <a:alpha val="100000"/>
@@ -7063,21 +7453,21 @@
         </p:sp>
         <p:sp>
           <p:nvSpPr>
-            <p:cNvPr id="108" name="pl108"/>
-            <p:cNvSpPr/>
-            <p:nvPr/>
-          </p:nvSpPr>
-          <p:spPr>
-            <a:xfrm>
-              <a:off x="8431139" y="4967326"/>
-              <a:ext cx="0" cy="33212"/>
+            <p:cNvPr id="117" name="pl117"/>
+            <p:cNvSpPr/>
+            <p:nvPr/>
+          </p:nvSpPr>
+          <p:spPr>
+            <a:xfrm>
+              <a:off x="8476775" y="4739450"/>
+              <a:ext cx="0" cy="32264"/>
             </a:xfrm>
             <a:custGeom>
               <a:avLst/>
               <a:pathLst>
-                <a:path w="0" h="33212">
+                <a:path w="0" h="32264">
                   <a:moveTo>
-                    <a:pt x="0" y="33212"/>
+                    <a:pt x="0" y="32264"/>
                   </a:moveTo>
                   <a:lnTo>
                     <a:pt x="0" y="0"/>
@@ -7085,7 +7475,7 @@
                 </a:path>
               </a:pathLst>
             </a:custGeom>
-            <a:ln w="12934" cap="flat">
+            <a:ln w="12565" cap="flat">
               <a:solidFill>
                 <a:srgbClr val="000000">
                   <a:alpha val="100000"/>
@@ -7103,21 +7493,21 @@
         </p:sp>
         <p:sp>
           <p:nvSpPr>
-            <p:cNvPr id="109" name="pl109"/>
-            <p:cNvSpPr/>
-            <p:nvPr/>
-          </p:nvSpPr>
-          <p:spPr>
-            <a:xfrm>
-              <a:off x="9508361" y="4967326"/>
-              <a:ext cx="0" cy="33212"/>
+            <p:cNvPr id="118" name="pl118"/>
+            <p:cNvSpPr/>
+            <p:nvPr/>
+          </p:nvSpPr>
+          <p:spPr>
+            <a:xfrm>
+              <a:off x="9722413" y="4739450"/>
+              <a:ext cx="0" cy="32264"/>
             </a:xfrm>
             <a:custGeom>
               <a:avLst/>
               <a:pathLst>
-                <a:path w="0" h="33212">
+                <a:path w="0" h="32264">
                   <a:moveTo>
-                    <a:pt x="0" y="33212"/>
+                    <a:pt x="0" y="32264"/>
                   </a:moveTo>
                   <a:lnTo>
                     <a:pt x="0" y="0"/>
@@ -7125,7 +7515,7 @@
                 </a:path>
               </a:pathLst>
             </a:custGeom>
-            <a:ln w="12934" cap="flat">
+            <a:ln w="12565" cap="flat">
               <a:solidFill>
                 <a:srgbClr val="000000">
                   <a:alpha val="100000"/>
@@ -7143,21 +7533,21 @@
         </p:sp>
         <p:sp>
           <p:nvSpPr>
-            <p:cNvPr id="110" name="pl110"/>
-            <p:cNvSpPr/>
-            <p:nvPr/>
-          </p:nvSpPr>
-          <p:spPr>
-            <a:xfrm>
-              <a:off x="10585584" y="4967326"/>
-              <a:ext cx="0" cy="33212"/>
+            <p:cNvPr id="119" name="pl119"/>
+            <p:cNvSpPr/>
+            <p:nvPr/>
+          </p:nvSpPr>
+          <p:spPr>
+            <a:xfrm>
+              <a:off x="10968050" y="4739450"/>
+              <a:ext cx="0" cy="32264"/>
             </a:xfrm>
             <a:custGeom>
               <a:avLst/>
               <a:pathLst>
-                <a:path w="0" h="33212">
+                <a:path w="0" h="32264">
                   <a:moveTo>
-                    <a:pt x="0" y="33212"/>
+                    <a:pt x="0" y="32264"/>
                   </a:moveTo>
                   <a:lnTo>
                     <a:pt x="0" y="0"/>
@@ -7165,7 +7555,7 @@
                 </a:path>
               </a:pathLst>
             </a:custGeom>
-            <a:ln w="12934" cap="flat">
+            <a:ln w="12565" cap="flat">
               <a:solidFill>
                 <a:srgbClr val="000000">
                   <a:alpha val="100000"/>
@@ -7183,21 +7573,21 @@
         </p:sp>
         <p:sp>
           <p:nvSpPr>
-            <p:cNvPr id="111" name="pl111"/>
-            <p:cNvSpPr/>
-            <p:nvPr/>
-          </p:nvSpPr>
-          <p:spPr>
-            <a:xfrm>
-              <a:off x="11662806" y="4967326"/>
-              <a:ext cx="0" cy="33212"/>
+            <p:cNvPr id="120" name="pl120"/>
+            <p:cNvSpPr/>
+            <p:nvPr/>
+          </p:nvSpPr>
+          <p:spPr>
+            <a:xfrm>
+              <a:off x="12213688" y="4739450"/>
+              <a:ext cx="0" cy="32264"/>
             </a:xfrm>
             <a:custGeom>
               <a:avLst/>
               <a:pathLst>
-                <a:path w="0" h="33212">
+                <a:path w="0" h="32264">
                   <a:moveTo>
-                    <a:pt x="0" y="33212"/>
+                    <a:pt x="0" y="32264"/>
                   </a:moveTo>
                   <a:lnTo>
                     <a:pt x="0" y="0"/>
@@ -7205,7 +7595,7 @@
                 </a:path>
               </a:pathLst>
             </a:custGeom>
-            <a:ln w="12934" cap="flat">
+            <a:ln w="12565" cap="flat">
               <a:solidFill>
                 <a:srgbClr val="000000">
                   <a:alpha val="100000"/>
@@ -7223,21 +7613,21 @@
         </p:sp>
         <p:sp>
           <p:nvSpPr>
-            <p:cNvPr id="112" name="pl112"/>
-            <p:cNvSpPr/>
-            <p:nvPr/>
-          </p:nvSpPr>
-          <p:spPr>
-            <a:xfrm>
-              <a:off x="12740028" y="4967326"/>
-              <a:ext cx="0" cy="33212"/>
+            <p:cNvPr id="121" name="pl121"/>
+            <p:cNvSpPr/>
+            <p:nvPr/>
+          </p:nvSpPr>
+          <p:spPr>
+            <a:xfrm>
+              <a:off x="13459325" y="4739450"/>
+              <a:ext cx="0" cy="32264"/>
             </a:xfrm>
             <a:custGeom>
               <a:avLst/>
               <a:pathLst>
-                <a:path w="0" h="33212">
+                <a:path w="0" h="32264">
                   <a:moveTo>
-                    <a:pt x="0" y="33212"/>
+                    <a:pt x="0" y="32264"/>
                   </a:moveTo>
                   <a:lnTo>
                     <a:pt x="0" y="0"/>
@@ -7245,7 +7635,7 @@
                 </a:path>
               </a:pathLst>
             </a:custGeom>
-            <a:ln w="12934" cap="flat">
+            <a:ln w="12565" cap="flat">
               <a:solidFill>
                 <a:srgbClr val="000000">
                   <a:alpha val="100000"/>
@@ -7263,14 +7653,14 @@
         </p:sp>
         <p:sp>
           <p:nvSpPr>
-            <p:cNvPr id="113" name="tx113"/>
-            <p:cNvSpPr/>
-            <p:nvPr/>
-          </p:nvSpPr>
-          <p:spPr>
-            <a:xfrm>
-              <a:off x="8383711" y="5026797"/>
-              <a:ext cx="94855" cy="76676"/>
+            <p:cNvPr id="122" name="tx122"/>
+            <p:cNvSpPr/>
+            <p:nvPr/>
+          </p:nvSpPr>
+          <p:spPr>
+            <a:xfrm>
+              <a:off x="8430702" y="4797221"/>
+              <a:ext cx="92145" cy="74485"/>
             </a:xfrm>
             <a:prstGeom prst="rect">
               <a:avLst/>
@@ -7283,7 +7673,7 @@
             <a:p>
               <a:pPr algn="l" marL="0" marR="0" indent="0">
                 <a:lnSpc>
-                  <a:spcPts val="840"/>
+                  <a:spcPts val="816"/>
                 </a:lnSpc>
                 <a:spcBef>
                   <a:spcPts val="0"/>
@@ -7293,7 +7683,7 @@
                 </a:spcAft>
               </a:pPr>
               <a:r>
-                <a:rPr sz="840">
+                <a:rPr sz="816">
                   <a:solidFill>
                     <a:srgbClr val="1A1A1A">
                       <a:alpha val="100000"/>
@@ -7309,14 +7699,14 @@
         </p:sp>
         <p:sp>
           <p:nvSpPr>
-            <p:cNvPr id="114" name="tx114"/>
-            <p:cNvSpPr/>
-            <p:nvPr/>
-          </p:nvSpPr>
-          <p:spPr>
-            <a:xfrm>
-              <a:off x="9460933" y="5026797"/>
-              <a:ext cx="94855" cy="76676"/>
+            <p:cNvPr id="123" name="tx123"/>
+            <p:cNvSpPr/>
+            <p:nvPr/>
+          </p:nvSpPr>
+          <p:spPr>
+            <a:xfrm>
+              <a:off x="9676340" y="4797221"/>
+              <a:ext cx="92145" cy="74485"/>
             </a:xfrm>
             <a:prstGeom prst="rect">
               <a:avLst/>
@@ -7329,7 +7719,7 @@
             <a:p>
               <a:pPr algn="l" marL="0" marR="0" indent="0">
                 <a:lnSpc>
-                  <a:spcPts val="840"/>
+                  <a:spcPts val="816"/>
                 </a:lnSpc>
                 <a:spcBef>
                   <a:spcPts val="0"/>
@@ -7339,7 +7729,7 @@
                 </a:spcAft>
               </a:pPr>
               <a:r>
-                <a:rPr sz="840">
+                <a:rPr sz="816">
                   <a:solidFill>
                     <a:srgbClr val="1A1A1A">
                       <a:alpha val="100000"/>
@@ -7355,14 +7745,14 @@
         </p:sp>
         <p:sp>
           <p:nvSpPr>
-            <p:cNvPr id="115" name="tx115"/>
-            <p:cNvSpPr/>
-            <p:nvPr/>
-          </p:nvSpPr>
-          <p:spPr>
-            <a:xfrm>
-              <a:off x="10555918" y="5025495"/>
-              <a:ext cx="59330" cy="77978"/>
+            <p:cNvPr id="124" name="tx124"/>
+            <p:cNvSpPr/>
+            <p:nvPr/>
+          </p:nvSpPr>
+          <p:spPr>
+            <a:xfrm>
+              <a:off x="10939232" y="4795956"/>
+              <a:ext cx="57635" cy="75750"/>
             </a:xfrm>
             <a:prstGeom prst="rect">
               <a:avLst/>
@@ -7375,7 +7765,7 @@
             <a:p>
               <a:pPr algn="l" marL="0" marR="0" indent="0">
                 <a:lnSpc>
-                  <a:spcPts val="840"/>
+                  <a:spcPts val="816"/>
                 </a:lnSpc>
                 <a:spcBef>
                   <a:spcPts val="0"/>
@@ -7385,7 +7775,7 @@
                 </a:spcAft>
               </a:pPr>
               <a:r>
-                <a:rPr sz="840">
+                <a:rPr sz="816">
                   <a:solidFill>
                     <a:srgbClr val="1A1A1A">
                       <a:alpha val="100000"/>
@@ -7401,14 +7791,14 @@
         </p:sp>
         <p:sp>
           <p:nvSpPr>
-            <p:cNvPr id="116" name="tx116"/>
-            <p:cNvSpPr/>
-            <p:nvPr/>
-          </p:nvSpPr>
-          <p:spPr>
-            <a:xfrm>
-              <a:off x="11633141" y="5026797"/>
-              <a:ext cx="59330" cy="76676"/>
+            <p:cNvPr id="125" name="tx125"/>
+            <p:cNvSpPr/>
+            <p:nvPr/>
+          </p:nvSpPr>
+          <p:spPr>
+            <a:xfrm>
+              <a:off x="12184870" y="4797221"/>
+              <a:ext cx="57635" cy="74485"/>
             </a:xfrm>
             <a:prstGeom prst="rect">
               <a:avLst/>
@@ -7421,7 +7811,7 @@
             <a:p>
               <a:pPr algn="l" marL="0" marR="0" indent="0">
                 <a:lnSpc>
-                  <a:spcPts val="840"/>
+                  <a:spcPts val="816"/>
                 </a:lnSpc>
                 <a:spcBef>
                   <a:spcPts val="0"/>
@@ -7431,7 +7821,7 @@
                 </a:spcAft>
               </a:pPr>
               <a:r>
-                <a:rPr sz="840">
+                <a:rPr sz="816">
                   <a:solidFill>
                     <a:srgbClr val="1A1A1A">
                       <a:alpha val="100000"/>
@@ -7447,14 +7837,14 @@
         </p:sp>
         <p:sp>
           <p:nvSpPr>
-            <p:cNvPr id="117" name="tx117"/>
-            <p:cNvSpPr/>
-            <p:nvPr/>
-          </p:nvSpPr>
-          <p:spPr>
-            <a:xfrm>
-              <a:off x="12710363" y="5026797"/>
-              <a:ext cx="59330" cy="76676"/>
+            <p:cNvPr id="126" name="tx126"/>
+            <p:cNvSpPr/>
+            <p:nvPr/>
+          </p:nvSpPr>
+          <p:spPr>
+            <a:xfrm>
+              <a:off x="13430508" y="4797221"/>
+              <a:ext cx="57635" cy="74485"/>
             </a:xfrm>
             <a:prstGeom prst="rect">
               <a:avLst/>
@@ -7467,7 +7857,7 @@
             <a:p>
               <a:pPr algn="l" marL="0" marR="0" indent="0">
                 <a:lnSpc>
-                  <a:spcPts val="840"/>
+                  <a:spcPts val="816"/>
                 </a:lnSpc>
                 <a:spcBef>
                   <a:spcPts val="0"/>
@@ -7477,7 +7867,7 @@
                 </a:spcAft>
               </a:pPr>
               <a:r>
-                <a:rPr sz="840">
+                <a:rPr sz="816">
                   <a:solidFill>
                     <a:srgbClr val="1A1A1A">
                       <a:alpha val="100000"/>
@@ -7493,14 +7883,14 @@
         </p:sp>
         <p:sp>
           <p:nvSpPr>
-            <p:cNvPr id="118" name="tx118"/>
-            <p:cNvSpPr/>
-            <p:nvPr/>
-          </p:nvSpPr>
-          <p:spPr>
-            <a:xfrm>
-              <a:off x="9918671" y="5132832"/>
-              <a:ext cx="1333825" cy="121760"/>
+            <p:cNvPr id="127" name="tx127"/>
+            <p:cNvSpPr/>
+            <p:nvPr/>
+          </p:nvSpPr>
+          <p:spPr>
+            <a:xfrm>
+              <a:off x="10320192" y="4900226"/>
+              <a:ext cx="1295716" cy="118281"/>
             </a:xfrm>
             <a:prstGeom prst="rect">
               <a:avLst/>
@@ -7513,7 +7903,7 @@
             <a:p>
               <a:pPr algn="l" marL="0" marR="0" indent="0">
                 <a:lnSpc>
-                  <a:spcPts val="1050"/>
+                  <a:spcPts val="1019"/>
                 </a:lnSpc>
                 <a:spcBef>
                   <a:spcPts val="0"/>
@@ -7523,7 +7913,7 @@
                 </a:spcAft>
               </a:pPr>
               <a:r>
-                <a:rPr sz="1050" b="1">
+                <a:rPr sz="1019" b="1">
                   <a:solidFill>
                     <a:srgbClr val="111111">
                       <a:alpha val="100000"/>
@@ -7539,14 +7929,14 @@
         </p:sp>
         <p:sp>
           <p:nvSpPr>
-            <p:cNvPr id="119" name="tx119"/>
+            <p:cNvPr id="128" name="tx128"/>
             <p:cNvSpPr/>
             <p:nvPr/>
           </p:nvSpPr>
           <p:spPr>
             <a:xfrm rot="-5400000">
-              <a:off x="6766709" y="3289058"/>
-              <a:ext cx="2008128" cy="123387"/>
+              <a:off x="6789123" y="3209611"/>
+              <a:ext cx="1950753" cy="119862"/>
             </a:xfrm>
             <a:prstGeom prst="rect">
               <a:avLst/>
@@ -7559,7 +7949,7 @@
             <a:p>
               <a:pPr algn="l" marL="0" marR="0" indent="0">
                 <a:lnSpc>
-                  <a:spcPts val="1050"/>
+                  <a:spcPts val="1019"/>
                 </a:lnSpc>
                 <a:spcBef>
                   <a:spcPts val="0"/>
@@ -7569,7 +7959,7 @@
                 </a:spcAft>
               </a:pPr>
               <a:r>
-                <a:rPr sz="1050" b="1">
+                <a:rPr sz="1019" b="1">
                   <a:solidFill>
                     <a:srgbClr val="111111">
                       <a:alpha val="100000"/>
@@ -7585,14 +7975,14 @@
         </p:sp>
         <p:sp>
           <p:nvSpPr>
-            <p:cNvPr id="120" name="tx120"/>
-            <p:cNvSpPr/>
-            <p:nvPr/>
-          </p:nvSpPr>
-          <p:spPr>
-            <a:xfrm>
-              <a:off x="7647800" y="1612552"/>
-              <a:ext cx="89213" cy="106257"/>
+            <p:cNvPr id="129" name="tx129"/>
+            <p:cNvSpPr/>
+            <p:nvPr/>
+          </p:nvSpPr>
+          <p:spPr>
+            <a:xfrm>
+              <a:off x="8034178" y="1559135"/>
+              <a:ext cx="619608" cy="143364"/>
             </a:xfrm>
             <a:prstGeom prst="rect">
               <a:avLst/>
@@ -7605,7 +7995,7 @@
             <a:p>
               <a:pPr algn="l" marL="0" marR="0" indent="0">
                 <a:lnSpc>
-                  <a:spcPts val="1150"/>
+                  <a:spcPts val="1220"/>
                 </a:lnSpc>
                 <a:spcBef>
                   <a:spcPts val="0"/>
@@ -7615,7 +8005,53 @@
                 </a:spcAft>
               </a:pPr>
               <a:r>
-                <a:rPr sz="1150" b="1">
+                <a:rPr sz="1220" b="1">
+                  <a:solidFill>
+                    <a:srgbClr val="111111">
+                      <a:alpha val="100000"/>
+                    </a:srgbClr>
+                  </a:solidFill>
+                  <a:latin typeface="Arial"/>
+                  <a:cs typeface="Arial"/>
+                </a:rPr>
+                <a:t>Q-Q plot</a:t>
+              </a:r>
+            </a:p>
+          </p:txBody>
+        </p:sp>
+        <p:sp>
+          <p:nvSpPr>
+            <p:cNvPr id="130" name="tx130"/>
+            <p:cNvSpPr/>
+            <p:nvPr/>
+          </p:nvSpPr>
+          <p:spPr>
+            <a:xfrm>
+              <a:off x="7644818" y="1473138"/>
+              <a:ext cx="86885" cy="103485"/>
+            </a:xfrm>
+            <a:prstGeom prst="rect">
+              <a:avLst/>
+            </a:prstGeom>
+            <a:noFill/>
+          </p:spPr>
+          <p:txBody>
+            <a:bodyPr lIns="0" rIns="0" tIns="0" bIns="0" anchorCtr="1" anchor="ctr" wrap="none"/>
+            <a:lstStyle/>
+            <a:p>
+              <a:pPr algn="l" marL="0" marR="0" indent="0">
+                <a:lnSpc>
+                  <a:spcPts val="1120"/>
+                </a:lnSpc>
+                <a:spcBef>
+                  <a:spcPts val="0"/>
+                </a:spcBef>
+                <a:spcAft>
+                  <a:spcPts val="0"/>
+                </a:spcAft>
+              </a:pPr>
+              <a:r>
+                <a:rPr sz="1120" b="1">
                   <a:solidFill>
                     <a:srgbClr val="000000">
                       <a:alpha val="100000"/>
@@ -7631,14 +8067,14 @@
         </p:sp>
         <p:sp>
           <p:nvSpPr>
-            <p:cNvPr id="121" name="rc121"/>
-            <p:cNvSpPr/>
-            <p:nvPr/>
-          </p:nvSpPr>
-          <p:spPr>
-            <a:xfrm>
-              <a:off x="1898389" y="5349081"/>
-              <a:ext cx="5281160" cy="3816610"/>
+            <p:cNvPr id="131" name="rc131"/>
+            <p:cNvSpPr/>
+            <p:nvPr/>
+          </p:nvSpPr>
+          <p:spPr>
+            <a:xfrm>
+              <a:off x="1121149" y="5110297"/>
+              <a:ext cx="5757648" cy="4192554"/>
             </a:xfrm>
             <a:prstGeom prst="rect">
               <a:avLst/>
@@ -7648,7 +8084,7 @@
                 <a:alpha val="100000"/>
               </a:srgbClr>
             </a:solidFill>
-            <a:ln w="12934" cap="rnd">
+            <a:ln w="12565" cap="rnd">
               <a:solidFill>
                 <a:srgbClr val="FFFFFF">
                   <a:alpha val="100000"/>
@@ -7666,14 +8102,14 @@
         </p:sp>
         <p:sp>
           <p:nvSpPr>
-            <p:cNvPr id="122" name="rc122"/>
-            <p:cNvSpPr/>
-            <p:nvPr/>
-          </p:nvSpPr>
-          <p:spPr>
-            <a:xfrm>
-              <a:off x="7179549" y="5349081"/>
-              <a:ext cx="6009661" cy="3816610"/>
+            <p:cNvPr id="132" name="rc132"/>
+            <p:cNvSpPr/>
+            <p:nvPr/>
+          </p:nvSpPr>
+          <p:spPr>
+            <a:xfrm>
+              <a:off x="6878797" y="5110297"/>
+              <a:ext cx="7087653" cy="4192554"/>
             </a:xfrm>
             <a:prstGeom prst="rect">
               <a:avLst/>
@@ -7683,7 +8119,7 @@
                 <a:alpha val="100000"/>
               </a:srgbClr>
             </a:solidFill>
-            <a:ln w="12934" cap="rnd">
+            <a:ln w="12565" cap="rnd">
               <a:solidFill>
                 <a:srgbClr val="FFFFFF">
                   <a:alpha val="100000"/>
@@ -7701,14 +8137,14 @@
         </p:sp>
         <p:sp>
           <p:nvSpPr>
-            <p:cNvPr id="123" name="rc123"/>
-            <p:cNvSpPr/>
-            <p:nvPr/>
-          </p:nvSpPr>
-          <p:spPr>
-            <a:xfrm>
-              <a:off x="2440546" y="5550789"/>
-              <a:ext cx="4672577" cy="3233148"/>
+            <p:cNvPr id="133" name="rc133"/>
+            <p:cNvSpPr/>
+            <p:nvPr/>
+          </p:nvSpPr>
+          <p:spPr>
+            <a:xfrm>
+              <a:off x="1648017" y="5992190"/>
+              <a:ext cx="5166251" cy="2939814"/>
             </a:xfrm>
             <a:prstGeom prst="rect">
               <a:avLst/>
@@ -7727,14 +8163,186 @@
         </p:sp>
         <p:sp>
           <p:nvSpPr>
-            <p:cNvPr id="124" name="rc124"/>
-            <p:cNvSpPr/>
-            <p:nvPr/>
-          </p:nvSpPr>
-          <p:spPr>
-            <a:xfrm>
-              <a:off x="2652936" y="8636880"/>
-              <a:ext cx="123722" cy="95"/>
+            <p:cNvPr id="134" name="pl134"/>
+            <p:cNvSpPr/>
+            <p:nvPr/>
+          </p:nvSpPr>
+          <p:spPr>
+            <a:xfrm>
+              <a:off x="1799251" y="5992190"/>
+              <a:ext cx="0" cy="2939814"/>
+            </a:xfrm>
+            <a:custGeom>
+              <a:avLst/>
+              <a:pathLst>
+                <a:path w="0" h="2939814">
+                  <a:moveTo>
+                    <a:pt x="0" y="2939814"/>
+                  </a:moveTo>
+                  <a:lnTo>
+                    <a:pt x="0" y="0"/>
+                  </a:lnTo>
+                  <a:lnTo>
+                    <a:pt x="0" y="0"/>
+                  </a:lnTo>
+                </a:path>
+              </a:pathLst>
+            </a:custGeom>
+            <a:ln w="8130" cap="flat">
+              <a:solidFill>
+                <a:srgbClr val="B0B0B0">
+                  <a:alpha val="34901"/>
+                </a:srgbClr>
+              </a:solidFill>
+              <a:prstDash val="solid"/>
+              <a:round/>
+            </a:ln>
+          </p:spPr>
+          <p:txBody>
+            <a:bodyPr/>
+            <a:lstStyle/>
+            <a:p/>
+          </p:txBody>
+        </p:sp>
+        <p:sp>
+          <p:nvSpPr>
+            <p:cNvPr id="135" name="pl135"/>
+            <p:cNvSpPr/>
+            <p:nvPr/>
+          </p:nvSpPr>
+          <p:spPr>
+            <a:xfrm>
+              <a:off x="3319184" y="5992190"/>
+              <a:ext cx="0" cy="2939814"/>
+            </a:xfrm>
+            <a:custGeom>
+              <a:avLst/>
+              <a:pathLst>
+                <a:path w="0" h="2939814">
+                  <a:moveTo>
+                    <a:pt x="0" y="2939814"/>
+                  </a:moveTo>
+                  <a:lnTo>
+                    <a:pt x="0" y="0"/>
+                  </a:lnTo>
+                  <a:lnTo>
+                    <a:pt x="0" y="0"/>
+                  </a:lnTo>
+                </a:path>
+              </a:pathLst>
+            </a:custGeom>
+            <a:ln w="8130" cap="flat">
+              <a:solidFill>
+                <a:srgbClr val="B0B0B0">
+                  <a:alpha val="34901"/>
+                </a:srgbClr>
+              </a:solidFill>
+              <a:prstDash val="solid"/>
+              <a:round/>
+            </a:ln>
+          </p:spPr>
+          <p:txBody>
+            <a:bodyPr/>
+            <a:lstStyle/>
+            <a:p/>
+          </p:txBody>
+        </p:sp>
+        <p:sp>
+          <p:nvSpPr>
+            <p:cNvPr id="136" name="pl136"/>
+            <p:cNvSpPr/>
+            <p:nvPr/>
+          </p:nvSpPr>
+          <p:spPr>
+            <a:xfrm>
+              <a:off x="4839116" y="5992190"/>
+              <a:ext cx="0" cy="2939814"/>
+            </a:xfrm>
+            <a:custGeom>
+              <a:avLst/>
+              <a:pathLst>
+                <a:path w="0" h="2939814">
+                  <a:moveTo>
+                    <a:pt x="0" y="2939814"/>
+                  </a:moveTo>
+                  <a:lnTo>
+                    <a:pt x="0" y="0"/>
+                  </a:lnTo>
+                  <a:lnTo>
+                    <a:pt x="0" y="0"/>
+                  </a:lnTo>
+                </a:path>
+              </a:pathLst>
+            </a:custGeom>
+            <a:ln w="8130" cap="flat">
+              <a:solidFill>
+                <a:srgbClr val="B0B0B0">
+                  <a:alpha val="34901"/>
+                </a:srgbClr>
+              </a:solidFill>
+              <a:prstDash val="solid"/>
+              <a:round/>
+            </a:ln>
+          </p:spPr>
+          <p:txBody>
+            <a:bodyPr/>
+            <a:lstStyle/>
+            <a:p/>
+          </p:txBody>
+        </p:sp>
+        <p:sp>
+          <p:nvSpPr>
+            <p:cNvPr id="137" name="pl137"/>
+            <p:cNvSpPr/>
+            <p:nvPr/>
+          </p:nvSpPr>
+          <p:spPr>
+            <a:xfrm>
+              <a:off x="6359049" y="5992190"/>
+              <a:ext cx="0" cy="2939814"/>
+            </a:xfrm>
+            <a:custGeom>
+              <a:avLst/>
+              <a:pathLst>
+                <a:path w="0" h="2939814">
+                  <a:moveTo>
+                    <a:pt x="0" y="2939814"/>
+                  </a:moveTo>
+                  <a:lnTo>
+                    <a:pt x="0" y="0"/>
+                  </a:lnTo>
+                  <a:lnTo>
+                    <a:pt x="0" y="0"/>
+                  </a:lnTo>
+                </a:path>
+              </a:pathLst>
+            </a:custGeom>
+            <a:ln w="8130" cap="flat">
+              <a:solidFill>
+                <a:srgbClr val="B0B0B0">
+                  <a:alpha val="34901"/>
+                </a:srgbClr>
+              </a:solidFill>
+              <a:prstDash val="solid"/>
+              <a:round/>
+            </a:ln>
+          </p:spPr>
+          <p:txBody>
+            <a:bodyPr/>
+            <a:lstStyle/>
+            <a:p/>
+          </p:txBody>
+        </p:sp>
+        <p:sp>
+          <p:nvSpPr>
+            <p:cNvPr id="138" name="rc138"/>
+            <p:cNvSpPr/>
+            <p:nvPr/>
+          </p:nvSpPr>
+          <p:spPr>
+            <a:xfrm>
+              <a:off x="1882847" y="8798289"/>
+              <a:ext cx="136793" cy="87"/>
             </a:xfrm>
             <a:prstGeom prst="rect">
               <a:avLst/>
@@ -7753,14 +8361,14 @@
         </p:sp>
         <p:sp>
           <p:nvSpPr>
-            <p:cNvPr id="125" name="rc125"/>
-            <p:cNvSpPr/>
-            <p:nvPr/>
-          </p:nvSpPr>
-          <p:spPr>
-            <a:xfrm>
-              <a:off x="2790405" y="8636565"/>
-              <a:ext cx="123722" cy="410"/>
+            <p:cNvPr id="139" name="rc139"/>
+            <p:cNvSpPr/>
+            <p:nvPr/>
+          </p:nvSpPr>
+          <p:spPr>
+            <a:xfrm>
+              <a:off x="2034840" y="8798003"/>
+              <a:ext cx="136793" cy="373"/>
             </a:xfrm>
             <a:prstGeom prst="rect">
               <a:avLst/>
@@ -7779,14 +8387,14 @@
         </p:sp>
         <p:sp>
           <p:nvSpPr>
-            <p:cNvPr id="126" name="rc126"/>
-            <p:cNvSpPr/>
-            <p:nvPr/>
-          </p:nvSpPr>
-          <p:spPr>
-            <a:xfrm>
-              <a:off x="2927874" y="8636822"/>
-              <a:ext cx="123722" cy="153"/>
+            <p:cNvPr id="140" name="rc140"/>
+            <p:cNvSpPr/>
+            <p:nvPr/>
+          </p:nvSpPr>
+          <p:spPr>
+            <a:xfrm>
+              <a:off x="2186834" y="8798237"/>
+              <a:ext cx="136793" cy="139"/>
             </a:xfrm>
             <a:prstGeom prst="rect">
               <a:avLst/>
@@ -7805,14 +8413,14 @@
         </p:sp>
         <p:sp>
           <p:nvSpPr>
-            <p:cNvPr id="127" name="rc127"/>
-            <p:cNvSpPr/>
-            <p:nvPr/>
-          </p:nvSpPr>
-          <p:spPr>
-            <a:xfrm>
-              <a:off x="3065343" y="8634847"/>
-              <a:ext cx="123722" cy="2129"/>
+            <p:cNvPr id="141" name="rc141"/>
+            <p:cNvSpPr/>
+            <p:nvPr/>
+          </p:nvSpPr>
+          <p:spPr>
+            <a:xfrm>
+              <a:off x="2338827" y="8796441"/>
+              <a:ext cx="136793" cy="1936"/>
             </a:xfrm>
             <a:prstGeom prst="rect">
               <a:avLst/>
@@ -7831,14 +8439,14 @@
         </p:sp>
         <p:sp>
           <p:nvSpPr>
-            <p:cNvPr id="128" name="rc128"/>
-            <p:cNvSpPr/>
-            <p:nvPr/>
-          </p:nvSpPr>
-          <p:spPr>
-            <a:xfrm>
-              <a:off x="3202812" y="8636951"/>
-              <a:ext cx="123722" cy="25"/>
+            <p:cNvPr id="142" name="rc142"/>
+            <p:cNvSpPr/>
+            <p:nvPr/>
+          </p:nvSpPr>
+          <p:spPr>
+            <a:xfrm>
+              <a:off x="2490820" y="8798354"/>
+              <a:ext cx="136793" cy="22"/>
             </a:xfrm>
             <a:prstGeom prst="rect">
               <a:avLst/>
@@ -7857,14 +8465,14 @@
         </p:sp>
         <p:sp>
           <p:nvSpPr>
-            <p:cNvPr id="129" name="rc129"/>
-            <p:cNvSpPr/>
-            <p:nvPr/>
-          </p:nvSpPr>
-          <p:spPr>
-            <a:xfrm>
-              <a:off x="3340282" y="8636180"/>
-              <a:ext cx="123722" cy="795"/>
+            <p:cNvPr id="143" name="rc143"/>
+            <p:cNvSpPr/>
+            <p:nvPr/>
+          </p:nvSpPr>
+          <p:spPr>
+            <a:xfrm>
+              <a:off x="2642813" y="8797653"/>
+              <a:ext cx="136793" cy="723"/>
             </a:xfrm>
             <a:prstGeom prst="rect">
               <a:avLst/>
@@ -7883,14 +8491,14 @@
         </p:sp>
         <p:sp>
           <p:nvSpPr>
-            <p:cNvPr id="130" name="rc130"/>
-            <p:cNvSpPr/>
-            <p:nvPr/>
-          </p:nvSpPr>
-          <p:spPr>
-            <a:xfrm>
-              <a:off x="3477751" y="8636975"/>
-              <a:ext cx="123722" cy="0"/>
+            <p:cNvPr id="144" name="rc144"/>
+            <p:cNvSpPr/>
+            <p:nvPr/>
+          </p:nvSpPr>
+          <p:spPr>
+            <a:xfrm>
+              <a:off x="2794807" y="8798376"/>
+              <a:ext cx="136793" cy="0"/>
             </a:xfrm>
             <a:prstGeom prst="rect">
               <a:avLst/>
@@ -7909,14 +8517,14 @@
         </p:sp>
         <p:sp>
           <p:nvSpPr>
-            <p:cNvPr id="131" name="rc131"/>
-            <p:cNvSpPr/>
-            <p:nvPr/>
-          </p:nvSpPr>
-          <p:spPr>
-            <a:xfrm>
-              <a:off x="3615220" y="8636960"/>
-              <a:ext cx="123722" cy="15"/>
+            <p:cNvPr id="145" name="rc145"/>
+            <p:cNvSpPr/>
+            <p:nvPr/>
+          </p:nvSpPr>
+          <p:spPr>
+            <a:xfrm>
+              <a:off x="2946800" y="8798362"/>
+              <a:ext cx="136793" cy="14"/>
             </a:xfrm>
             <a:prstGeom prst="rect">
               <a:avLst/>
@@ -7935,14 +8543,14 @@
         </p:sp>
         <p:sp>
           <p:nvSpPr>
-            <p:cNvPr id="132" name="rc132"/>
-            <p:cNvSpPr/>
-            <p:nvPr/>
-          </p:nvSpPr>
-          <p:spPr>
-            <a:xfrm>
-              <a:off x="3752689" y="8635884"/>
-              <a:ext cx="123722" cy="1091"/>
+            <p:cNvPr id="146" name="rc146"/>
+            <p:cNvSpPr/>
+            <p:nvPr/>
+          </p:nvSpPr>
+          <p:spPr>
+            <a:xfrm>
+              <a:off x="3098793" y="8797384"/>
+              <a:ext cx="136793" cy="992"/>
             </a:xfrm>
             <a:prstGeom prst="rect">
               <a:avLst/>
@@ -7961,14 +8569,14 @@
         </p:sp>
         <p:sp>
           <p:nvSpPr>
-            <p:cNvPr id="133" name="rc133"/>
-            <p:cNvSpPr/>
-            <p:nvPr/>
-          </p:nvSpPr>
-          <p:spPr>
-            <a:xfrm>
-              <a:off x="3890158" y="8636417"/>
-              <a:ext cx="123722" cy="559"/>
+            <p:cNvPr id="147" name="rc147"/>
+            <p:cNvSpPr/>
+            <p:nvPr/>
+          </p:nvSpPr>
+          <p:spPr>
+            <a:xfrm>
+              <a:off x="3250787" y="8797868"/>
+              <a:ext cx="136793" cy="508"/>
             </a:xfrm>
             <a:prstGeom prst="rect">
               <a:avLst/>
@@ -7987,14 +8595,14 @@
         </p:sp>
         <p:sp>
           <p:nvSpPr>
-            <p:cNvPr id="134" name="rc134"/>
-            <p:cNvSpPr/>
-            <p:nvPr/>
-          </p:nvSpPr>
-          <p:spPr>
-            <a:xfrm>
-              <a:off x="4027627" y="8636326"/>
-              <a:ext cx="123722" cy="649"/>
+            <p:cNvPr id="148" name="rc148"/>
+            <p:cNvSpPr/>
+            <p:nvPr/>
+          </p:nvSpPr>
+          <p:spPr>
+            <a:xfrm>
+              <a:off x="3402780" y="8797786"/>
+              <a:ext cx="136793" cy="590"/>
             </a:xfrm>
             <a:prstGeom prst="rect">
               <a:avLst/>
@@ -8013,14 +8621,14 @@
         </p:sp>
         <p:sp>
           <p:nvSpPr>
-            <p:cNvPr id="135" name="rc135"/>
-            <p:cNvSpPr/>
-            <p:nvPr/>
-          </p:nvSpPr>
-          <p:spPr>
-            <a:xfrm>
-              <a:off x="4165097" y="8636957"/>
-              <a:ext cx="123722" cy="19"/>
+            <p:cNvPr id="149" name="rc149"/>
+            <p:cNvSpPr/>
+            <p:nvPr/>
+          </p:nvSpPr>
+          <p:spPr>
+            <a:xfrm>
+              <a:off x="3554773" y="8798359"/>
+              <a:ext cx="136793" cy="17"/>
             </a:xfrm>
             <a:prstGeom prst="rect">
               <a:avLst/>
@@ -8039,14 +8647,14 @@
         </p:sp>
         <p:sp>
           <p:nvSpPr>
-            <p:cNvPr id="136" name="rc136"/>
-            <p:cNvSpPr/>
-            <p:nvPr/>
-          </p:nvSpPr>
-          <p:spPr>
-            <a:xfrm>
-              <a:off x="4302566" y="8636970"/>
-              <a:ext cx="123722" cy="6"/>
+            <p:cNvPr id="150" name="rc150"/>
+            <p:cNvSpPr/>
+            <p:nvPr/>
+          </p:nvSpPr>
+          <p:spPr>
+            <a:xfrm>
+              <a:off x="3706766" y="8798371"/>
+              <a:ext cx="136793" cy="5"/>
             </a:xfrm>
             <a:prstGeom prst="rect">
               <a:avLst/>
@@ -8065,14 +8673,14 @@
         </p:sp>
         <p:sp>
           <p:nvSpPr>
-            <p:cNvPr id="137" name="rc137"/>
-            <p:cNvSpPr/>
-            <p:nvPr/>
-          </p:nvSpPr>
-          <p:spPr>
-            <a:xfrm>
-              <a:off x="4440035" y="8636868"/>
-              <a:ext cx="123722" cy="107"/>
+            <p:cNvPr id="151" name="rc151"/>
+            <p:cNvSpPr/>
+            <p:nvPr/>
+          </p:nvSpPr>
+          <p:spPr>
+            <a:xfrm>
+              <a:off x="3858760" y="8798279"/>
+              <a:ext cx="136793" cy="97"/>
             </a:xfrm>
             <a:prstGeom prst="rect">
               <a:avLst/>
@@ -8091,14 +8699,14 @@
         </p:sp>
         <p:sp>
           <p:nvSpPr>
-            <p:cNvPr id="138" name="rc138"/>
-            <p:cNvSpPr/>
-            <p:nvPr/>
-          </p:nvSpPr>
-          <p:spPr>
-            <a:xfrm>
-              <a:off x="4577504" y="8636880"/>
-              <a:ext cx="123722" cy="95"/>
+            <p:cNvPr id="152" name="rc152"/>
+            <p:cNvSpPr/>
+            <p:nvPr/>
+          </p:nvSpPr>
+          <p:spPr>
+            <a:xfrm>
+              <a:off x="4010753" y="8798290"/>
+              <a:ext cx="136793" cy="87"/>
             </a:xfrm>
             <a:prstGeom prst="rect">
               <a:avLst/>
@@ -8117,14 +8725,14 @@
         </p:sp>
         <p:sp>
           <p:nvSpPr>
-            <p:cNvPr id="139" name="rc139"/>
-            <p:cNvSpPr/>
-            <p:nvPr/>
-          </p:nvSpPr>
-          <p:spPr>
-            <a:xfrm>
-              <a:off x="4714973" y="5697750"/>
-              <a:ext cx="123722" cy="2939226"/>
+            <p:cNvPr id="153" name="rc153"/>
+            <p:cNvSpPr/>
+            <p:nvPr/>
+          </p:nvSpPr>
+          <p:spPr>
+            <a:xfrm>
+              <a:off x="4162746" y="6125818"/>
+              <a:ext cx="136793" cy="2672558"/>
             </a:xfrm>
             <a:prstGeom prst="rect">
               <a:avLst/>
@@ -8143,14 +8751,14 @@
         </p:sp>
         <p:sp>
           <p:nvSpPr>
-            <p:cNvPr id="140" name="rc140"/>
-            <p:cNvSpPr/>
-            <p:nvPr/>
-          </p:nvSpPr>
-          <p:spPr>
-            <a:xfrm>
-              <a:off x="4852442" y="8636976"/>
-              <a:ext cx="123722" cy="0"/>
+            <p:cNvPr id="154" name="rc154"/>
+            <p:cNvSpPr/>
+            <p:nvPr/>
+          </p:nvSpPr>
+          <p:spPr>
+            <a:xfrm>
+              <a:off x="4314740" y="8798376"/>
+              <a:ext cx="136793" cy="0"/>
             </a:xfrm>
             <a:prstGeom prst="rect">
               <a:avLst/>
@@ -8169,14 +8777,14 @@
         </p:sp>
         <p:sp>
           <p:nvSpPr>
-            <p:cNvPr id="141" name="rc141"/>
-            <p:cNvSpPr/>
-            <p:nvPr/>
-          </p:nvSpPr>
-          <p:spPr>
-            <a:xfrm>
-              <a:off x="4989912" y="8636920"/>
-              <a:ext cx="123722" cy="55"/>
+            <p:cNvPr id="155" name="rc155"/>
+            <p:cNvSpPr/>
+            <p:nvPr/>
+          </p:nvSpPr>
+          <p:spPr>
+            <a:xfrm>
+              <a:off x="4466733" y="8798326"/>
+              <a:ext cx="136793" cy="50"/>
             </a:xfrm>
             <a:prstGeom prst="rect">
               <a:avLst/>
@@ -8195,14 +8803,14 @@
         </p:sp>
         <p:sp>
           <p:nvSpPr>
-            <p:cNvPr id="142" name="rc142"/>
-            <p:cNvSpPr/>
-            <p:nvPr/>
-          </p:nvSpPr>
-          <p:spPr>
-            <a:xfrm>
-              <a:off x="5127381" y="8636963"/>
-              <a:ext cx="123722" cy="12"/>
+            <p:cNvPr id="156" name="rc156"/>
+            <p:cNvSpPr/>
+            <p:nvPr/>
+          </p:nvSpPr>
+          <p:spPr>
+            <a:xfrm>
+              <a:off x="4618726" y="8798365"/>
+              <a:ext cx="136793" cy="11"/>
             </a:xfrm>
             <a:prstGeom prst="rect">
               <a:avLst/>
@@ -8221,14 +8829,14 @@
         </p:sp>
         <p:sp>
           <p:nvSpPr>
-            <p:cNvPr id="143" name="rc143"/>
-            <p:cNvSpPr/>
-            <p:nvPr/>
-          </p:nvSpPr>
-          <p:spPr>
-            <a:xfrm>
-              <a:off x="5264850" y="8636813"/>
-              <a:ext cx="123722" cy="162"/>
+            <p:cNvPr id="157" name="rc157"/>
+            <p:cNvSpPr/>
+            <p:nvPr/>
+          </p:nvSpPr>
+          <p:spPr>
+            <a:xfrm>
+              <a:off x="4770719" y="8798228"/>
+              <a:ext cx="136793" cy="148"/>
             </a:xfrm>
             <a:prstGeom prst="rect">
               <a:avLst/>
@@ -8247,14 +8855,14 @@
         </p:sp>
         <p:sp>
           <p:nvSpPr>
-            <p:cNvPr id="144" name="rc144"/>
-            <p:cNvSpPr/>
-            <p:nvPr/>
-          </p:nvSpPr>
-          <p:spPr>
-            <a:xfrm>
-              <a:off x="5402319" y="8636087"/>
-              <a:ext cx="123722" cy="889"/>
+            <p:cNvPr id="158" name="rc158"/>
+            <p:cNvSpPr/>
+            <p:nvPr/>
+          </p:nvSpPr>
+          <p:spPr>
+            <a:xfrm>
+              <a:off x="4922713" y="8797568"/>
+              <a:ext cx="136793" cy="808"/>
             </a:xfrm>
             <a:prstGeom prst="rect">
               <a:avLst/>
@@ -8273,14 +8881,14 @@
         </p:sp>
         <p:sp>
           <p:nvSpPr>
-            <p:cNvPr id="145" name="rc145"/>
-            <p:cNvSpPr/>
-            <p:nvPr/>
-          </p:nvSpPr>
-          <p:spPr>
-            <a:xfrm>
-              <a:off x="5539788" y="8636797"/>
-              <a:ext cx="123722" cy="178"/>
+            <p:cNvPr id="159" name="rc159"/>
+            <p:cNvSpPr/>
+            <p:nvPr/>
+          </p:nvSpPr>
+          <p:spPr>
+            <a:xfrm>
+              <a:off x="5074706" y="8798214"/>
+              <a:ext cx="136793" cy="162"/>
             </a:xfrm>
             <a:prstGeom prst="rect">
               <a:avLst/>
@@ -8299,14 +8907,14 @@
         </p:sp>
         <p:sp>
           <p:nvSpPr>
-            <p:cNvPr id="146" name="rc146"/>
-            <p:cNvSpPr/>
-            <p:nvPr/>
-          </p:nvSpPr>
-          <p:spPr>
-            <a:xfrm>
-              <a:off x="5677257" y="8636905"/>
-              <a:ext cx="123722" cy="70"/>
+            <p:cNvPr id="160" name="rc160"/>
+            <p:cNvSpPr/>
+            <p:nvPr/>
+          </p:nvSpPr>
+          <p:spPr>
+            <a:xfrm>
+              <a:off x="5226699" y="8798312"/>
+              <a:ext cx="136793" cy="64"/>
             </a:xfrm>
             <a:prstGeom prst="rect">
               <a:avLst/>
@@ -8325,14 +8933,14 @@
         </p:sp>
         <p:sp>
           <p:nvSpPr>
-            <p:cNvPr id="147" name="rc147"/>
-            <p:cNvSpPr/>
-            <p:nvPr/>
-          </p:nvSpPr>
-          <p:spPr>
-            <a:xfrm>
-              <a:off x="5814727" y="8636976"/>
-              <a:ext cx="123722" cy="0"/>
+            <p:cNvPr id="161" name="rc161"/>
+            <p:cNvSpPr/>
+            <p:nvPr/>
+          </p:nvSpPr>
+          <p:spPr>
+            <a:xfrm>
+              <a:off x="5378693" y="8798377"/>
+              <a:ext cx="136793" cy="0"/>
             </a:xfrm>
             <a:prstGeom prst="rect">
               <a:avLst/>
@@ -8351,14 +8959,14 @@
         </p:sp>
         <p:sp>
           <p:nvSpPr>
-            <p:cNvPr id="148" name="rc148"/>
-            <p:cNvSpPr/>
-            <p:nvPr/>
-          </p:nvSpPr>
-          <p:spPr>
-            <a:xfrm>
-              <a:off x="5952196" y="8636509"/>
-              <a:ext cx="123722" cy="466"/>
+            <p:cNvPr id="162" name="rc162"/>
+            <p:cNvSpPr/>
+            <p:nvPr/>
+          </p:nvSpPr>
+          <p:spPr>
+            <a:xfrm>
+              <a:off x="5530686" y="8797952"/>
+              <a:ext cx="136793" cy="424"/>
             </a:xfrm>
             <a:prstGeom prst="rect">
               <a:avLst/>
@@ -8377,14 +8985,14 @@
         </p:sp>
         <p:sp>
           <p:nvSpPr>
-            <p:cNvPr id="149" name="rc149"/>
-            <p:cNvSpPr/>
-            <p:nvPr/>
-          </p:nvSpPr>
-          <p:spPr>
-            <a:xfrm>
-              <a:off x="6089665" y="8636735"/>
-              <a:ext cx="123722" cy="240"/>
+            <p:cNvPr id="163" name="rc163"/>
+            <p:cNvSpPr/>
+            <p:nvPr/>
+          </p:nvSpPr>
+          <p:spPr>
+            <a:xfrm>
+              <a:off x="5682679" y="8798158"/>
+              <a:ext cx="136793" cy="218"/>
             </a:xfrm>
             <a:prstGeom prst="rect">
               <a:avLst/>
@@ -8403,14 +9011,14 @@
         </p:sp>
         <p:sp>
           <p:nvSpPr>
-            <p:cNvPr id="150" name="rc150"/>
-            <p:cNvSpPr/>
-            <p:nvPr/>
-          </p:nvSpPr>
-          <p:spPr>
-            <a:xfrm>
-              <a:off x="6227134" y="8629631"/>
-              <a:ext cx="123722" cy="7345"/>
+            <p:cNvPr id="164" name="rc164"/>
+            <p:cNvSpPr/>
+            <p:nvPr/>
+          </p:nvSpPr>
+          <p:spPr>
+            <a:xfrm>
+              <a:off x="5834672" y="8791698"/>
+              <a:ext cx="136793" cy="6679"/>
             </a:xfrm>
             <a:prstGeom prst="rect">
               <a:avLst/>
@@ -8429,14 +9037,14 @@
         </p:sp>
         <p:sp>
           <p:nvSpPr>
-            <p:cNvPr id="151" name="rc151"/>
-            <p:cNvSpPr/>
-            <p:nvPr/>
-          </p:nvSpPr>
-          <p:spPr>
-            <a:xfrm>
-              <a:off x="6364603" y="8636120"/>
-              <a:ext cx="123722" cy="855"/>
+            <p:cNvPr id="165" name="rc165"/>
+            <p:cNvSpPr/>
+            <p:nvPr/>
+          </p:nvSpPr>
+          <p:spPr>
+            <a:xfrm>
+              <a:off x="5986666" y="8797598"/>
+              <a:ext cx="136793" cy="778"/>
             </a:xfrm>
             <a:prstGeom prst="rect">
               <a:avLst/>
@@ -8455,14 +9063,14 @@
         </p:sp>
         <p:sp>
           <p:nvSpPr>
-            <p:cNvPr id="152" name="rc152"/>
-            <p:cNvSpPr/>
-            <p:nvPr/>
-          </p:nvSpPr>
-          <p:spPr>
-            <a:xfrm>
-              <a:off x="6502073" y="8634817"/>
-              <a:ext cx="123722" cy="2159"/>
+            <p:cNvPr id="166" name="rc166"/>
+            <p:cNvSpPr/>
+            <p:nvPr/>
+          </p:nvSpPr>
+          <p:spPr>
+            <a:xfrm>
+              <a:off x="6138659" y="8796414"/>
+              <a:ext cx="136793" cy="1963"/>
             </a:xfrm>
             <a:prstGeom prst="rect">
               <a:avLst/>
@@ -8481,14 +9089,14 @@
         </p:sp>
         <p:sp>
           <p:nvSpPr>
-            <p:cNvPr id="153" name="rc153"/>
-            <p:cNvSpPr/>
-            <p:nvPr/>
-          </p:nvSpPr>
-          <p:spPr>
-            <a:xfrm>
-              <a:off x="6639542" y="8636836"/>
-              <a:ext cx="123722" cy="139"/>
+            <p:cNvPr id="167" name="rc167"/>
+            <p:cNvSpPr/>
+            <p:nvPr/>
+          </p:nvSpPr>
+          <p:spPr>
+            <a:xfrm>
+              <a:off x="6290652" y="8798250"/>
+              <a:ext cx="136793" cy="126"/>
             </a:xfrm>
             <a:prstGeom prst="rect">
               <a:avLst/>
@@ -8507,14 +9115,14 @@
         </p:sp>
         <p:sp>
           <p:nvSpPr>
-            <p:cNvPr id="154" name="rc154"/>
-            <p:cNvSpPr/>
-            <p:nvPr/>
-          </p:nvSpPr>
-          <p:spPr>
-            <a:xfrm>
-              <a:off x="6777011" y="8636747"/>
-              <a:ext cx="123722" cy="228"/>
+            <p:cNvPr id="168" name="rc168"/>
+            <p:cNvSpPr/>
+            <p:nvPr/>
+          </p:nvSpPr>
+          <p:spPr>
+            <a:xfrm>
+              <a:off x="6442646" y="8798169"/>
+              <a:ext cx="136793" cy="207"/>
             </a:xfrm>
             <a:prstGeom prst="rect">
               <a:avLst/>
@@ -8533,32 +9141,32 @@
         </p:sp>
         <p:sp>
           <p:nvSpPr>
-            <p:cNvPr id="155" name="pl155"/>
-            <p:cNvSpPr/>
-            <p:nvPr/>
-          </p:nvSpPr>
-          <p:spPr>
-            <a:xfrm>
-              <a:off x="2440546" y="8634021"/>
-              <a:ext cx="4672577" cy="0"/>
+            <p:cNvPr id="169" name="pl169"/>
+            <p:cNvSpPr/>
+            <p:nvPr/>
+          </p:nvSpPr>
+          <p:spPr>
+            <a:xfrm>
+              <a:off x="1648017" y="8795690"/>
+              <a:ext cx="5166251" cy="0"/>
             </a:xfrm>
             <a:custGeom>
               <a:avLst/>
               <a:pathLst>
-                <a:path w="4672577" h="0">
+                <a:path w="5166251" h="0">
                   <a:moveTo>
                     <a:pt x="0" y="0"/>
                   </a:moveTo>
                   <a:lnTo>
-                    <a:pt x="4672577" y="0"/>
+                    <a:pt x="5166251" y="0"/>
                   </a:lnTo>
                   <a:lnTo>
-                    <a:pt x="4672577" y="0"/>
+                    <a:pt x="5166251" y="0"/>
                   </a:lnTo>
                 </a:path>
               </a:pathLst>
             </a:custGeom>
-            <a:ln w="12934" cap="flat">
+            <a:ln w="12565" cap="flat">
               <a:solidFill>
                 <a:srgbClr val="B30000">
                   <a:alpha val="100000"/>
@@ -8576,21 +9184,21 @@
         </p:sp>
         <p:sp>
           <p:nvSpPr>
-            <p:cNvPr id="156" name="pl156"/>
-            <p:cNvSpPr/>
-            <p:nvPr/>
-          </p:nvSpPr>
-          <p:spPr>
-            <a:xfrm>
-              <a:off x="2440546" y="5550789"/>
-              <a:ext cx="0" cy="3233148"/>
+            <p:cNvPr id="170" name="pl170"/>
+            <p:cNvSpPr/>
+            <p:nvPr/>
+          </p:nvSpPr>
+          <p:spPr>
+            <a:xfrm>
+              <a:off x="1648017" y="5992190"/>
+              <a:ext cx="0" cy="2939814"/>
             </a:xfrm>
             <a:custGeom>
               <a:avLst/>
               <a:pathLst>
-                <a:path w="0" h="3233148">
+                <a:path w="0" h="2939814">
                   <a:moveTo>
-                    <a:pt x="0" y="3233148"/>
+                    <a:pt x="0" y="2939814"/>
                   </a:moveTo>
                   <a:lnTo>
                     <a:pt x="0" y="0"/>
@@ -8598,7 +9206,7 @@
                 </a:path>
               </a:pathLst>
             </a:custGeom>
-            <a:ln w="12934" cap="sq">
+            <a:ln w="12565" cap="sq">
               <a:solidFill>
                 <a:srgbClr val="000000">
                   <a:alpha val="100000"/>
@@ -8616,14 +9224,14 @@
         </p:sp>
         <p:sp>
           <p:nvSpPr>
-            <p:cNvPr id="157" name="tx157"/>
-            <p:cNvSpPr/>
-            <p:nvPr/>
-          </p:nvSpPr>
-          <p:spPr>
-            <a:xfrm>
-              <a:off x="2321432" y="8597179"/>
-              <a:ext cx="59330" cy="77978"/>
+            <p:cNvPr id="171" name="tx171"/>
+            <p:cNvSpPr/>
+            <p:nvPr/>
+          </p:nvSpPr>
+          <p:spPr>
+            <a:xfrm>
+              <a:off x="1532307" y="8759717"/>
+              <a:ext cx="57635" cy="75750"/>
             </a:xfrm>
             <a:prstGeom prst="rect">
               <a:avLst/>
@@ -8636,7 +9244,7 @@
             <a:p>
               <a:pPr algn="l" marL="0" marR="0" indent="0">
                 <a:lnSpc>
-                  <a:spcPts val="840"/>
+                  <a:spcPts val="816"/>
                 </a:lnSpc>
                 <a:spcBef>
                   <a:spcPts val="0"/>
@@ -8646,7 +9254,7 @@
                 </a:spcAft>
               </a:pPr>
               <a:r>
-                <a:rPr sz="840">
+                <a:rPr sz="816">
                   <a:solidFill>
                     <a:srgbClr val="1A1A1A">
                       <a:alpha val="100000"/>
@@ -8662,14 +9270,14 @@
         </p:sp>
         <p:sp>
           <p:nvSpPr>
-            <p:cNvPr id="158" name="tx158"/>
-            <p:cNvSpPr/>
-            <p:nvPr/>
-          </p:nvSpPr>
-          <p:spPr>
-            <a:xfrm>
-              <a:off x="2262102" y="7452030"/>
-              <a:ext cx="118660" cy="77978"/>
+            <p:cNvPr id="172" name="tx172"/>
+            <p:cNvSpPr/>
+            <p:nvPr/>
+          </p:nvSpPr>
+          <p:spPr>
+            <a:xfrm>
+              <a:off x="1474672" y="7718464"/>
+              <a:ext cx="115270" cy="75750"/>
             </a:xfrm>
             <a:prstGeom prst="rect">
               <a:avLst/>
@@ -8682,7 +9290,7 @@
             <a:p>
               <a:pPr algn="l" marL="0" marR="0" indent="0">
                 <a:lnSpc>
-                  <a:spcPts val="840"/>
+                  <a:spcPts val="816"/>
                 </a:lnSpc>
                 <a:spcBef>
                   <a:spcPts val="0"/>
@@ -8692,7 +9300,7 @@
                 </a:spcAft>
               </a:pPr>
               <a:r>
-                <a:rPr sz="840">
+                <a:rPr sz="816">
                   <a:solidFill>
                     <a:srgbClr val="1A1A1A">
                       <a:alpha val="100000"/>
@@ -8708,14 +9316,14 @@
         </p:sp>
         <p:sp>
           <p:nvSpPr>
-            <p:cNvPr id="159" name="tx159"/>
-            <p:cNvSpPr/>
-            <p:nvPr/>
-          </p:nvSpPr>
-          <p:spPr>
-            <a:xfrm>
-              <a:off x="2202771" y="6306881"/>
-              <a:ext cx="177990" cy="77978"/>
+            <p:cNvPr id="173" name="tx173"/>
+            <p:cNvSpPr/>
+            <p:nvPr/>
+          </p:nvSpPr>
+          <p:spPr>
+            <a:xfrm>
+              <a:off x="1417037" y="6677211"/>
+              <a:ext cx="172905" cy="75750"/>
             </a:xfrm>
             <a:prstGeom prst="rect">
               <a:avLst/>
@@ -8728,7 +9336,7 @@
             <a:p>
               <a:pPr algn="l" marL="0" marR="0" indent="0">
                 <a:lnSpc>
-                  <a:spcPts val="840"/>
+                  <a:spcPts val="816"/>
                 </a:lnSpc>
                 <a:spcBef>
                   <a:spcPts val="0"/>
@@ -8738,7 +9346,7 @@
                 </a:spcAft>
               </a:pPr>
               <a:r>
-                <a:rPr sz="840">
+                <a:rPr sz="816">
                   <a:solidFill>
                     <a:srgbClr val="1A1A1A">
                       <a:alpha val="100000"/>
@@ -8754,29 +9362,29 @@
         </p:sp>
         <p:sp>
           <p:nvSpPr>
-            <p:cNvPr id="160" name="pl160"/>
-            <p:cNvSpPr/>
-            <p:nvPr/>
-          </p:nvSpPr>
-          <p:spPr>
-            <a:xfrm>
-              <a:off x="2407333" y="8636976"/>
-              <a:ext cx="33212" cy="0"/>
+            <p:cNvPr id="174" name="pl174"/>
+            <p:cNvSpPr/>
+            <p:nvPr/>
+          </p:nvSpPr>
+          <p:spPr>
+            <a:xfrm>
+              <a:off x="1615753" y="8798377"/>
+              <a:ext cx="32264" cy="0"/>
             </a:xfrm>
             <a:custGeom>
               <a:avLst/>
               <a:pathLst>
-                <a:path w="33212" h="0">
+                <a:path w="32264" h="0">
                   <a:moveTo>
                     <a:pt x="0" y="0"/>
                   </a:moveTo>
                   <a:lnTo>
-                    <a:pt x="33212" y="0"/>
+                    <a:pt x="32264" y="0"/>
                   </a:lnTo>
                 </a:path>
               </a:pathLst>
             </a:custGeom>
-            <a:ln w="12934" cap="flat">
+            <a:ln w="12565" cap="flat">
               <a:solidFill>
                 <a:srgbClr val="000000">
                   <a:alpha val="100000"/>
@@ -8794,29 +9402,29 @@
         </p:sp>
         <p:sp>
           <p:nvSpPr>
-            <p:cNvPr id="161" name="pl161"/>
-            <p:cNvSpPr/>
-            <p:nvPr/>
-          </p:nvSpPr>
-          <p:spPr>
-            <a:xfrm>
-              <a:off x="2407333" y="7491827"/>
-              <a:ext cx="33212" cy="0"/>
+            <p:cNvPr id="175" name="pl175"/>
+            <p:cNvSpPr/>
+            <p:nvPr/>
+          </p:nvSpPr>
+          <p:spPr>
+            <a:xfrm>
+              <a:off x="1615753" y="7757123"/>
+              <a:ext cx="32264" cy="0"/>
             </a:xfrm>
             <a:custGeom>
               <a:avLst/>
               <a:pathLst>
-                <a:path w="33212" h="0">
+                <a:path w="32264" h="0">
                   <a:moveTo>
                     <a:pt x="0" y="0"/>
                   </a:moveTo>
                   <a:lnTo>
-                    <a:pt x="33212" y="0"/>
+                    <a:pt x="32264" y="0"/>
                   </a:lnTo>
                 </a:path>
               </a:pathLst>
             </a:custGeom>
-            <a:ln w="12934" cap="flat">
+            <a:ln w="12565" cap="flat">
               <a:solidFill>
                 <a:srgbClr val="000000">
                   <a:alpha val="100000"/>
@@ -8834,29 +9442,29 @@
         </p:sp>
         <p:sp>
           <p:nvSpPr>
-            <p:cNvPr id="162" name="pl162"/>
-            <p:cNvSpPr/>
-            <p:nvPr/>
-          </p:nvSpPr>
-          <p:spPr>
-            <a:xfrm>
-              <a:off x="2407333" y="6346678"/>
-              <a:ext cx="33212" cy="0"/>
+            <p:cNvPr id="176" name="pl176"/>
+            <p:cNvSpPr/>
+            <p:nvPr/>
+          </p:nvSpPr>
+          <p:spPr>
+            <a:xfrm>
+              <a:off x="1615753" y="6715870"/>
+              <a:ext cx="32264" cy="0"/>
             </a:xfrm>
             <a:custGeom>
               <a:avLst/>
               <a:pathLst>
-                <a:path w="33212" h="0">
+                <a:path w="32264" h="0">
                   <a:moveTo>
                     <a:pt x="0" y="0"/>
                   </a:moveTo>
                   <a:lnTo>
-                    <a:pt x="33212" y="0"/>
+                    <a:pt x="32264" y="0"/>
                   </a:lnTo>
                 </a:path>
               </a:pathLst>
             </a:custGeom>
-            <a:ln w="12934" cap="flat">
+            <a:ln w="12565" cap="flat">
               <a:solidFill>
                 <a:srgbClr val="000000">
                   <a:alpha val="100000"/>
@@ -8874,29 +9482,29 @@
         </p:sp>
         <p:sp>
           <p:nvSpPr>
-            <p:cNvPr id="163" name="pl163"/>
-            <p:cNvSpPr/>
-            <p:nvPr/>
-          </p:nvSpPr>
-          <p:spPr>
-            <a:xfrm>
-              <a:off x="2440546" y="8783937"/>
-              <a:ext cx="4672577" cy="0"/>
+            <p:cNvPr id="177" name="pl177"/>
+            <p:cNvSpPr/>
+            <p:nvPr/>
+          </p:nvSpPr>
+          <p:spPr>
+            <a:xfrm>
+              <a:off x="1648017" y="8932005"/>
+              <a:ext cx="5166251" cy="0"/>
             </a:xfrm>
             <a:custGeom>
               <a:avLst/>
               <a:pathLst>
-                <a:path w="4672577" h="0">
+                <a:path w="5166251" h="0">
                   <a:moveTo>
                     <a:pt x="0" y="0"/>
                   </a:moveTo>
                   <a:lnTo>
-                    <a:pt x="4672577" y="0"/>
+                    <a:pt x="5166251" y="0"/>
                   </a:lnTo>
                 </a:path>
               </a:pathLst>
             </a:custGeom>
-            <a:ln w="12934" cap="sq">
+            <a:ln w="12565" cap="sq">
               <a:solidFill>
                 <a:srgbClr val="000000">
                   <a:alpha val="100000"/>
@@ -8914,21 +9522,21 @@
         </p:sp>
         <p:sp>
           <p:nvSpPr>
-            <p:cNvPr id="164" name="pl164"/>
-            <p:cNvSpPr/>
-            <p:nvPr/>
-          </p:nvSpPr>
-          <p:spPr>
-            <a:xfrm>
-              <a:off x="2577328" y="8783937"/>
-              <a:ext cx="0" cy="33212"/>
+            <p:cNvPr id="178" name="pl178"/>
+            <p:cNvSpPr/>
+            <p:nvPr/>
+          </p:nvSpPr>
+          <p:spPr>
+            <a:xfrm>
+              <a:off x="1799251" y="8932005"/>
+              <a:ext cx="0" cy="32264"/>
             </a:xfrm>
             <a:custGeom>
               <a:avLst/>
               <a:pathLst>
-                <a:path w="0" h="33212">
+                <a:path w="0" h="32264">
                   <a:moveTo>
-                    <a:pt x="0" y="33212"/>
+                    <a:pt x="0" y="32264"/>
                   </a:moveTo>
                   <a:lnTo>
                     <a:pt x="0" y="0"/>
@@ -8936,7 +9544,7 @@
                 </a:path>
               </a:pathLst>
             </a:custGeom>
-            <a:ln w="12934" cap="flat">
+            <a:ln w="12565" cap="flat">
               <a:solidFill>
                 <a:srgbClr val="000000">
                   <a:alpha val="100000"/>
@@ -8954,21 +9562,21 @@
         </p:sp>
         <p:sp>
           <p:nvSpPr>
-            <p:cNvPr id="165" name="pl165"/>
-            <p:cNvSpPr/>
-            <p:nvPr/>
-          </p:nvSpPr>
-          <p:spPr>
-            <a:xfrm>
-              <a:off x="3952019" y="8783937"/>
-              <a:ext cx="0" cy="33212"/>
+            <p:cNvPr id="179" name="pl179"/>
+            <p:cNvSpPr/>
+            <p:nvPr/>
+          </p:nvSpPr>
+          <p:spPr>
+            <a:xfrm>
+              <a:off x="3319184" y="8932005"/>
+              <a:ext cx="0" cy="32264"/>
             </a:xfrm>
             <a:custGeom>
               <a:avLst/>
               <a:pathLst>
-                <a:path w="0" h="33212">
+                <a:path w="0" h="32264">
                   <a:moveTo>
-                    <a:pt x="0" y="33212"/>
+                    <a:pt x="0" y="32264"/>
                   </a:moveTo>
                   <a:lnTo>
                     <a:pt x="0" y="0"/>
@@ -8976,7 +9584,7 @@
                 </a:path>
               </a:pathLst>
             </a:custGeom>
-            <a:ln w="12934" cap="flat">
+            <a:ln w="12565" cap="flat">
               <a:solidFill>
                 <a:srgbClr val="000000">
                   <a:alpha val="100000"/>
@@ -8994,21 +9602,21 @@
         </p:sp>
         <p:sp>
           <p:nvSpPr>
-            <p:cNvPr id="166" name="pl166"/>
-            <p:cNvSpPr/>
-            <p:nvPr/>
-          </p:nvSpPr>
-          <p:spPr>
-            <a:xfrm>
-              <a:off x="5326711" y="8783937"/>
-              <a:ext cx="0" cy="33212"/>
+            <p:cNvPr id="180" name="pl180"/>
+            <p:cNvSpPr/>
+            <p:nvPr/>
+          </p:nvSpPr>
+          <p:spPr>
+            <a:xfrm>
+              <a:off x="4839116" y="8932005"/>
+              <a:ext cx="0" cy="32264"/>
             </a:xfrm>
             <a:custGeom>
               <a:avLst/>
               <a:pathLst>
-                <a:path w="0" h="33212">
+                <a:path w="0" h="32264">
                   <a:moveTo>
-                    <a:pt x="0" y="33212"/>
+                    <a:pt x="0" y="32264"/>
                   </a:moveTo>
                   <a:lnTo>
                     <a:pt x="0" y="0"/>
@@ -9016,7 +9624,7 @@
                 </a:path>
               </a:pathLst>
             </a:custGeom>
-            <a:ln w="12934" cap="flat">
+            <a:ln w="12565" cap="flat">
               <a:solidFill>
                 <a:srgbClr val="000000">
                   <a:alpha val="100000"/>
@@ -9034,21 +9642,21 @@
         </p:sp>
         <p:sp>
           <p:nvSpPr>
-            <p:cNvPr id="167" name="pl167"/>
-            <p:cNvSpPr/>
-            <p:nvPr/>
-          </p:nvSpPr>
-          <p:spPr>
-            <a:xfrm>
-              <a:off x="6701403" y="8783937"/>
-              <a:ext cx="0" cy="33212"/>
+            <p:cNvPr id="181" name="pl181"/>
+            <p:cNvSpPr/>
+            <p:nvPr/>
+          </p:nvSpPr>
+          <p:spPr>
+            <a:xfrm>
+              <a:off x="6359049" y="8932005"/>
+              <a:ext cx="0" cy="32264"/>
             </a:xfrm>
             <a:custGeom>
               <a:avLst/>
               <a:pathLst>
-                <a:path w="0" h="33212">
+                <a:path w="0" h="32264">
                   <a:moveTo>
-                    <a:pt x="0" y="33212"/>
+                    <a:pt x="0" y="32264"/>
                   </a:moveTo>
                   <a:lnTo>
                     <a:pt x="0" y="0"/>
@@ -9056,7 +9664,7 @@
                 </a:path>
               </a:pathLst>
             </a:custGeom>
-            <a:ln w="12934" cap="flat">
+            <a:ln w="12565" cap="flat">
               <a:solidFill>
                 <a:srgbClr val="000000">
                   <a:alpha val="100000"/>
@@ -9074,14 +9682,14 @@
         </p:sp>
         <p:sp>
           <p:nvSpPr>
-            <p:cNvPr id="168" name="tx168"/>
-            <p:cNvSpPr/>
-            <p:nvPr/>
-          </p:nvSpPr>
-          <p:spPr>
-            <a:xfrm>
-              <a:off x="2547662" y="8842106"/>
-              <a:ext cx="59330" cy="77978"/>
+            <p:cNvPr id="182" name="tx182"/>
+            <p:cNvSpPr/>
+            <p:nvPr/>
+          </p:nvSpPr>
+          <p:spPr>
+            <a:xfrm>
+              <a:off x="1770433" y="8988511"/>
+              <a:ext cx="57635" cy="75750"/>
             </a:xfrm>
             <a:prstGeom prst="rect">
               <a:avLst/>
@@ -9094,7 +9702,7 @@
             <a:p>
               <a:pPr algn="l" marL="0" marR="0" indent="0">
                 <a:lnSpc>
-                  <a:spcPts val="840"/>
+                  <a:spcPts val="816"/>
                 </a:lnSpc>
                 <a:spcBef>
                   <a:spcPts val="0"/>
@@ -9104,7 +9712,7 @@
                 </a:spcAft>
               </a:pPr>
               <a:r>
-                <a:rPr sz="840">
+                <a:rPr sz="816">
                   <a:solidFill>
                     <a:srgbClr val="1A1A1A">
                       <a:alpha val="100000"/>
@@ -9120,14 +9728,14 @@
         </p:sp>
         <p:sp>
           <p:nvSpPr>
-            <p:cNvPr id="169" name="tx169"/>
-            <p:cNvSpPr/>
-            <p:nvPr/>
-          </p:nvSpPr>
-          <p:spPr>
-            <a:xfrm>
-              <a:off x="3892689" y="8842106"/>
-              <a:ext cx="118660" cy="77978"/>
+            <p:cNvPr id="183" name="tx183"/>
+            <p:cNvSpPr/>
+            <p:nvPr/>
+          </p:nvSpPr>
+          <p:spPr>
+            <a:xfrm>
+              <a:off x="3261548" y="8988511"/>
+              <a:ext cx="115270" cy="75750"/>
             </a:xfrm>
             <a:prstGeom prst="rect">
               <a:avLst/>
@@ -9140,7 +9748,7 @@
             <a:p>
               <a:pPr algn="l" marL="0" marR="0" indent="0">
                 <a:lnSpc>
-                  <a:spcPts val="840"/>
+                  <a:spcPts val="816"/>
                 </a:lnSpc>
                 <a:spcBef>
                   <a:spcPts val="0"/>
@@ -9150,7 +9758,7 @@
                 </a:spcAft>
               </a:pPr>
               <a:r>
-                <a:rPr sz="840">
+                <a:rPr sz="816">
                   <a:solidFill>
                     <a:srgbClr val="1A1A1A">
                       <a:alpha val="100000"/>
@@ -9166,14 +9774,14 @@
         </p:sp>
         <p:sp>
           <p:nvSpPr>
-            <p:cNvPr id="170" name="tx170"/>
-            <p:cNvSpPr/>
-            <p:nvPr/>
-          </p:nvSpPr>
-          <p:spPr>
-            <a:xfrm>
-              <a:off x="5267381" y="8842106"/>
-              <a:ext cx="118660" cy="77978"/>
+            <p:cNvPr id="184" name="tx184"/>
+            <p:cNvSpPr/>
+            <p:nvPr/>
+          </p:nvSpPr>
+          <p:spPr>
+            <a:xfrm>
+              <a:off x="4781481" y="8988511"/>
+              <a:ext cx="115270" cy="75750"/>
             </a:xfrm>
             <a:prstGeom prst="rect">
               <a:avLst/>
@@ -9186,7 +9794,7 @@
             <a:p>
               <a:pPr algn="l" marL="0" marR="0" indent="0">
                 <a:lnSpc>
-                  <a:spcPts val="840"/>
+                  <a:spcPts val="816"/>
                 </a:lnSpc>
                 <a:spcBef>
                   <a:spcPts val="0"/>
@@ -9196,7 +9804,7 @@
                 </a:spcAft>
               </a:pPr>
               <a:r>
-                <a:rPr sz="840">
+                <a:rPr sz="816">
                   <a:solidFill>
                     <a:srgbClr val="1A1A1A">
                       <a:alpha val="100000"/>
@@ -9212,14 +9820,14 @@
         </p:sp>
         <p:sp>
           <p:nvSpPr>
-            <p:cNvPr id="171" name="tx171"/>
-            <p:cNvSpPr/>
-            <p:nvPr/>
-          </p:nvSpPr>
-          <p:spPr>
-            <a:xfrm>
-              <a:off x="6642073" y="8842054"/>
-              <a:ext cx="118660" cy="78030"/>
+            <p:cNvPr id="185" name="tx185"/>
+            <p:cNvSpPr/>
+            <p:nvPr/>
+          </p:nvSpPr>
+          <p:spPr>
+            <a:xfrm>
+              <a:off x="6301414" y="8988461"/>
+              <a:ext cx="115270" cy="75801"/>
             </a:xfrm>
             <a:prstGeom prst="rect">
               <a:avLst/>
@@ -9232,7 +9840,7 @@
             <a:p>
               <a:pPr algn="l" marL="0" marR="0" indent="0">
                 <a:lnSpc>
-                  <a:spcPts val="840"/>
+                  <a:spcPts val="816"/>
                 </a:lnSpc>
                 <a:spcBef>
                   <a:spcPts val="0"/>
@@ -9242,7 +9850,7 @@
                 </a:spcAft>
               </a:pPr>
               <a:r>
-                <a:rPr sz="840">
+                <a:rPr sz="816">
                   <a:solidFill>
                     <a:srgbClr val="1A1A1A">
                       <a:alpha val="100000"/>
@@ -9258,14 +9866,14 @@
         </p:sp>
         <p:sp>
           <p:nvSpPr>
-            <p:cNvPr id="172" name="tx172"/>
-            <p:cNvSpPr/>
-            <p:nvPr/>
-          </p:nvSpPr>
-          <p:spPr>
-            <a:xfrm>
-              <a:off x="4302524" y="8974185"/>
-              <a:ext cx="948621" cy="97017"/>
+            <p:cNvPr id="186" name="tx186"/>
+            <p:cNvSpPr/>
+            <p:nvPr/>
+          </p:nvSpPr>
+          <p:spPr>
+            <a:xfrm>
+              <a:off x="3770384" y="9116817"/>
+              <a:ext cx="921517" cy="94245"/>
             </a:xfrm>
             <a:prstGeom prst="rect">
               <a:avLst/>
@@ -9278,7 +9886,7 @@
             <a:p>
               <a:pPr algn="l" marL="0" marR="0" indent="0">
                 <a:lnSpc>
-                  <a:spcPts val="1050"/>
+                  <a:spcPts val="1019"/>
                 </a:lnSpc>
                 <a:spcBef>
                   <a:spcPts val="0"/>
@@ -9288,7 +9896,7 @@
                 </a:spcAft>
               </a:pPr>
               <a:r>
-                <a:rPr sz="1050" b="1">
+                <a:rPr sz="1019" b="1">
                   <a:solidFill>
                     <a:srgbClr val="111111">
                       <a:alpha val="100000"/>
@@ -9304,14 +9912,14 @@
         </p:sp>
         <p:sp>
           <p:nvSpPr>
-            <p:cNvPr id="173" name="tx173"/>
+            <p:cNvPr id="187" name="tx187"/>
             <p:cNvSpPr/>
             <p:nvPr/>
           </p:nvSpPr>
           <p:spPr>
             <a:xfrm rot="-5400000">
-              <a:off x="1583483" y="7118008"/>
-              <a:ext cx="1017314" cy="98710"/>
+              <a:off x="815442" y="7414152"/>
+              <a:ext cx="988248" cy="95889"/>
             </a:xfrm>
             <a:prstGeom prst="rect">
               <a:avLst/>
@@ -9324,7 +9932,7 @@
             <a:p>
               <a:pPr algn="l" marL="0" marR="0" indent="0">
                 <a:lnSpc>
-                  <a:spcPts val="1050"/>
+                  <a:spcPts val="1019"/>
                 </a:lnSpc>
                 <a:spcBef>
                   <a:spcPts val="0"/>
@@ -9334,7 +9942,7 @@
                 </a:spcAft>
               </a:pPr>
               <a:r>
-                <a:rPr sz="1050" b="1">
+                <a:rPr sz="1019" b="1">
                   <a:solidFill>
                     <a:srgbClr val="111111">
                       <a:alpha val="100000"/>
@@ -9350,14 +9958,14 @@
         </p:sp>
         <p:sp>
           <p:nvSpPr>
-            <p:cNvPr id="174" name="tx174"/>
-            <p:cNvSpPr/>
-            <p:nvPr/>
-          </p:nvSpPr>
-          <p:spPr>
-            <a:xfrm>
-              <a:off x="1964814" y="5456263"/>
-              <a:ext cx="81226" cy="79157"/>
+            <p:cNvPr id="188" name="tx188"/>
+            <p:cNvSpPr/>
+            <p:nvPr/>
+          </p:nvSpPr>
+          <p:spPr>
+            <a:xfrm>
+              <a:off x="1648017" y="5272079"/>
+              <a:ext cx="1455134" cy="145407"/>
             </a:xfrm>
             <a:prstGeom prst="rect">
               <a:avLst/>
@@ -9370,7 +9978,7 @@
             <a:p>
               <a:pPr algn="l" marL="0" marR="0" indent="0">
                 <a:lnSpc>
-                  <a:spcPts val="1150"/>
+                  <a:spcPts val="1220"/>
                 </a:lnSpc>
                 <a:spcBef>
                   <a:spcPts val="0"/>
@@ -9380,7 +9988,53 @@
                 </a:spcAft>
               </a:pPr>
               <a:r>
-                <a:rPr sz="1150" b="1">
+                <a:rPr sz="1220" b="1">
+                  <a:solidFill>
+                    <a:srgbClr val="111111">
+                      <a:alpha val="100000"/>
+                    </a:srgbClr>
+                  </a:solidFill>
+                  <a:latin typeface="Arial"/>
+                  <a:cs typeface="Arial"/>
+                </a:rPr>
+                <a:t>Influence screening</a:t>
+              </a:r>
+            </a:p>
+          </p:txBody>
+        </p:sp>
+        <p:sp>
+          <p:nvSpPr>
+            <p:cNvPr id="189" name="tx189"/>
+            <p:cNvSpPr/>
+            <p:nvPr/>
+          </p:nvSpPr>
+          <p:spPr>
+            <a:xfrm>
+              <a:off x="1185677" y="5214517"/>
+              <a:ext cx="79107" cy="77092"/>
+            </a:xfrm>
+            <a:prstGeom prst="rect">
+              <a:avLst/>
+            </a:prstGeom>
+            <a:noFill/>
+          </p:spPr>
+          <p:txBody>
+            <a:bodyPr lIns="0" rIns="0" tIns="0" bIns="0" anchorCtr="1" anchor="ctr" wrap="none"/>
+            <a:lstStyle/>
+            <a:p>
+              <a:pPr algn="l" marL="0" marR="0" indent="0">
+                <a:lnSpc>
+                  <a:spcPts val="1120"/>
+                </a:lnSpc>
+                <a:spcBef>
+                  <a:spcPts val="0"/>
+                </a:spcBef>
+                <a:spcAft>
+                  <a:spcPts val="0"/>
+                </a:spcAft>
+              </a:pPr>
+              <a:r>
+                <a:rPr sz="1120" b="1">
                   <a:solidFill>
                     <a:srgbClr val="000000">
                       <a:alpha val="100000"/>
@@ -9396,14 +10050,14 @@
         </p:sp>
         <p:sp>
           <p:nvSpPr>
-            <p:cNvPr id="175" name="rc175"/>
-            <p:cNvSpPr/>
-            <p:nvPr/>
-          </p:nvSpPr>
-          <p:spPr>
-            <a:xfrm>
-              <a:off x="8450207" y="5550789"/>
-              <a:ext cx="4672577" cy="3233148"/>
+            <p:cNvPr id="190" name="rc190"/>
+            <p:cNvSpPr/>
+            <p:nvPr/>
+          </p:nvSpPr>
+          <p:spPr>
+            <a:xfrm>
+              <a:off x="8735671" y="5992190"/>
+              <a:ext cx="5166251" cy="2939814"/>
             </a:xfrm>
             <a:prstGeom prst="rect">
               <a:avLst/>
@@ -9422,21 +10076,21 @@
         </p:sp>
         <p:sp>
           <p:nvSpPr>
-            <p:cNvPr id="176" name="pl176"/>
-            <p:cNvSpPr/>
-            <p:nvPr/>
-          </p:nvSpPr>
-          <p:spPr>
-            <a:xfrm>
-              <a:off x="9928218" y="5550789"/>
-              <a:ext cx="0" cy="3233148"/>
+            <p:cNvPr id="191" name="pl191"/>
+            <p:cNvSpPr/>
+            <p:nvPr/>
+          </p:nvSpPr>
+          <p:spPr>
+            <a:xfrm>
+              <a:off x="8970500" y="5992190"/>
+              <a:ext cx="0" cy="2939814"/>
             </a:xfrm>
             <a:custGeom>
               <a:avLst/>
               <a:pathLst>
-                <a:path w="0" h="3233148">
+                <a:path w="0" h="2939814">
                   <a:moveTo>
-                    <a:pt x="0" y="3233148"/>
+                    <a:pt x="0" y="2939814"/>
                   </a:moveTo>
                   <a:lnTo>
                     <a:pt x="0" y="0"/>
@@ -9447,39 +10101,308 @@
                 </a:path>
               </a:pathLst>
             </a:custGeom>
-            <a:ln w="21681" cap="flat">
-              <a:solidFill>
-                <a:srgbClr val="6E6E6E">
+            <a:ln w="8130" cap="flat">
+              <a:solidFill>
+                <a:srgbClr val="B0B0B0">
+                  <a:alpha val="34901"/>
+                </a:srgbClr>
+              </a:solidFill>
+              <a:prstDash val="solid"/>
+              <a:round/>
+            </a:ln>
+          </p:spPr>
+          <p:txBody>
+            <a:bodyPr/>
+            <a:lstStyle/>
+            <a:p/>
+          </p:txBody>
+        </p:sp>
+        <p:sp>
+          <p:nvSpPr>
+            <p:cNvPr id="192" name="pl192"/>
+            <p:cNvSpPr/>
+            <p:nvPr/>
+          </p:nvSpPr>
+          <p:spPr>
+            <a:xfrm>
+              <a:off x="10505522" y="5992190"/>
+              <a:ext cx="0" cy="2939814"/>
+            </a:xfrm>
+            <a:custGeom>
+              <a:avLst/>
+              <a:pathLst>
+                <a:path w="0" h="2939814">
+                  <a:moveTo>
+                    <a:pt x="0" y="2939814"/>
+                  </a:moveTo>
+                  <a:lnTo>
+                    <a:pt x="0" y="0"/>
+                  </a:lnTo>
+                  <a:lnTo>
+                    <a:pt x="0" y="0"/>
+                  </a:lnTo>
+                </a:path>
+              </a:pathLst>
+            </a:custGeom>
+            <a:ln w="8130" cap="flat">
+              <a:solidFill>
+                <a:srgbClr val="B0B0B0">
+                  <a:alpha val="34901"/>
+                </a:srgbClr>
+              </a:solidFill>
+              <a:prstDash val="solid"/>
+              <a:round/>
+            </a:ln>
+          </p:spPr>
+          <p:txBody>
+            <a:bodyPr/>
+            <a:lstStyle/>
+            <a:p/>
+          </p:txBody>
+        </p:sp>
+        <p:sp>
+          <p:nvSpPr>
+            <p:cNvPr id="193" name="pl193"/>
+            <p:cNvSpPr/>
+            <p:nvPr/>
+          </p:nvSpPr>
+          <p:spPr>
+            <a:xfrm>
+              <a:off x="12040543" y="5992190"/>
+              <a:ext cx="0" cy="2939814"/>
+            </a:xfrm>
+            <a:custGeom>
+              <a:avLst/>
+              <a:pathLst>
+                <a:path w="0" h="2939814">
+                  <a:moveTo>
+                    <a:pt x="0" y="2939814"/>
+                  </a:moveTo>
+                  <a:lnTo>
+                    <a:pt x="0" y="0"/>
+                  </a:lnTo>
+                  <a:lnTo>
+                    <a:pt x="0" y="0"/>
+                  </a:lnTo>
+                </a:path>
+              </a:pathLst>
+            </a:custGeom>
+            <a:ln w="8130" cap="flat">
+              <a:solidFill>
+                <a:srgbClr val="B0B0B0">
+                  <a:alpha val="34901"/>
+                </a:srgbClr>
+              </a:solidFill>
+              <a:prstDash val="solid"/>
+              <a:round/>
+            </a:ln>
+          </p:spPr>
+          <p:txBody>
+            <a:bodyPr/>
+            <a:lstStyle/>
+            <a:p/>
+          </p:txBody>
+        </p:sp>
+        <p:sp>
+          <p:nvSpPr>
+            <p:cNvPr id="194" name="pl194"/>
+            <p:cNvSpPr/>
+            <p:nvPr/>
+          </p:nvSpPr>
+          <p:spPr>
+            <a:xfrm>
+              <a:off x="13575564" y="5992190"/>
+              <a:ext cx="0" cy="2939814"/>
+            </a:xfrm>
+            <a:custGeom>
+              <a:avLst/>
+              <a:pathLst>
+                <a:path w="0" h="2939814">
+                  <a:moveTo>
+                    <a:pt x="0" y="2939814"/>
+                  </a:moveTo>
+                  <a:lnTo>
+                    <a:pt x="0" y="0"/>
+                  </a:lnTo>
+                  <a:lnTo>
+                    <a:pt x="0" y="0"/>
+                  </a:lnTo>
+                </a:path>
+              </a:pathLst>
+            </a:custGeom>
+            <a:ln w="8130" cap="flat">
+              <a:solidFill>
+                <a:srgbClr val="B0B0B0">
+                  <a:alpha val="34901"/>
+                </a:srgbClr>
+              </a:solidFill>
+              <a:prstDash val="solid"/>
+              <a:round/>
+            </a:ln>
+          </p:spPr>
+          <p:txBody>
+            <a:bodyPr/>
+            <a:lstStyle/>
+            <a:p/>
+          </p:txBody>
+        </p:sp>
+        <p:sp>
+          <p:nvSpPr>
+            <p:cNvPr id="195" name="rc195"/>
+            <p:cNvSpPr/>
+            <p:nvPr/>
+          </p:nvSpPr>
+          <p:spPr>
+            <a:xfrm>
+              <a:off x="8970500" y="6860135"/>
+              <a:ext cx="1048300" cy="503968"/>
+            </a:xfrm>
+            <a:prstGeom prst="rect">
+              <a:avLst/>
+            </a:prstGeom>
+            <a:solidFill>
+              <a:srgbClr val="80B1D3">
+                <a:alpha val="100000"/>
+              </a:srgbClr>
+            </a:solidFill>
+            <a:ln w="12565" cap="flat">
+              <a:solidFill>
+                <a:srgbClr val="FFFFFF">
                   <a:alpha val="100000"/>
                 </a:srgbClr>
               </a:solidFill>
-              <a:prstDash val="dash"/>
-              <a:round/>
-            </a:ln>
-          </p:spPr>
-          <p:txBody>
-            <a:bodyPr/>
-            <a:lstStyle/>
-            <a:p/>
-          </p:txBody>
-        </p:sp>
-        <p:sp>
-          <p:nvSpPr>
-            <p:cNvPr id="177" name="pl177"/>
-            <p:cNvSpPr/>
-            <p:nvPr/>
-          </p:nvSpPr>
-          <p:spPr>
-            <a:xfrm>
-              <a:off x="10719082" y="6713183"/>
-              <a:ext cx="0" cy="138563"/>
+              <a:prstDash val="solid"/>
+              <a:miter/>
+            </a:ln>
+          </p:spPr>
+          <p:txBody>
+            <a:bodyPr/>
+            <a:lstStyle/>
+            <a:p/>
+          </p:txBody>
+        </p:sp>
+        <p:sp>
+          <p:nvSpPr>
+            <p:cNvPr id="196" name="rc196"/>
+            <p:cNvSpPr/>
+            <p:nvPr/>
+          </p:nvSpPr>
+          <p:spPr>
+            <a:xfrm>
+              <a:off x="8970500" y="7560091"/>
+              <a:ext cx="1031338" cy="503968"/>
+            </a:xfrm>
+            <a:prstGeom prst="rect">
+              <a:avLst/>
+            </a:prstGeom>
+            <a:solidFill>
+              <a:srgbClr val="80B1D3">
+                <a:alpha val="100000"/>
+              </a:srgbClr>
+            </a:solidFill>
+            <a:ln w="12565" cap="flat">
+              <a:solidFill>
+                <a:srgbClr val="FFFFFF">
+                  <a:alpha val="100000"/>
+                </a:srgbClr>
+              </a:solidFill>
+              <a:prstDash val="solid"/>
+              <a:miter/>
+            </a:ln>
+          </p:spPr>
+          <p:txBody>
+            <a:bodyPr/>
+            <a:lstStyle/>
+            <a:p/>
+          </p:txBody>
+        </p:sp>
+        <p:sp>
+          <p:nvSpPr>
+            <p:cNvPr id="197" name="rc197"/>
+            <p:cNvSpPr/>
+            <p:nvPr/>
+          </p:nvSpPr>
+          <p:spPr>
+            <a:xfrm>
+              <a:off x="8970500" y="8260047"/>
+              <a:ext cx="816671" cy="503968"/>
+            </a:xfrm>
+            <a:prstGeom prst="rect">
+              <a:avLst/>
+            </a:prstGeom>
+            <a:solidFill>
+              <a:srgbClr val="80B1D3">
+                <a:alpha val="100000"/>
+              </a:srgbClr>
+            </a:solidFill>
+            <a:ln w="12565" cap="flat">
+              <a:solidFill>
+                <a:srgbClr val="FFFFFF">
+                  <a:alpha val="100000"/>
+                </a:srgbClr>
+              </a:solidFill>
+              <a:prstDash val="solid"/>
+              <a:miter/>
+            </a:ln>
+          </p:spPr>
+          <p:txBody>
+            <a:bodyPr/>
+            <a:lstStyle/>
+            <a:p/>
+          </p:txBody>
+        </p:sp>
+        <p:sp>
+          <p:nvSpPr>
+            <p:cNvPr id="198" name="rc198"/>
+            <p:cNvSpPr/>
+            <p:nvPr/>
+          </p:nvSpPr>
+          <p:spPr>
+            <a:xfrm>
+              <a:off x="8970500" y="6160179"/>
+              <a:ext cx="4696592" cy="503968"/>
+            </a:xfrm>
+            <a:prstGeom prst="rect">
+              <a:avLst/>
+            </a:prstGeom>
+            <a:solidFill>
+              <a:srgbClr val="FDB462">
+                <a:alpha val="100000"/>
+              </a:srgbClr>
+            </a:solidFill>
+            <a:ln w="12565" cap="flat">
+              <a:solidFill>
+                <a:srgbClr val="FFFFFF">
+                  <a:alpha val="100000"/>
+                </a:srgbClr>
+              </a:solidFill>
+              <a:prstDash val="solid"/>
+              <a:miter/>
+            </a:ln>
+          </p:spPr>
+          <p:txBody>
+            <a:bodyPr/>
+            <a:lstStyle/>
+            <a:p/>
+          </p:txBody>
+        </p:sp>
+        <p:sp>
+          <p:nvSpPr>
+            <p:cNvPr id="199" name="pl199"/>
+            <p:cNvSpPr/>
+            <p:nvPr/>
+          </p:nvSpPr>
+          <p:spPr>
+            <a:xfrm>
+              <a:off x="8735671" y="5992190"/>
+              <a:ext cx="0" cy="2939814"/>
             </a:xfrm>
             <a:custGeom>
               <a:avLst/>
               <a:pathLst>
-                <a:path w="0" h="138563">
+                <a:path w="0" h="2939814">
                   <a:moveTo>
-                    <a:pt x="0" y="138563"/>
+                    <a:pt x="0" y="2939814"/>
                   </a:moveTo>
                   <a:lnTo>
                     <a:pt x="0" y="0"/>
@@ -9487,627 +10410,7 @@
                 </a:path>
               </a:pathLst>
             </a:custGeom>
-            <a:ln w="23036" cap="flat">
-              <a:solidFill>
-                <a:srgbClr val="2C7FB8">
-                  <a:alpha val="100000"/>
-                </a:srgbClr>
-              </a:solidFill>
-              <a:prstDash val="solid"/>
-              <a:round/>
-            </a:ln>
-          </p:spPr>
-          <p:txBody>
-            <a:bodyPr/>
-            <a:lstStyle/>
-            <a:p/>
-          </p:txBody>
-        </p:sp>
-        <p:sp>
-          <p:nvSpPr>
-            <p:cNvPr id="178" name="pl178"/>
-            <p:cNvSpPr/>
-            <p:nvPr/>
-          </p:nvSpPr>
-          <p:spPr>
-            <a:xfrm>
-              <a:off x="8719761" y="6782464"/>
-              <a:ext cx="1999320" cy="0"/>
-            </a:xfrm>
-            <a:custGeom>
-              <a:avLst/>
-              <a:pathLst>
-                <a:path w="1999320" h="0">
-                  <a:moveTo>
-                    <a:pt x="1999320" y="0"/>
-                  </a:moveTo>
-                  <a:lnTo>
-                    <a:pt x="0" y="0"/>
-                  </a:lnTo>
-                </a:path>
-              </a:pathLst>
-            </a:custGeom>
-            <a:ln w="23036" cap="flat">
-              <a:solidFill>
-                <a:srgbClr val="2C7FB8">
-                  <a:alpha val="100000"/>
-                </a:srgbClr>
-              </a:solidFill>
-              <a:prstDash val="solid"/>
-              <a:round/>
-            </a:ln>
-          </p:spPr>
-          <p:txBody>
-            <a:bodyPr/>
-            <a:lstStyle/>
-            <a:p/>
-          </p:txBody>
-        </p:sp>
-        <p:sp>
-          <p:nvSpPr>
-            <p:cNvPr id="179" name="pl179"/>
-            <p:cNvSpPr/>
-            <p:nvPr/>
-          </p:nvSpPr>
-          <p:spPr>
-            <a:xfrm>
-              <a:off x="8719761" y="6713183"/>
-              <a:ext cx="0" cy="138563"/>
-            </a:xfrm>
-            <a:custGeom>
-              <a:avLst/>
-              <a:pathLst>
-                <a:path w="0" h="138563">
-                  <a:moveTo>
-                    <a:pt x="0" y="138563"/>
-                  </a:moveTo>
-                  <a:lnTo>
-                    <a:pt x="0" y="0"/>
-                  </a:lnTo>
-                </a:path>
-              </a:pathLst>
-            </a:custGeom>
-            <a:ln w="23036" cap="flat">
-              <a:solidFill>
-                <a:srgbClr val="2C7FB8">
-                  <a:alpha val="100000"/>
-                </a:srgbClr>
-              </a:solidFill>
-              <a:prstDash val="solid"/>
-              <a:round/>
-            </a:ln>
-          </p:spPr>
-          <p:txBody>
-            <a:bodyPr/>
-            <a:lstStyle/>
-            <a:p/>
-          </p:txBody>
-        </p:sp>
-        <p:sp>
-          <p:nvSpPr>
-            <p:cNvPr id="180" name="pl180"/>
-            <p:cNvSpPr/>
-            <p:nvPr/>
-          </p:nvSpPr>
-          <p:spPr>
-            <a:xfrm>
-              <a:off x="12120595" y="8252777"/>
-              <a:ext cx="0" cy="138563"/>
-            </a:xfrm>
-            <a:custGeom>
-              <a:avLst/>
-              <a:pathLst>
-                <a:path w="0" h="138563">
-                  <a:moveTo>
-                    <a:pt x="0" y="138563"/>
-                  </a:moveTo>
-                  <a:lnTo>
-                    <a:pt x="0" y="0"/>
-                  </a:lnTo>
-                </a:path>
-              </a:pathLst>
-            </a:custGeom>
-            <a:ln w="23036" cap="flat">
-              <a:solidFill>
-                <a:srgbClr val="2C7FB8">
-                  <a:alpha val="100000"/>
-                </a:srgbClr>
-              </a:solidFill>
-              <a:prstDash val="solid"/>
-              <a:round/>
-            </a:ln>
-          </p:spPr>
-          <p:txBody>
-            <a:bodyPr/>
-            <a:lstStyle/>
-            <a:p/>
-          </p:txBody>
-        </p:sp>
-        <p:sp>
-          <p:nvSpPr>
-            <p:cNvPr id="181" name="pl181"/>
-            <p:cNvSpPr/>
-            <p:nvPr/>
-          </p:nvSpPr>
-          <p:spPr>
-            <a:xfrm>
-              <a:off x="9267548" y="8322059"/>
-              <a:ext cx="2853046" cy="0"/>
-            </a:xfrm>
-            <a:custGeom>
-              <a:avLst/>
-              <a:pathLst>
-                <a:path w="2853046" h="0">
-                  <a:moveTo>
-                    <a:pt x="2853046" y="0"/>
-                  </a:moveTo>
-                  <a:lnTo>
-                    <a:pt x="0" y="0"/>
-                  </a:lnTo>
-                </a:path>
-              </a:pathLst>
-            </a:custGeom>
-            <a:ln w="23036" cap="flat">
-              <a:solidFill>
-                <a:srgbClr val="2C7FB8">
-                  <a:alpha val="100000"/>
-                </a:srgbClr>
-              </a:solidFill>
-              <a:prstDash val="solid"/>
-              <a:round/>
-            </a:ln>
-          </p:spPr>
-          <p:txBody>
-            <a:bodyPr/>
-            <a:lstStyle/>
-            <a:p/>
-          </p:txBody>
-        </p:sp>
-        <p:sp>
-          <p:nvSpPr>
-            <p:cNvPr id="182" name="pl182"/>
-            <p:cNvSpPr/>
-            <p:nvPr/>
-          </p:nvSpPr>
-          <p:spPr>
-            <a:xfrm>
-              <a:off x="9267548" y="8252777"/>
-              <a:ext cx="0" cy="138563"/>
-            </a:xfrm>
-            <a:custGeom>
-              <a:avLst/>
-              <a:pathLst>
-                <a:path w="0" h="138563">
-                  <a:moveTo>
-                    <a:pt x="0" y="138563"/>
-                  </a:moveTo>
-                  <a:lnTo>
-                    <a:pt x="0" y="0"/>
-                  </a:lnTo>
-                </a:path>
-              </a:pathLst>
-            </a:custGeom>
-            <a:ln w="23036" cap="flat">
-              <a:solidFill>
-                <a:srgbClr val="2C7FB8">
-                  <a:alpha val="100000"/>
-                </a:srgbClr>
-              </a:solidFill>
-              <a:prstDash val="solid"/>
-              <a:round/>
-            </a:ln>
-          </p:spPr>
-          <p:txBody>
-            <a:bodyPr/>
-            <a:lstStyle/>
-            <a:p/>
-          </p:txBody>
-        </p:sp>
-        <p:sp>
-          <p:nvSpPr>
-            <p:cNvPr id="183" name="pl183"/>
-            <p:cNvSpPr/>
-            <p:nvPr/>
-          </p:nvSpPr>
-          <p:spPr>
-            <a:xfrm>
-              <a:off x="12910395" y="5943385"/>
-              <a:ext cx="0" cy="138563"/>
-            </a:xfrm>
-            <a:custGeom>
-              <a:avLst/>
-              <a:pathLst>
-                <a:path w="0" h="138563">
-                  <a:moveTo>
-                    <a:pt x="0" y="138563"/>
-                  </a:moveTo>
-                  <a:lnTo>
-                    <a:pt x="0" y="0"/>
-                  </a:lnTo>
-                </a:path>
-              </a:pathLst>
-            </a:custGeom>
-            <a:ln w="23036" cap="flat">
-              <a:solidFill>
-                <a:srgbClr val="2C7FB8">
-                  <a:alpha val="100000"/>
-                </a:srgbClr>
-              </a:solidFill>
-              <a:prstDash val="solid"/>
-              <a:round/>
-            </a:ln>
-          </p:spPr>
-          <p:txBody>
-            <a:bodyPr/>
-            <a:lstStyle/>
-            <a:p/>
-          </p:txBody>
-        </p:sp>
-        <p:sp>
-          <p:nvSpPr>
-            <p:cNvPr id="184" name="pl184"/>
-            <p:cNvSpPr/>
-            <p:nvPr/>
-          </p:nvSpPr>
-          <p:spPr>
-            <a:xfrm>
-              <a:off x="9986901" y="6012667"/>
-              <a:ext cx="2923494" cy="0"/>
-            </a:xfrm>
-            <a:custGeom>
-              <a:avLst/>
-              <a:pathLst>
-                <a:path w="2923494" h="0">
-                  <a:moveTo>
-                    <a:pt x="2923494" y="0"/>
-                  </a:moveTo>
-                  <a:lnTo>
-                    <a:pt x="0" y="0"/>
-                  </a:lnTo>
-                </a:path>
-              </a:pathLst>
-            </a:custGeom>
-            <a:ln w="23036" cap="flat">
-              <a:solidFill>
-                <a:srgbClr val="2C7FB8">
-                  <a:alpha val="100000"/>
-                </a:srgbClr>
-              </a:solidFill>
-              <a:prstDash val="solid"/>
-              <a:round/>
-            </a:ln>
-          </p:spPr>
-          <p:txBody>
-            <a:bodyPr/>
-            <a:lstStyle/>
-            <a:p/>
-          </p:txBody>
-        </p:sp>
-        <p:sp>
-          <p:nvSpPr>
-            <p:cNvPr id="185" name="pl185"/>
-            <p:cNvSpPr/>
-            <p:nvPr/>
-          </p:nvSpPr>
-          <p:spPr>
-            <a:xfrm>
-              <a:off x="9986901" y="5943385"/>
-              <a:ext cx="0" cy="138563"/>
-            </a:xfrm>
-            <a:custGeom>
-              <a:avLst/>
-              <a:pathLst>
-                <a:path w="0" h="138563">
-                  <a:moveTo>
-                    <a:pt x="0" y="138563"/>
-                  </a:moveTo>
-                  <a:lnTo>
-                    <a:pt x="0" y="0"/>
-                  </a:lnTo>
-                </a:path>
-              </a:pathLst>
-            </a:custGeom>
-            <a:ln w="23036" cap="flat">
-              <a:solidFill>
-                <a:srgbClr val="2C7FB8">
-                  <a:alpha val="100000"/>
-                </a:srgbClr>
-              </a:solidFill>
-              <a:prstDash val="solid"/>
-              <a:round/>
-            </a:ln>
-          </p:spPr>
-          <p:txBody>
-            <a:bodyPr/>
-            <a:lstStyle/>
-            <a:p/>
-          </p:txBody>
-        </p:sp>
-        <p:sp>
-          <p:nvSpPr>
-            <p:cNvPr id="186" name="pl186"/>
-            <p:cNvSpPr/>
-            <p:nvPr/>
-          </p:nvSpPr>
-          <p:spPr>
-            <a:xfrm>
-              <a:off x="10468695" y="7482980"/>
-              <a:ext cx="0" cy="138563"/>
-            </a:xfrm>
-            <a:custGeom>
-              <a:avLst/>
-              <a:pathLst>
-                <a:path w="0" h="138563">
-                  <a:moveTo>
-                    <a:pt x="0" y="138563"/>
-                  </a:moveTo>
-                  <a:lnTo>
-                    <a:pt x="0" y="0"/>
-                  </a:lnTo>
-                </a:path>
-              </a:pathLst>
-            </a:custGeom>
-            <a:ln w="23036" cap="flat">
-              <a:solidFill>
-                <a:srgbClr val="2C7FB8">
-                  <a:alpha val="100000"/>
-                </a:srgbClr>
-              </a:solidFill>
-              <a:prstDash val="solid"/>
-              <a:round/>
-            </a:ln>
-          </p:spPr>
-          <p:txBody>
-            <a:bodyPr/>
-            <a:lstStyle/>
-            <a:p/>
-          </p:txBody>
-        </p:sp>
-        <p:sp>
-          <p:nvSpPr>
-            <p:cNvPr id="187" name="pl187"/>
-            <p:cNvSpPr/>
-            <p:nvPr/>
-          </p:nvSpPr>
-          <p:spPr>
-            <a:xfrm>
-              <a:off x="8662597" y="7552262"/>
-              <a:ext cx="1806098" cy="0"/>
-            </a:xfrm>
-            <a:custGeom>
-              <a:avLst/>
-              <a:pathLst>
-                <a:path w="1806098" h="0">
-                  <a:moveTo>
-                    <a:pt x="1806098" y="0"/>
-                  </a:moveTo>
-                  <a:lnTo>
-                    <a:pt x="0" y="0"/>
-                  </a:lnTo>
-                </a:path>
-              </a:pathLst>
-            </a:custGeom>
-            <a:ln w="23036" cap="flat">
-              <a:solidFill>
-                <a:srgbClr val="2C7FB8">
-                  <a:alpha val="100000"/>
-                </a:srgbClr>
-              </a:solidFill>
-              <a:prstDash val="solid"/>
-              <a:round/>
-            </a:ln>
-          </p:spPr>
-          <p:txBody>
-            <a:bodyPr/>
-            <a:lstStyle/>
-            <a:p/>
-          </p:txBody>
-        </p:sp>
-        <p:sp>
-          <p:nvSpPr>
-            <p:cNvPr id="188" name="pl188"/>
-            <p:cNvSpPr/>
-            <p:nvPr/>
-          </p:nvSpPr>
-          <p:spPr>
-            <a:xfrm>
-              <a:off x="8662597" y="7482980"/>
-              <a:ext cx="0" cy="138563"/>
-            </a:xfrm>
-            <a:custGeom>
-              <a:avLst/>
-              <a:pathLst>
-                <a:path w="0" h="138563">
-                  <a:moveTo>
-                    <a:pt x="0" y="138563"/>
-                  </a:moveTo>
-                  <a:lnTo>
-                    <a:pt x="0" y="0"/>
-                  </a:lnTo>
-                </a:path>
-              </a:pathLst>
-            </a:custGeom>
-            <a:ln w="23036" cap="flat">
-              <a:solidFill>
-                <a:srgbClr val="2C7FB8">
-                  <a:alpha val="100000"/>
-                </a:srgbClr>
-              </a:solidFill>
-              <a:prstDash val="solid"/>
-              <a:round/>
-            </a:ln>
-          </p:spPr>
-          <p:txBody>
-            <a:bodyPr/>
-            <a:lstStyle/>
-            <a:p/>
-          </p:txBody>
-        </p:sp>
-        <p:sp>
-          <p:nvSpPr>
-            <p:cNvPr id="189" name="pt189"/>
-            <p:cNvSpPr/>
-            <p:nvPr/>
-          </p:nvSpPr>
-          <p:spPr>
-            <a:xfrm>
-              <a:off x="9671764" y="6734807"/>
-              <a:ext cx="95314" cy="95314"/>
-            </a:xfrm>
-            <a:prstGeom prst="ellipse">
-              <a:avLst/>
-            </a:prstGeom>
-            <a:solidFill>
-              <a:srgbClr val="2C7FB8">
-                <a:alpha val="100000"/>
-              </a:srgbClr>
-            </a:solidFill>
-            <a:ln w="8590" cap="rnd">
-              <a:solidFill>
-                <a:srgbClr val="2C7FB8">
-                  <a:alpha val="100000"/>
-                </a:srgbClr>
-              </a:solidFill>
-              <a:prstDash val="solid"/>
-              <a:round/>
-            </a:ln>
-          </p:spPr>
-          <p:txBody>
-            <a:bodyPr/>
-            <a:lstStyle/>
-            <a:p/>
-          </p:txBody>
-        </p:sp>
-        <p:sp>
-          <p:nvSpPr>
-            <p:cNvPr id="190" name="pt190"/>
-            <p:cNvSpPr/>
-            <p:nvPr/>
-          </p:nvSpPr>
-          <p:spPr>
-            <a:xfrm>
-              <a:off x="10646414" y="8274401"/>
-              <a:ext cx="95314" cy="95314"/>
-            </a:xfrm>
-            <a:prstGeom prst="ellipse">
-              <a:avLst/>
-            </a:prstGeom>
-            <a:solidFill>
-              <a:srgbClr val="2C7FB8">
-                <a:alpha val="100000"/>
-              </a:srgbClr>
-            </a:solidFill>
-            <a:ln w="8590" cap="rnd">
-              <a:solidFill>
-                <a:srgbClr val="2C7FB8">
-                  <a:alpha val="100000"/>
-                </a:srgbClr>
-              </a:solidFill>
-              <a:prstDash val="solid"/>
-              <a:round/>
-            </a:ln>
-          </p:spPr>
-          <p:txBody>
-            <a:bodyPr/>
-            <a:lstStyle/>
-            <a:p/>
-          </p:txBody>
-        </p:sp>
-        <p:sp>
-          <p:nvSpPr>
-            <p:cNvPr id="191" name="pt191"/>
-            <p:cNvSpPr/>
-            <p:nvPr/>
-          </p:nvSpPr>
-          <p:spPr>
-            <a:xfrm>
-              <a:off x="11400990" y="5965010"/>
-              <a:ext cx="95314" cy="95314"/>
-            </a:xfrm>
-            <a:prstGeom prst="ellipse">
-              <a:avLst/>
-            </a:prstGeom>
-            <a:solidFill>
-              <a:srgbClr val="2C7FB8">
-                <a:alpha val="100000"/>
-              </a:srgbClr>
-            </a:solidFill>
-            <a:ln w="8590" cap="rnd">
-              <a:solidFill>
-                <a:srgbClr val="2C7FB8">
-                  <a:alpha val="100000"/>
-                </a:srgbClr>
-              </a:solidFill>
-              <a:prstDash val="solid"/>
-              <a:round/>
-            </a:ln>
-          </p:spPr>
-          <p:txBody>
-            <a:bodyPr/>
-            <a:lstStyle/>
-            <a:p/>
-          </p:txBody>
-        </p:sp>
-        <p:sp>
-          <p:nvSpPr>
-            <p:cNvPr id="192" name="pt192"/>
-            <p:cNvSpPr/>
-            <p:nvPr/>
-          </p:nvSpPr>
-          <p:spPr>
-            <a:xfrm>
-              <a:off x="9517989" y="7504604"/>
-              <a:ext cx="95314" cy="95314"/>
-            </a:xfrm>
-            <a:prstGeom prst="ellipse">
-              <a:avLst/>
-            </a:prstGeom>
-            <a:solidFill>
-              <a:srgbClr val="2C7FB8">
-                <a:alpha val="100000"/>
-              </a:srgbClr>
-            </a:solidFill>
-            <a:ln w="8590" cap="rnd">
-              <a:solidFill>
-                <a:srgbClr val="2C7FB8">
-                  <a:alpha val="100000"/>
-                </a:srgbClr>
-              </a:solidFill>
-              <a:prstDash val="solid"/>
-              <a:round/>
-            </a:ln>
-          </p:spPr>
-          <p:txBody>
-            <a:bodyPr/>
-            <a:lstStyle/>
-            <a:p/>
-          </p:txBody>
-        </p:sp>
-        <p:sp>
-          <p:nvSpPr>
-            <p:cNvPr id="193" name="pl193"/>
-            <p:cNvSpPr/>
-            <p:nvPr/>
-          </p:nvSpPr>
-          <p:spPr>
-            <a:xfrm>
-              <a:off x="8450207" y="5550789"/>
-              <a:ext cx="0" cy="3233148"/>
-            </a:xfrm>
-            <a:custGeom>
-              <a:avLst/>
-              <a:pathLst>
-                <a:path w="0" h="3233148">
-                  <a:moveTo>
-                    <a:pt x="0" y="3233148"/>
-                  </a:moveTo>
-                  <a:lnTo>
-                    <a:pt x="0" y="0"/>
-                  </a:lnTo>
-                </a:path>
-              </a:pathLst>
-            </a:custGeom>
-            <a:ln w="12934" cap="sq">
+            <a:ln w="12565" cap="sq">
               <a:solidFill>
                 <a:srgbClr val="000000">
                   <a:alpha val="100000"/>
@@ -10125,14 +10428,14 @@
         </p:sp>
         <p:sp>
           <p:nvSpPr>
-            <p:cNvPr id="194" name="tx194"/>
-            <p:cNvSpPr/>
-            <p:nvPr/>
-          </p:nvSpPr>
-          <p:spPr>
-            <a:xfrm>
-              <a:off x="7418115" y="8260124"/>
-              <a:ext cx="972309" cy="100116"/>
+            <p:cNvPr id="200" name="tx200"/>
+            <p:cNvSpPr/>
+            <p:nvPr/>
+          </p:nvSpPr>
+          <p:spPr>
+            <a:xfrm>
+              <a:off x="7030211" y="8453080"/>
+              <a:ext cx="1647384" cy="96041"/>
             </a:xfrm>
             <a:prstGeom prst="rect">
               <a:avLst/>
@@ -10145,7 +10448,7 @@
             <a:p>
               <a:pPr algn="l" marL="0" marR="0" indent="0">
                 <a:lnSpc>
-                  <a:spcPts val="840"/>
+                  <a:spcPts val="816"/>
                 </a:lnSpc>
                 <a:spcBef>
                   <a:spcPts val="0"/>
@@ -10155,7 +10458,7 @@
                 </a:spcAft>
               </a:pPr>
               <a:r>
-                <a:rPr sz="840">
+                <a:rPr sz="816">
                   <a:solidFill>
                     <a:srgbClr val="1A1A1A">
                       <a:alpha val="100000"/>
@@ -10164,21 +10467,21 @@
                   <a:latin typeface="Arial"/>
                   <a:cs typeface="Arial"/>
                 </a:rPr>
-                <a:t>Current survey effort</a:t>
+                <a:t>Influence-filtered report-effort model</a:t>
               </a:r>
             </a:p>
           </p:txBody>
         </p:sp>
         <p:sp>
           <p:nvSpPr>
-            <p:cNvPr id="195" name="tx195"/>
-            <p:cNvSpPr/>
-            <p:nvPr/>
-          </p:nvSpPr>
-          <p:spPr>
-            <a:xfrm>
-              <a:off x="7376287" y="7491629"/>
-              <a:ext cx="1014137" cy="98814"/>
+            <p:cNvPr id="201" name="tx201"/>
+            <p:cNvSpPr/>
+            <p:nvPr/>
+          </p:nvSpPr>
+          <p:spPr>
+            <a:xfrm>
+              <a:off x="7375870" y="7772505"/>
+              <a:ext cx="1301725" cy="76661"/>
             </a:xfrm>
             <a:prstGeom prst="rect">
               <a:avLst/>
@@ -10191,7 +10494,7 @@
             <a:p>
               <a:pPr algn="l" marL="0" marR="0" indent="0">
                 <a:lnSpc>
-                  <a:spcPts val="840"/>
+                  <a:spcPts val="816"/>
                 </a:lnSpc>
                 <a:spcBef>
                   <a:spcPts val="0"/>
@@ -10201,7 +10504,7 @@
                 </a:spcAft>
               </a:pPr>
               <a:r>
-                <a:rPr sz="840">
+                <a:rPr sz="816">
                   <a:solidFill>
                     <a:srgbClr val="1A1A1A">
                       <a:alpha val="100000"/>
@@ -10210,21 +10513,21 @@
                   <a:latin typeface="Arial"/>
                   <a:cs typeface="Arial"/>
                 </a:rPr>
-                <a:t>Habitat heterogeneity</a:t>
+                <a:t>Alternative user-effort model</a:t>
               </a:r>
             </a:p>
           </p:txBody>
         </p:sp>
         <p:sp>
           <p:nvSpPr>
-            <p:cNvPr id="196" name="tx196"/>
-            <p:cNvSpPr/>
-            <p:nvPr/>
-          </p:nvSpPr>
-          <p:spPr>
-            <a:xfrm>
-              <a:off x="7335188" y="6720529"/>
-              <a:ext cx="1055236" cy="100116"/>
+            <p:cNvPr id="202" name="tx202"/>
+            <p:cNvSpPr/>
+            <p:nvPr/>
+          </p:nvSpPr>
+          <p:spPr>
+            <a:xfrm>
+              <a:off x="7439426" y="7051954"/>
+              <a:ext cx="1238169" cy="97256"/>
             </a:xfrm>
             <a:prstGeom prst="rect">
               <a:avLst/>
@@ -10237,7 +10540,7 @@
             <a:p>
               <a:pPr algn="l" marL="0" marR="0" indent="0">
                 <a:lnSpc>
-                  <a:spcPts val="840"/>
+                  <a:spcPts val="816"/>
                 </a:lnSpc>
                 <a:spcBef>
                   <a:spcPts val="0"/>
@@ -10247,7 +10550,7 @@
                 </a:spcAft>
               </a:pPr>
               <a:r>
-                <a:rPr sz="840">
+                <a:rPr sz="816">
                   <a:solidFill>
                     <a:srgbClr val="1A1A1A">
                       <a:alpha val="100000"/>
@@ -10256,21 +10559,21 @@
                   <a:latin typeface="Arial"/>
                   <a:cs typeface="Arial"/>
                 </a:rPr>
-                <a:t>Historical survey effort</a:t>
+                <a:t>Primary report-effort model</a:t>
               </a:r>
             </a:p>
           </p:txBody>
         </p:sp>
         <p:sp>
           <p:nvSpPr>
-            <p:cNvPr id="197" name="tx197"/>
-            <p:cNvSpPr/>
-            <p:nvPr/>
-          </p:nvSpPr>
-          <p:spPr>
-            <a:xfrm>
-              <a:off x="7649290" y="5951982"/>
-              <a:ext cx="741134" cy="98866"/>
+            <p:cNvPr id="203" name="tx203"/>
+            <p:cNvSpPr/>
+            <p:nvPr/>
+          </p:nvSpPr>
+          <p:spPr>
+            <a:xfrm>
+              <a:off x="7295161" y="6351998"/>
+              <a:ext cx="1382434" cy="97256"/>
             </a:xfrm>
             <a:prstGeom prst="rect">
               <a:avLst/>
@@ -10283,7 +10586,7 @@
             <a:p>
               <a:pPr algn="l" marL="0" marR="0" indent="0">
                 <a:lnSpc>
-                  <a:spcPts val="840"/>
+                  <a:spcPts val="816"/>
                 </a:lnSpc>
                 <a:spcBef>
                   <a:spcPts val="0"/>
@@ -10293,7 +10596,7 @@
                 </a:spcAft>
               </a:pPr>
               <a:r>
-                <a:rPr sz="840">
+                <a:rPr sz="816">
                   <a:solidFill>
                     <a:srgbClr val="1A1A1A">
                       <a:alpha val="100000"/>
@@ -10302,36 +10605,36 @@
                   <a:latin typeface="Arial"/>
                   <a:cs typeface="Arial"/>
                 </a:rPr>
-                <a:t>Per capita GDP</a:t>
+                <a:t>Count-based sensitivity model</a:t>
               </a:r>
             </a:p>
           </p:txBody>
         </p:sp>
         <p:sp>
           <p:nvSpPr>
-            <p:cNvPr id="198" name="pl198"/>
-            <p:cNvSpPr/>
-            <p:nvPr/>
-          </p:nvSpPr>
-          <p:spPr>
-            <a:xfrm>
-              <a:off x="8416994" y="8322059"/>
-              <a:ext cx="33212" cy="0"/>
+            <p:cNvPr id="204" name="pl204"/>
+            <p:cNvSpPr/>
+            <p:nvPr/>
+          </p:nvSpPr>
+          <p:spPr>
+            <a:xfrm>
+              <a:off x="8703407" y="8512031"/>
+              <a:ext cx="32264" cy="0"/>
             </a:xfrm>
             <a:custGeom>
               <a:avLst/>
               <a:pathLst>
-                <a:path w="33212" h="0">
+                <a:path w="32264" h="0">
                   <a:moveTo>
                     <a:pt x="0" y="0"/>
                   </a:moveTo>
                   <a:lnTo>
-                    <a:pt x="33212" y="0"/>
+                    <a:pt x="32264" y="0"/>
                   </a:lnTo>
                 </a:path>
               </a:pathLst>
             </a:custGeom>
-            <a:ln w="12934" cap="flat">
+            <a:ln w="12565" cap="flat">
               <a:solidFill>
                 <a:srgbClr val="000000">
                   <a:alpha val="100000"/>
@@ -10349,29 +10652,29 @@
         </p:sp>
         <p:sp>
           <p:nvSpPr>
-            <p:cNvPr id="199" name="pl199"/>
-            <p:cNvSpPr/>
-            <p:nvPr/>
-          </p:nvSpPr>
-          <p:spPr>
-            <a:xfrm>
-              <a:off x="8416994" y="7552262"/>
-              <a:ext cx="33212" cy="0"/>
+            <p:cNvPr id="205" name="pl205"/>
+            <p:cNvSpPr/>
+            <p:nvPr/>
+          </p:nvSpPr>
+          <p:spPr>
+            <a:xfrm>
+              <a:off x="8703407" y="7812075"/>
+              <a:ext cx="32264" cy="0"/>
             </a:xfrm>
             <a:custGeom>
               <a:avLst/>
               <a:pathLst>
-                <a:path w="33212" h="0">
+                <a:path w="32264" h="0">
                   <a:moveTo>
                     <a:pt x="0" y="0"/>
                   </a:moveTo>
                   <a:lnTo>
-                    <a:pt x="33212" y="0"/>
+                    <a:pt x="32264" y="0"/>
                   </a:lnTo>
                 </a:path>
               </a:pathLst>
             </a:custGeom>
-            <a:ln w="12934" cap="flat">
+            <a:ln w="12565" cap="flat">
               <a:solidFill>
                 <a:srgbClr val="000000">
                   <a:alpha val="100000"/>
@@ -10389,29 +10692,29 @@
         </p:sp>
         <p:sp>
           <p:nvSpPr>
-            <p:cNvPr id="200" name="pl200"/>
-            <p:cNvSpPr/>
-            <p:nvPr/>
-          </p:nvSpPr>
-          <p:spPr>
-            <a:xfrm>
-              <a:off x="8416994" y="6782464"/>
-              <a:ext cx="33212" cy="0"/>
+            <p:cNvPr id="206" name="pl206"/>
+            <p:cNvSpPr/>
+            <p:nvPr/>
+          </p:nvSpPr>
+          <p:spPr>
+            <a:xfrm>
+              <a:off x="8703407" y="7112119"/>
+              <a:ext cx="32264" cy="0"/>
             </a:xfrm>
             <a:custGeom>
               <a:avLst/>
               <a:pathLst>
-                <a:path w="33212" h="0">
+                <a:path w="32264" h="0">
                   <a:moveTo>
                     <a:pt x="0" y="0"/>
                   </a:moveTo>
                   <a:lnTo>
-                    <a:pt x="33212" y="0"/>
+                    <a:pt x="32264" y="0"/>
                   </a:lnTo>
                 </a:path>
               </a:pathLst>
             </a:custGeom>
-            <a:ln w="12934" cap="flat">
+            <a:ln w="12565" cap="flat">
               <a:solidFill>
                 <a:srgbClr val="000000">
                   <a:alpha val="100000"/>
@@ -10429,29 +10732,29 @@
         </p:sp>
         <p:sp>
           <p:nvSpPr>
-            <p:cNvPr id="201" name="pl201"/>
-            <p:cNvSpPr/>
-            <p:nvPr/>
-          </p:nvSpPr>
-          <p:spPr>
-            <a:xfrm>
-              <a:off x="8416994" y="6012667"/>
-              <a:ext cx="33212" cy="0"/>
+            <p:cNvPr id="207" name="pl207"/>
+            <p:cNvSpPr/>
+            <p:nvPr/>
+          </p:nvSpPr>
+          <p:spPr>
+            <a:xfrm>
+              <a:off x="8703407" y="6412163"/>
+              <a:ext cx="32264" cy="0"/>
             </a:xfrm>
             <a:custGeom>
               <a:avLst/>
               <a:pathLst>
-                <a:path w="33212" h="0">
+                <a:path w="32264" h="0">
                   <a:moveTo>
                     <a:pt x="0" y="0"/>
                   </a:moveTo>
                   <a:lnTo>
-                    <a:pt x="33212" y="0"/>
+                    <a:pt x="32264" y="0"/>
                   </a:lnTo>
                 </a:path>
               </a:pathLst>
             </a:custGeom>
-            <a:ln w="12934" cap="flat">
+            <a:ln w="12565" cap="flat">
               <a:solidFill>
                 <a:srgbClr val="000000">
                   <a:alpha val="100000"/>
@@ -10469,29 +10772,29 @@
         </p:sp>
         <p:sp>
           <p:nvSpPr>
-            <p:cNvPr id="202" name="pl202"/>
-            <p:cNvSpPr/>
-            <p:nvPr/>
-          </p:nvSpPr>
-          <p:spPr>
-            <a:xfrm>
-              <a:off x="8450207" y="8783937"/>
-              <a:ext cx="4672577" cy="0"/>
+            <p:cNvPr id="208" name="pl208"/>
+            <p:cNvSpPr/>
+            <p:nvPr/>
+          </p:nvSpPr>
+          <p:spPr>
+            <a:xfrm>
+              <a:off x="8735671" y="8932005"/>
+              <a:ext cx="5166251" cy="0"/>
             </a:xfrm>
             <a:custGeom>
               <a:avLst/>
               <a:pathLst>
-                <a:path w="4672577" h="0">
+                <a:path w="5166251" h="0">
                   <a:moveTo>
                     <a:pt x="0" y="0"/>
                   </a:moveTo>
                   <a:lnTo>
-                    <a:pt x="4672577" y="0"/>
+                    <a:pt x="5166251" y="0"/>
                   </a:lnTo>
                 </a:path>
               </a:pathLst>
             </a:custGeom>
-            <a:ln w="12934" cap="sq">
+            <a:ln w="12565" cap="sq">
               <a:solidFill>
                 <a:srgbClr val="000000">
                   <a:alpha val="100000"/>
@@ -10509,21 +10812,21 @@
         </p:sp>
         <p:sp>
           <p:nvSpPr>
-            <p:cNvPr id="203" name="pl203"/>
-            <p:cNvSpPr/>
-            <p:nvPr/>
-          </p:nvSpPr>
-          <p:spPr>
-            <a:xfrm>
-              <a:off x="9928218" y="8783937"/>
-              <a:ext cx="0" cy="33212"/>
+            <p:cNvPr id="209" name="pl209"/>
+            <p:cNvSpPr/>
+            <p:nvPr/>
+          </p:nvSpPr>
+          <p:spPr>
+            <a:xfrm>
+              <a:off x="8970500" y="8932005"/>
+              <a:ext cx="0" cy="32264"/>
             </a:xfrm>
             <a:custGeom>
               <a:avLst/>
               <a:pathLst>
-                <a:path w="0" h="33212">
+                <a:path w="0" h="32264">
                   <a:moveTo>
-                    <a:pt x="0" y="33212"/>
+                    <a:pt x="0" y="32264"/>
                   </a:moveTo>
                   <a:lnTo>
                     <a:pt x="0" y="0"/>
@@ -10531,7 +10834,7 @@
                 </a:path>
               </a:pathLst>
             </a:custGeom>
-            <a:ln w="12934" cap="flat">
+            <a:ln w="12565" cap="flat">
               <a:solidFill>
                 <a:srgbClr val="000000">
                   <a:alpha val="100000"/>
@@ -10549,21 +10852,21 @@
         </p:sp>
         <p:sp>
           <p:nvSpPr>
-            <p:cNvPr id="204" name="pl204"/>
-            <p:cNvSpPr/>
-            <p:nvPr/>
-          </p:nvSpPr>
-          <p:spPr>
-            <a:xfrm>
-              <a:off x="11411377" y="8783937"/>
-              <a:ext cx="0" cy="33212"/>
+            <p:cNvPr id="210" name="pl210"/>
+            <p:cNvSpPr/>
+            <p:nvPr/>
+          </p:nvSpPr>
+          <p:spPr>
+            <a:xfrm>
+              <a:off x="10505522" y="8932005"/>
+              <a:ext cx="0" cy="32264"/>
             </a:xfrm>
             <a:custGeom>
               <a:avLst/>
               <a:pathLst>
-                <a:path w="0" h="33212">
+                <a:path w="0" h="32264">
                   <a:moveTo>
-                    <a:pt x="0" y="33212"/>
+                    <a:pt x="0" y="32264"/>
                   </a:moveTo>
                   <a:lnTo>
                     <a:pt x="0" y="0"/>
@@ -10571,7 +10874,7 @@
                 </a:path>
               </a:pathLst>
             </a:custGeom>
-            <a:ln w="12934" cap="flat">
+            <a:ln w="12565" cap="flat">
               <a:solidFill>
                 <a:srgbClr val="000000">
                   <a:alpha val="100000"/>
@@ -10589,21 +10892,21 @@
         </p:sp>
         <p:sp>
           <p:nvSpPr>
-            <p:cNvPr id="205" name="pl205"/>
-            <p:cNvSpPr/>
-            <p:nvPr/>
-          </p:nvSpPr>
-          <p:spPr>
-            <a:xfrm>
-              <a:off x="12894537" y="8783937"/>
-              <a:ext cx="0" cy="33212"/>
+            <p:cNvPr id="211" name="pl211"/>
+            <p:cNvSpPr/>
+            <p:nvPr/>
+          </p:nvSpPr>
+          <p:spPr>
+            <a:xfrm>
+              <a:off x="12040543" y="8932005"/>
+              <a:ext cx="0" cy="32264"/>
             </a:xfrm>
             <a:custGeom>
               <a:avLst/>
               <a:pathLst>
-                <a:path w="0" h="33212">
+                <a:path w="0" h="32264">
                   <a:moveTo>
-                    <a:pt x="0" y="33212"/>
+                    <a:pt x="0" y="32264"/>
                   </a:moveTo>
                   <a:lnTo>
                     <a:pt x="0" y="0"/>
@@ -10611,7 +10914,7 @@
                 </a:path>
               </a:pathLst>
             </a:custGeom>
-            <a:ln w="12934" cap="flat">
+            <a:ln w="12565" cap="flat">
               <a:solidFill>
                 <a:srgbClr val="000000">
                   <a:alpha val="100000"/>
@@ -10629,14 +10932,54 @@
         </p:sp>
         <p:sp>
           <p:nvSpPr>
-            <p:cNvPr id="206" name="tx206"/>
-            <p:cNvSpPr/>
-            <p:nvPr/>
-          </p:nvSpPr>
-          <p:spPr>
-            <a:xfrm>
-              <a:off x="9854068" y="8842106"/>
-              <a:ext cx="148299" cy="77978"/>
+            <p:cNvPr id="212" name="pl212"/>
+            <p:cNvSpPr/>
+            <p:nvPr/>
+          </p:nvSpPr>
+          <p:spPr>
+            <a:xfrm>
+              <a:off x="13575564" y="8932005"/>
+              <a:ext cx="0" cy="32264"/>
+            </a:xfrm>
+            <a:custGeom>
+              <a:avLst/>
+              <a:pathLst>
+                <a:path w="0" h="32264">
+                  <a:moveTo>
+                    <a:pt x="0" y="32264"/>
+                  </a:moveTo>
+                  <a:lnTo>
+                    <a:pt x="0" y="0"/>
+                  </a:lnTo>
+                </a:path>
+              </a:pathLst>
+            </a:custGeom>
+            <a:ln w="12565" cap="flat">
+              <a:solidFill>
+                <a:srgbClr val="000000">
+                  <a:alpha val="100000"/>
+                </a:srgbClr>
+              </a:solidFill>
+              <a:prstDash val="solid"/>
+              <a:round/>
+            </a:ln>
+          </p:spPr>
+          <p:txBody>
+            <a:bodyPr/>
+            <a:lstStyle/>
+            <a:p/>
+          </p:txBody>
+        </p:sp>
+        <p:sp>
+          <p:nvSpPr>
+            <p:cNvPr id="213" name="tx213"/>
+            <p:cNvSpPr/>
+            <p:nvPr/>
+          </p:nvSpPr>
+          <p:spPr>
+            <a:xfrm>
+              <a:off x="8941683" y="8988511"/>
+              <a:ext cx="57635" cy="75750"/>
             </a:xfrm>
             <a:prstGeom prst="rect">
               <a:avLst/>
@@ -10649,7 +10992,7 @@
             <a:p>
               <a:pPr algn="l" marL="0" marR="0" indent="0">
                 <a:lnSpc>
-                  <a:spcPts val="840"/>
+                  <a:spcPts val="816"/>
                 </a:lnSpc>
                 <a:spcBef>
                   <a:spcPts val="0"/>
@@ -10659,7 +11002,7 @@
                 </a:spcAft>
               </a:pPr>
               <a:r>
-                <a:rPr sz="840">
+                <a:rPr sz="816">
                   <a:solidFill>
                     <a:srgbClr val="1A1A1A">
                       <a:alpha val="100000"/>
@@ -10668,21 +11011,21 @@
                   <a:latin typeface="Arial"/>
                   <a:cs typeface="Arial"/>
                 </a:rPr>
-                <a:t>0.0</a:t>
+                <a:t>0</a:t>
               </a:r>
             </a:p>
           </p:txBody>
         </p:sp>
         <p:sp>
           <p:nvSpPr>
-            <p:cNvPr id="207" name="tx207"/>
-            <p:cNvSpPr/>
-            <p:nvPr/>
-          </p:nvSpPr>
-          <p:spPr>
-            <a:xfrm>
-              <a:off x="11337228" y="8842106"/>
-              <a:ext cx="148299" cy="77978"/>
+            <p:cNvPr id="214" name="tx214"/>
+            <p:cNvSpPr/>
+            <p:nvPr/>
+          </p:nvSpPr>
+          <p:spPr>
+            <a:xfrm>
+              <a:off x="10419069" y="8988511"/>
+              <a:ext cx="172905" cy="75750"/>
             </a:xfrm>
             <a:prstGeom prst="rect">
               <a:avLst/>
@@ -10695,7 +11038,7 @@
             <a:p>
               <a:pPr algn="l" marL="0" marR="0" indent="0">
                 <a:lnSpc>
-                  <a:spcPts val="840"/>
+                  <a:spcPts val="816"/>
                 </a:lnSpc>
                 <a:spcBef>
                   <a:spcPts val="0"/>
@@ -10705,7 +11048,7 @@
                 </a:spcAft>
               </a:pPr>
               <a:r>
-                <a:rPr sz="840">
+                <a:rPr sz="816">
                   <a:solidFill>
                     <a:srgbClr val="1A1A1A">
                       <a:alpha val="100000"/>
@@ -10714,21 +11057,21 @@
                   <a:latin typeface="Arial"/>
                   <a:cs typeface="Arial"/>
                 </a:rPr>
-                <a:t>0.5</a:t>
+                <a:t>100</a:t>
               </a:r>
             </a:p>
           </p:txBody>
         </p:sp>
         <p:sp>
           <p:nvSpPr>
-            <p:cNvPr id="208" name="tx208"/>
-            <p:cNvSpPr/>
-            <p:nvPr/>
-          </p:nvSpPr>
-          <p:spPr>
-            <a:xfrm>
-              <a:off x="12820387" y="8842106"/>
-              <a:ext cx="148299" cy="77978"/>
+            <p:cNvPr id="215" name="tx215"/>
+            <p:cNvSpPr/>
+            <p:nvPr/>
+          </p:nvSpPr>
+          <p:spPr>
+            <a:xfrm>
+              <a:off x="11954090" y="8988511"/>
+              <a:ext cx="172905" cy="75750"/>
             </a:xfrm>
             <a:prstGeom prst="rect">
               <a:avLst/>
@@ -10741,7 +11084,7 @@
             <a:p>
               <a:pPr algn="l" marL="0" marR="0" indent="0">
                 <a:lnSpc>
-                  <a:spcPts val="840"/>
+                  <a:spcPts val="816"/>
                 </a:lnSpc>
                 <a:spcBef>
                   <a:spcPts val="0"/>
@@ -10751,7 +11094,7 @@
                 </a:spcAft>
               </a:pPr>
               <a:r>
-                <a:rPr sz="840">
+                <a:rPr sz="816">
                   <a:solidFill>
                     <a:srgbClr val="1A1A1A">
                       <a:alpha val="100000"/>
@@ -10760,21 +11103,21 @@
                   <a:latin typeface="Arial"/>
                   <a:cs typeface="Arial"/>
                 </a:rPr>
-                <a:t>1.0</a:t>
+                <a:t>200</a:t>
               </a:r>
             </a:p>
           </p:txBody>
         </p:sp>
         <p:sp>
           <p:nvSpPr>
-            <p:cNvPr id="209" name="tx209"/>
-            <p:cNvSpPr/>
-            <p:nvPr/>
-          </p:nvSpPr>
-          <p:spPr>
-            <a:xfrm>
-              <a:off x="9945375" y="8946057"/>
-              <a:ext cx="1682241" cy="125145"/>
+            <p:cNvPr id="216" name="tx216"/>
+            <p:cNvSpPr/>
+            <p:nvPr/>
+          </p:nvSpPr>
+          <p:spPr>
+            <a:xfrm>
+              <a:off x="13489111" y="8988461"/>
+              <a:ext cx="172905" cy="75801"/>
             </a:xfrm>
             <a:prstGeom prst="rect">
               <a:avLst/>
@@ -10787,7 +11130,7 @@
             <a:p>
               <a:pPr algn="l" marL="0" marR="0" indent="0">
                 <a:lnSpc>
-                  <a:spcPts val="1050"/>
+                  <a:spcPts val="816"/>
                 </a:lnSpc>
                 <a:spcBef>
                   <a:spcPts val="0"/>
@@ -10797,30 +11140,30 @@
                 </a:spcAft>
               </a:pPr>
               <a:r>
-                <a:rPr sz="1050" b="1">
+                <a:rPr sz="816">
                   <a:solidFill>
-                    <a:srgbClr val="111111">
+                    <a:srgbClr val="1A1A1A">
                       <a:alpha val="100000"/>
                     </a:srgbClr>
                   </a:solidFill>
                   <a:latin typeface="Arial"/>
                   <a:cs typeface="Arial"/>
                 </a:rPr>
-                <a:t>Sensitivity-model estimate</a:t>
+                <a:t>300</a:t>
               </a:r>
             </a:p>
           </p:txBody>
         </p:sp>
         <p:sp>
           <p:nvSpPr>
-            <p:cNvPr id="210" name="tx210"/>
-            <p:cNvSpPr/>
-            <p:nvPr/>
-          </p:nvSpPr>
-          <p:spPr>
-            <a:xfrm>
-              <a:off x="7245975" y="5429163"/>
-              <a:ext cx="89213" cy="106257"/>
+            <p:cNvPr id="217" name="tx217"/>
+            <p:cNvSpPr/>
+            <p:nvPr/>
+          </p:nvSpPr>
+          <p:spPr>
+            <a:xfrm>
+              <a:off x="11207252" y="9115172"/>
+              <a:ext cx="223089" cy="95889"/>
             </a:xfrm>
             <a:prstGeom prst="rect">
               <a:avLst/>
@@ -10833,7 +11176,7 @@
             <a:p>
               <a:pPr algn="l" marL="0" marR="0" indent="0">
                 <a:lnSpc>
-                  <a:spcPts val="1150"/>
+                  <a:spcPts val="1019"/>
                 </a:lnSpc>
                 <a:spcBef>
                   <a:spcPts val="0"/>
@@ -10843,7 +11186,261 @@
                 </a:spcAft>
               </a:pPr>
               <a:r>
-                <a:rPr sz="1150" b="1">
+                <a:rPr sz="1019" b="1">
+                  <a:solidFill>
+                    <a:srgbClr val="111111">
+                      <a:alpha val="100000"/>
+                    </a:srgbClr>
+                  </a:solidFill>
+                  <a:latin typeface="Arial"/>
+                  <a:cs typeface="Arial"/>
+                </a:rPr>
+                <a:t>AIC</a:t>
+              </a:r>
+            </a:p>
+          </p:txBody>
+        </p:sp>
+        <p:sp>
+          <p:nvSpPr>
+            <p:cNvPr id="218" name="rc218"/>
+            <p:cNvSpPr/>
+            <p:nvPr/>
+          </p:nvSpPr>
+          <p:spPr>
+            <a:xfrm>
+              <a:off x="10293743" y="5587495"/>
+              <a:ext cx="202765" cy="202765"/>
+            </a:xfrm>
+            <a:prstGeom prst="rect">
+              <a:avLst/>
+            </a:prstGeom>
+            <a:solidFill>
+              <a:srgbClr val="80B1D3">
+                <a:alpha val="100000"/>
+              </a:srgbClr>
+            </a:solidFill>
+            <a:ln w="12565" cap="flat">
+              <a:solidFill>
+                <a:srgbClr val="FFFFFF">
+                  <a:alpha val="100000"/>
+                </a:srgbClr>
+              </a:solidFill>
+              <a:prstDash val="solid"/>
+              <a:miter/>
+            </a:ln>
+          </p:spPr>
+          <p:txBody>
+            <a:bodyPr/>
+            <a:lstStyle/>
+            <a:p/>
+          </p:txBody>
+        </p:sp>
+        <p:sp>
+          <p:nvSpPr>
+            <p:cNvPr id="219" name="rc219"/>
+            <p:cNvSpPr/>
+            <p:nvPr/>
+          </p:nvSpPr>
+          <p:spPr>
+            <a:xfrm>
+              <a:off x="11252814" y="5587495"/>
+              <a:ext cx="202765" cy="202765"/>
+            </a:xfrm>
+            <a:prstGeom prst="rect">
+              <a:avLst/>
+            </a:prstGeom>
+            <a:solidFill>
+              <a:srgbClr val="FDB462">
+                <a:alpha val="100000"/>
+              </a:srgbClr>
+            </a:solidFill>
+            <a:ln w="12565" cap="flat">
+              <a:solidFill>
+                <a:srgbClr val="FFFFFF">
+                  <a:alpha val="100000"/>
+                </a:srgbClr>
+              </a:solidFill>
+              <a:prstDash val="solid"/>
+              <a:miter/>
+            </a:ln>
+          </p:spPr>
+          <p:txBody>
+            <a:bodyPr/>
+            <a:lstStyle/>
+            <a:p/>
+          </p:txBody>
+        </p:sp>
+        <p:sp>
+          <p:nvSpPr>
+            <p:cNvPr id="220" name="tx220"/>
+            <p:cNvSpPr/>
+            <p:nvPr/>
+          </p:nvSpPr>
+          <p:spPr>
+            <a:xfrm>
+              <a:off x="10569382" y="5649257"/>
+              <a:ext cx="610558" cy="76711"/>
+            </a:xfrm>
+            <a:prstGeom prst="rect">
+              <a:avLst/>
+            </a:prstGeom>
+            <a:noFill/>
+          </p:spPr>
+          <p:txBody>
+            <a:bodyPr lIns="0" rIns="0" tIns="0" bIns="0" anchorCtr="1" anchor="ctr" wrap="none"/>
+            <a:lstStyle/>
+            <a:p>
+              <a:pPr algn="l" marL="0" marR="0" indent="0">
+                <a:lnSpc>
+                  <a:spcPts val="816"/>
+                </a:lnSpc>
+                <a:spcBef>
+                  <a:spcPts val="0"/>
+                </a:spcBef>
+                <a:spcAft>
+                  <a:spcPts val="0"/>
+                </a:spcAft>
+              </a:pPr>
+              <a:r>
+                <a:rPr sz="816">
+                  <a:solidFill>
+                    <a:srgbClr val="000000">
+                      <a:alpha val="100000"/>
+                    </a:srgbClr>
+                  </a:solidFill>
+                  <a:latin typeface="Arial"/>
+                  <a:cs typeface="Arial"/>
+                </a:rPr>
+                <a:t>Gaussian LM</a:t>
+              </a:r>
+            </a:p>
+          </p:txBody>
+        </p:sp>
+        <p:sp>
+          <p:nvSpPr>
+            <p:cNvPr id="221" name="tx221"/>
+            <p:cNvSpPr/>
+            <p:nvPr/>
+          </p:nvSpPr>
+          <p:spPr>
+            <a:xfrm>
+              <a:off x="11528452" y="5629978"/>
+              <a:ext cx="823742" cy="95991"/>
+            </a:xfrm>
+            <a:prstGeom prst="rect">
+              <a:avLst/>
+            </a:prstGeom>
+            <a:noFill/>
+          </p:spPr>
+          <p:txBody>
+            <a:bodyPr lIns="0" rIns="0" tIns="0" bIns="0" anchorCtr="1" anchor="ctr" wrap="none"/>
+            <a:lstStyle/>
+            <a:p>
+              <a:pPr algn="l" marL="0" marR="0" indent="0">
+                <a:lnSpc>
+                  <a:spcPts val="816"/>
+                </a:lnSpc>
+                <a:spcBef>
+                  <a:spcPts val="0"/>
+                </a:spcBef>
+                <a:spcAft>
+                  <a:spcPts val="0"/>
+                </a:spcAft>
+              </a:pPr>
+              <a:r>
+                <a:rPr sz="816">
+                  <a:solidFill>
+                    <a:srgbClr val="000000">
+                      <a:alpha val="100000"/>
+                    </a:srgbClr>
+                  </a:solidFill>
+                  <a:latin typeface="Arial"/>
+                  <a:cs typeface="Arial"/>
+                </a:rPr>
+                <a:t>Negative binomial</a:t>
+              </a:r>
+            </a:p>
+          </p:txBody>
+        </p:sp>
+        <p:sp>
+          <p:nvSpPr>
+            <p:cNvPr id="222" name="tx222"/>
+            <p:cNvSpPr/>
+            <p:nvPr/>
+          </p:nvSpPr>
+          <p:spPr>
+            <a:xfrm>
+              <a:off x="8735671" y="5274122"/>
+              <a:ext cx="2178087" cy="143364"/>
+            </a:xfrm>
+            <a:prstGeom prst="rect">
+              <a:avLst/>
+            </a:prstGeom>
+            <a:noFill/>
+          </p:spPr>
+          <p:txBody>
+            <a:bodyPr lIns="0" rIns="0" tIns="0" bIns="0" anchorCtr="1" anchor="ctr" wrap="none"/>
+            <a:lstStyle/>
+            <a:p>
+              <a:pPr algn="l" marL="0" marR="0" indent="0">
+                <a:lnSpc>
+                  <a:spcPts val="1220"/>
+                </a:lnSpc>
+                <a:spcBef>
+                  <a:spcPts val="0"/>
+                </a:spcBef>
+                <a:spcAft>
+                  <a:spcPts val="0"/>
+                </a:spcAft>
+              </a:pPr>
+              <a:r>
+                <a:rPr sz="1220" b="1">
+                  <a:solidFill>
+                    <a:srgbClr val="111111">
+                      <a:alpha val="100000"/>
+                    </a:srgbClr>
+                  </a:solidFill>
+                  <a:latin typeface="Arial"/>
+                  <a:cs typeface="Arial"/>
+                </a:rPr>
+                <a:t>Candidate-model comparison</a:t>
+              </a:r>
+            </a:p>
+          </p:txBody>
+        </p:sp>
+        <p:sp>
+          <p:nvSpPr>
+            <p:cNvPr id="223" name="tx223"/>
+            <p:cNvSpPr/>
+            <p:nvPr/>
+          </p:nvSpPr>
+          <p:spPr>
+            <a:xfrm>
+              <a:off x="6943325" y="5188125"/>
+              <a:ext cx="86885" cy="103485"/>
+            </a:xfrm>
+            <a:prstGeom prst="rect">
+              <a:avLst/>
+            </a:prstGeom>
+            <a:noFill/>
+          </p:spPr>
+          <p:txBody>
+            <a:bodyPr lIns="0" rIns="0" tIns="0" bIns="0" anchorCtr="1" anchor="ctr" wrap="none"/>
+            <a:lstStyle/>
+            <a:p>
+              <a:pPr algn="l" marL="0" marR="0" indent="0">
+                <a:lnSpc>
+                  <a:spcPts val="1120"/>
+                </a:lnSpc>
+                <a:spcBef>
+                  <a:spcPts val="0"/>
+                </a:spcBef>
+                <a:spcAft>
+                  <a:spcPts val="0"/>
+                </a:spcAft>
+              </a:pPr>
+              <a:r>
+                <a:rPr sz="1120" b="1">
                   <a:solidFill>
                     <a:srgbClr val="000000">
                       <a:alpha val="100000"/>
